--- a/Meeting Slides/2026-09-20_ioni-visual.pptx
+++ b/Meeting Slides/2026-09-20_ioni-visual.pptx
@@ -12,6 +12,15 @@
     <p:sldId id="268" r:id="rId19"/>
     <p:sldId id="269" r:id="rId20"/>
     <p:sldId id="270" r:id="rId21"/>
+    <p:sldId id="271" r:id="rId22"/>
+    <p:sldId id="272" r:id="rId23"/>
+    <p:sldId id="273" r:id="rId24"/>
+    <p:sldId id="274" r:id="rId25"/>
+    <p:sldId id="275" r:id="rId26"/>
+    <p:sldId id="276" r:id="rId27"/>
+    <p:sldId id="277" r:id="rId28"/>
+    <p:sldId id="278" r:id="rId29"/>
+    <p:sldId id="279" r:id="rId30"/>
   </p:sldIdLst>
   <p:sldSz cx="9144000" cy="5143500" type="screen16x9"/>
   <p:notesSz cx="6858000" cy="9144000"/>
@@ -377,7 +386,271 @@
 </p:notes>
 </file>
 
+<file path=ppt/notesSlides/notesSlide10.xml><?xml version="1.0" encoding="utf-8"?>
+<p:notes xmlns:a="http://schemas.openxmlformats.org/drawingml/2006/main" xmlns:r="http://schemas.openxmlformats.org/officeDocument/2006/relationships" xmlns:p="http://schemas.openxmlformats.org/presentationml/2006/main">
+  <p:cSld>
+    <p:spTree>
+      <p:nvGrpSpPr>
+        <p:cNvPr id="1" name=""/>
+        <p:cNvGrpSpPr/>
+        <p:nvPr/>
+      </p:nvGrpSpPr>
+      <p:grpSpPr>
+        <a:xfrm>
+          <a:off x="0" y="0"/>
+          <a:ext cx="0" cy="0"/>
+          <a:chOff x="0" y="0"/>
+          <a:chExt cx="0" cy="0"/>
+        </a:xfrm>
+      </p:grpSpPr>
+      <p:sp>
+        <p:nvSpPr>
+          <p:cNvPr id="2" name="Slide Image Placeholder 1"/>
+          <p:cNvSpPr>
+            <a:spLocks noGrp="1" noRot="1" noChangeAspect="1"/>
+          </p:cNvSpPr>
+          <p:nvPr>
+            <p:ph type="sldImg"/>
+          </p:nvPr>
+        </p:nvSpPr>
+        <p:spPr/>
+      </p:sp>
+      <p:sp>
+        <p:nvSpPr>
+          <p:cNvPr id="3" name="Notes Placeholder 2"/>
+          <p:cNvSpPr>
+            <a:spLocks noGrp="1"/>
+          </p:cNvSpPr>
+          <p:nvPr>
+            <p:ph type="body" idx="1"/>
+          </p:nvPr>
+        </p:nvSpPr>
+        <p:spPr/>
+        <p:txBody>
+          <a:bodyPr/>
+          <a:lstStyle/>
+          <a:p>
+            <a:pPr marL="0" lvl="0" indent="0" algn="l">
+              <a:lnSpc>
+                <a:spcPct val="100000"/>
+              </a:lnSpc>
+              <a:spcBef>
+                <a:spcPts val="0"/>
+              </a:spcBef>
+              <a:spcAft>
+                <a:spcPts val="0"/>
+              </a:spcAft>
+              <a:buSzPts val="1100"/>
+              <a:buNone/>
+            </a:pPr>
+            <a:endParaRPr dirty="0"/>
+          </a:p>
+        </p:txBody>
+      </p:sp>
+      <p:sp>
+        <p:nvSpPr>
+          <p:cNvPr id="4" name="Slide Number Placeholder 3"/>
+          <p:cNvSpPr>
+            <a:spLocks noGrp="1"/>
+          </p:cNvSpPr>
+          <p:nvPr>
+            <p:ph type="sldNum" idx="5"/>
+          </p:nvPr>
+        </p:nvSpPr>
+        <p:spPr/>
+        <p:txBody>
+          <a:bodyPr/>
+          <a:lstStyle/>
+          <a:p>
+            <a:endParaRPr/>
+          </a:p>
+        </p:txBody>
+      </p:sp>
+    </p:spTree>
+  </p:cSld>
+  <p:clrMapOvr>
+    <a:masterClrMapping/>
+  </p:clrMapOvr>
+</p:notes>
+</file>
+
 <file path=ppt/notesSlides/notesSlide2.xml><?xml version="1.0" encoding="utf-8"?>
+<p:notes xmlns:a="http://schemas.openxmlformats.org/drawingml/2006/main" xmlns:r="http://schemas.openxmlformats.org/officeDocument/2006/relationships" xmlns:p="http://schemas.openxmlformats.org/presentationml/2006/main">
+  <p:cSld>
+    <p:spTree>
+      <p:nvGrpSpPr>
+        <p:cNvPr id="1" name=""/>
+        <p:cNvGrpSpPr/>
+        <p:nvPr/>
+      </p:nvGrpSpPr>
+      <p:grpSpPr>
+        <a:xfrm>
+          <a:off x="0" y="0"/>
+          <a:ext cx="0" cy="0"/>
+          <a:chOff x="0" y="0"/>
+          <a:chExt cx="0" cy="0"/>
+        </a:xfrm>
+      </p:grpSpPr>
+      <p:sp>
+        <p:nvSpPr>
+          <p:cNvPr id="2" name="Slide Image Placeholder 1"/>
+          <p:cNvSpPr>
+            <a:spLocks noGrp="1" noRot="1" noChangeAspect="1"/>
+          </p:cNvSpPr>
+          <p:nvPr>
+            <p:ph type="sldImg"/>
+          </p:nvPr>
+        </p:nvSpPr>
+        <p:spPr/>
+      </p:sp>
+      <p:sp>
+        <p:nvSpPr>
+          <p:cNvPr id="3" name="Notes Placeholder 2"/>
+          <p:cNvSpPr>
+            <a:spLocks noGrp="1"/>
+          </p:cNvSpPr>
+          <p:nvPr>
+            <p:ph type="body" idx="1"/>
+          </p:nvPr>
+        </p:nvSpPr>
+        <p:spPr/>
+        <p:txBody>
+          <a:bodyPr/>
+          <a:lstStyle/>
+          <a:p>
+            <a:pPr marL="0" lvl="0" indent="0" algn="l">
+              <a:lnSpc>
+                <a:spcPct val="100000"/>
+              </a:lnSpc>
+              <a:spcBef>
+                <a:spcPts val="0"/>
+              </a:spcBef>
+              <a:spcAft>
+                <a:spcPts val="0"/>
+              </a:spcAft>
+              <a:buSzPts val="1100"/>
+              <a:buNone/>
+            </a:pPr>
+            <a:endParaRPr dirty="0"/>
+          </a:p>
+        </p:txBody>
+      </p:sp>
+      <p:sp>
+        <p:nvSpPr>
+          <p:cNvPr id="4" name="Slide Number Placeholder 3"/>
+          <p:cNvSpPr>
+            <a:spLocks noGrp="1"/>
+          </p:cNvSpPr>
+          <p:nvPr>
+            <p:ph type="sldNum" idx="5"/>
+          </p:nvPr>
+        </p:nvSpPr>
+        <p:spPr/>
+        <p:txBody>
+          <a:bodyPr/>
+          <a:lstStyle/>
+          <a:p>
+            <a:endParaRPr/>
+          </a:p>
+        </p:txBody>
+      </p:sp>
+    </p:spTree>
+  </p:cSld>
+  <p:clrMapOvr>
+    <a:masterClrMapping/>
+  </p:clrMapOvr>
+</p:notes>
+</file>
+
+<file path=ppt/notesSlides/notesSlide3.xml><?xml version="1.0" encoding="utf-8"?>
+<p:notes xmlns:a="http://schemas.openxmlformats.org/drawingml/2006/main" xmlns:r="http://schemas.openxmlformats.org/officeDocument/2006/relationships" xmlns:p="http://schemas.openxmlformats.org/presentationml/2006/main">
+  <p:cSld>
+    <p:spTree>
+      <p:nvGrpSpPr>
+        <p:cNvPr id="1" name=""/>
+        <p:cNvGrpSpPr/>
+        <p:nvPr/>
+      </p:nvGrpSpPr>
+      <p:grpSpPr>
+        <a:xfrm>
+          <a:off x="0" y="0"/>
+          <a:ext cx="0" cy="0"/>
+          <a:chOff x="0" y="0"/>
+          <a:chExt cx="0" cy="0"/>
+        </a:xfrm>
+      </p:grpSpPr>
+      <p:sp>
+        <p:nvSpPr>
+          <p:cNvPr id="2" name="Slide Image Placeholder 1"/>
+          <p:cNvSpPr>
+            <a:spLocks noGrp="1" noRot="1" noChangeAspect="1"/>
+          </p:cNvSpPr>
+          <p:nvPr>
+            <p:ph type="sldImg"/>
+          </p:nvPr>
+        </p:nvSpPr>
+        <p:spPr/>
+      </p:sp>
+      <p:sp>
+        <p:nvSpPr>
+          <p:cNvPr id="3" name="Notes Placeholder 2"/>
+          <p:cNvSpPr>
+            <a:spLocks noGrp="1"/>
+          </p:cNvSpPr>
+          <p:nvPr>
+            <p:ph type="body" idx="1"/>
+          </p:nvPr>
+        </p:nvSpPr>
+        <p:spPr/>
+        <p:txBody>
+          <a:bodyPr/>
+          <a:lstStyle/>
+          <a:p>
+            <a:pPr marL="0" lvl="0" indent="0" algn="l">
+              <a:lnSpc>
+                <a:spcPct val="100000"/>
+              </a:lnSpc>
+              <a:spcBef>
+                <a:spcPts val="0"/>
+              </a:spcBef>
+              <a:spcAft>
+                <a:spcPts val="0"/>
+              </a:spcAft>
+              <a:buSzPts val="1100"/>
+              <a:buNone/>
+            </a:pPr>
+            <a:endParaRPr dirty="0"/>
+          </a:p>
+        </p:txBody>
+      </p:sp>
+      <p:sp>
+        <p:nvSpPr>
+          <p:cNvPr id="4" name="Slide Number Placeholder 3"/>
+          <p:cNvSpPr>
+            <a:spLocks noGrp="1"/>
+          </p:cNvSpPr>
+          <p:nvPr>
+            <p:ph type="sldNum" idx="5"/>
+          </p:nvPr>
+        </p:nvSpPr>
+        <p:spPr/>
+        <p:txBody>
+          <a:bodyPr/>
+          <a:lstStyle/>
+          <a:p>
+            <a:endParaRPr/>
+          </a:p>
+        </p:txBody>
+      </p:sp>
+    </p:spTree>
+  </p:cSld>
+  <p:clrMapOvr>
+    <a:masterClrMapping/>
+  </p:clrMapOvr>
+</p:notes>
+</file>
+
+<file path=ppt/notesSlides/notesSlide5.xml><?xml version="1.0" encoding="utf-8"?>
 <p:notes xmlns:a="http://schemas.openxmlformats.org/drawingml/2006/main" xmlns:r="http://schemas.openxmlformats.org/officeDocument/2006/relationships" xmlns:p="http://schemas.openxmlformats.org/presentationml/2006/main">
   <p:cSld>
     <p:spTree>
@@ -6110,6 +6383,818 @@
 </p:sld>
 </file>
 
+<file path=ppt/slides/slide10.xml><?xml version="1.0" encoding="utf-8"?>
+<p:sld xmlns:a="http://schemas.openxmlformats.org/drawingml/2006/main" xmlns:r="http://schemas.openxmlformats.org/officeDocument/2006/relationships" xmlns:p="http://schemas.openxmlformats.org/presentationml/2006/main">
+  <p:cSld>
+    <p:spTree>
+      <p:nvGrpSpPr>
+        <p:cNvPr id="1" name=""/>
+        <p:cNvGrpSpPr/>
+        <p:nvPr/>
+      </p:nvGrpSpPr>
+      <p:grpSpPr>
+        <a:xfrm>
+          <a:off x="0" y="0"/>
+          <a:ext cx="0" cy="0"/>
+          <a:chOff x="0" y="0"/>
+          <a:chExt cx="0" cy="0"/>
+        </a:xfrm>
+      </p:grpSpPr>
+      <p:sp>
+        <p:nvSpPr>
+          <p:cNvPr id="74" name="Google Shape;74;p16">
+            <a:extLst>
+              <a:ext uri="{FF2B5EF4-FFF2-40B4-BE49-F238E27FC236}">
+                <a16:creationId xmlns:a16="http://schemas.microsoft.com/office/drawing/2014/main" id="{F29C6079-CF50-3950-F7B3-37C5016CD1D4}"/>
+              </a:ext>
+            </a:extLst>
+          </p:cNvPr>
+          <p:cNvSpPr>
+            <a:spLocks noGrp="1"/>
+          </p:cNvSpPr>
+          <p:nvPr>
+            <p:ph type="title"/>
+          </p:nvPr>
+        </p:nvSpPr>
+        <p:spPr>
+          <a:xfrm>
+            <a:off x="695325" y="828675"/>
+            <a:ext cx="7953375" cy="619125"/>
+          </a:xfrm>
+          <a:prstGeom prst="rect">
+            <a:avLst/>
+          </a:prstGeom>
+          <a:noFill/>
+          <a:ln>
+            <a:noFill/>
+          </a:ln>
+        </p:spPr>
+        <p:txBody>
+          <a:bodyPr spcFirstLastPara="1" wrap="square" lIns="0" tIns="0" rIns="0" bIns="0" anchor="t">
+            <a:noAutofit/>
+          </a:bodyPr>
+          <a:lstStyle/>
+          <a:p>
+            <a:pPr marL="0" lvl="0" indent="0" algn="l">
+              <a:lnSpc>
+                <a:spcPct val="90000"/>
+              </a:lnSpc>
+              <a:spcBef>
+                <a:spcPts val="0"/>
+              </a:spcBef>
+              <a:spcAft>
+                <a:spcPts val="0"/>
+              </a:spcAft>
+              <a:buClr>
+                <a:schemeClr val="dk1"/>
+              </a:buClr>
+              <a:buSzPts val="3000"/>
+              <a:buFont typeface="Arial"/>
+              <a:buNone/>
+              <a:defRPr sz="3000" b="1">
+                <a:solidFill>
+                  <a:srgbClr val="000000"/>
+                </a:solidFill>
+                <a:latin typeface="Arial"/>
+                <a:ea typeface="Arial"/>
+                <a:cs typeface="Arial"/>
+              </a:defRPr>
+            </a:pPr>
+            <a:r>
+              <a:rPr sz="3000" b="1">
+                <a:solidFill>
+                  <a:srgbClr val="000000"/>
+                </a:solidFill>
+                <a:latin typeface="Arial"/>
+                <a:ea typeface="Arial"/>
+                <a:cs typeface="Arial"/>
+              </a:rPr>
+              <a:t>Cross-team research directions</a:t>
+            </a:r>
+            <a:endParaRPr/>
+          </a:p>
+        </p:txBody>
+      </p:sp>
+      <p:sp>
+        <p:nvSpPr>
+          <p:cNvPr id="76" name="Google Shape;76;p16">
+            <a:extLst>
+              <a:ext uri="{FF2B5EF4-FFF2-40B4-BE49-F238E27FC236}">
+                <a16:creationId xmlns:a16="http://schemas.microsoft.com/office/drawing/2014/main" id="{C50CF39B-81F0-A7BF-E4FB-18A3BA818FA8}"/>
+              </a:ext>
+            </a:extLst>
+          </p:cNvPr>
+          <p:cNvSpPr>
+            <a:spLocks noGrp="1"/>
+          </p:cNvSpPr>
+          <p:nvPr/>
+        </p:nvSpPr>
+        <p:spPr>
+          <a:xfrm>
+            <a:off x="0" y="-4697"/>
+            <a:ext cx="9144000" cy="580200"/>
+          </a:xfrm>
+          <a:prstGeom prst="rect">
+            <a:avLst/>
+          </a:prstGeom>
+          <a:solidFill>
+            <a:srgbClr val="11284C"/>
+          </a:solidFill>
+          <a:ln>
+            <a:noFill/>
+          </a:ln>
+        </p:spPr>
+        <p:txBody>
+          <a:bodyPr spcFirstLastPara="1" wrap="square" lIns="68575" tIns="34275" rIns="68575" bIns="34275" anchor="ctr">
+            <a:noAutofit/>
+          </a:bodyPr>
+          <a:lstStyle/>
+          <a:p>
+            <a:pPr marL="0" marR="0" lvl="0" indent="0" algn="ctr">
+              <a:lnSpc>
+                <a:spcPct val="100000"/>
+              </a:lnSpc>
+              <a:spcBef>
+                <a:spcPts val="0"/>
+              </a:spcBef>
+              <a:spcAft>
+                <a:spcPts val="0"/>
+              </a:spcAft>
+              <a:buClr>
+                <a:srgbClr val="000000"/>
+              </a:buClr>
+              <a:buSzPts val="1400"/>
+              <a:buFont typeface="Arial"/>
+              <a:buNone/>
+            </a:pPr>
+            <a:endParaRPr sz="1400" b="0" i="0" u="none" cap="none">
+              <a:solidFill>
+                <a:schemeClr val="lt1"/>
+              </a:solidFill>
+              <a:latin typeface="Arial"/>
+              <a:ea typeface="Arial"/>
+              <a:cs typeface="Arial"/>
+            </a:endParaRPr>
+          </a:p>
+        </p:txBody>
+      </p:sp>
+      <p:sp>
+        <p:nvSpPr>
+          <p:cNvPr id="77" name="Google Shape;77;p16">
+            <a:extLst>
+              <a:ext uri="{FF2B5EF4-FFF2-40B4-BE49-F238E27FC236}">
+                <a16:creationId xmlns:a16="http://schemas.microsoft.com/office/drawing/2014/main" id="{E003ECB4-68A0-AF72-FDFD-EB7C2DD32890}"/>
+              </a:ext>
+            </a:extLst>
+          </p:cNvPr>
+          <p:cNvSpPr>
+            <a:spLocks noGrp="1"/>
+          </p:cNvSpPr>
+          <p:nvPr/>
+        </p:nvSpPr>
+        <p:spPr>
+          <a:xfrm>
+            <a:off x="6349014" y="50217"/>
+            <a:ext cx="2739000" cy="500100"/>
+          </a:xfrm>
+          <a:prstGeom prst="rect">
+            <a:avLst/>
+          </a:prstGeom>
+          <a:noFill/>
+          <a:ln>
+            <a:noFill/>
+          </a:ln>
+        </p:spPr>
+        <p:txBody>
+          <a:bodyPr spcFirstLastPara="1" wrap="square" lIns="68575" tIns="34275" rIns="68575" bIns="34275" anchor="t">
+            <a:spAutoFit/>
+          </a:bodyPr>
+          <a:lstStyle/>
+          <a:p>
+            <a:pPr marL="0" marR="0" lvl="0" indent="0" algn="l">
+              <a:lnSpc>
+                <a:spcPct val="100000"/>
+              </a:lnSpc>
+              <a:spcBef>
+                <a:spcPts val="0"/>
+              </a:spcBef>
+              <a:spcAft>
+                <a:spcPts val="0"/>
+              </a:spcAft>
+              <a:buClr>
+                <a:srgbClr val="000000"/>
+              </a:buClr>
+              <a:buSzPts val="1400"/>
+              <a:buFont typeface="Arial"/>
+              <a:buNone/>
+            </a:pPr>
+            <a:r>
+              <a:rPr sz="1400" b="0" i="0" u="none" cap="none">
+                <a:solidFill>
+                  <a:schemeClr val="lt1"/>
+                </a:solidFill>
+                <a:latin typeface="Arial"/>
+                <a:ea typeface="Arial"/>
+                <a:cs typeface="Arial"/>
+              </a:rPr>
+              <a:t>Electric Propulsion Initiative - ION-I</a:t>
+            </a:r>
+            <a:endParaRPr sz="1100" b="0" i="0" u="none" cap="none">
+              <a:solidFill>
+                <a:srgbClr val="000000"/>
+              </a:solidFill>
+              <a:latin typeface="Arial"/>
+              <a:ea typeface="Arial"/>
+              <a:cs typeface="Arial"/>
+            </a:endParaRPr>
+          </a:p>
+        </p:txBody>
+      </p:sp>
+      <p:pic>
+        <p:nvPicPr>
+          <p:cNvPr id="94" name="Google Shape;78;p16"/>
+          <p:cNvPicPr>
+            <a:picLocks noChangeAspect="1"/>
+          </p:cNvPicPr>
+          <p:nvPr/>
+        </p:nvPicPr>
+        <p:blipFill rotWithShape="1">
+          <a:blip r:embed="rId3">
+            <a:alphaModFix/>
+          </a:blip>
+          <a:srcRect/>
+          <a:stretch/>
+        </p:blipFill>
+        <p:spPr>
+          <a:xfrm>
+            <a:off x="151161" y="50231"/>
+            <a:ext cx="326328" cy="470421"/>
+          </a:xfrm>
+          <a:prstGeom prst="rect">
+            <a:avLst/>
+          </a:prstGeom>
+          <a:ln>
+            <a:noFill/>
+          </a:ln>
+        </p:spPr>
+      </p:pic>
+      <p:pic>
+        <p:nvPicPr>
+          <p:cNvPr id="95" name="Google Shape;79;p16"/>
+          <p:cNvPicPr>
+            <a:picLocks noChangeAspect="1"/>
+          </p:cNvPicPr>
+          <p:nvPr/>
+        </p:nvPicPr>
+        <p:blipFill rotWithShape="1">
+          <a:blip r:embed="rId4">
+            <a:alphaModFix/>
+          </a:blip>
+          <a:srcRect/>
+          <a:stretch/>
+        </p:blipFill>
+        <p:spPr>
+          <a:xfrm>
+            <a:off x="628650" y="-103200"/>
+            <a:ext cx="533165" cy="754089"/>
+          </a:xfrm>
+          <a:prstGeom prst="rect">
+            <a:avLst/>
+          </a:prstGeom>
+          <a:ln>
+            <a:noFill/>
+          </a:ln>
+        </p:spPr>
+      </p:pic>
+      <p:cxnSp>
+        <p:nvCxnSpPr>
+          <p:cNvPr id="96" name="Google Shape;80;p16"/>
+          <p:cNvCxnSpPr/>
+          <p:nvPr/>
+        </p:nvCxnSpPr>
+        <p:spPr>
+          <a:xfrm>
+            <a:off x="589359" y="50231"/>
+            <a:ext cx="0" cy="454500"/>
+          </a:xfrm>
+          <a:prstGeom prst="straightConnector1">
+            <a:avLst/>
+          </a:prstGeom>
+          <a:ln w="19050" cap="flat">
+            <a:solidFill>
+              <a:schemeClr val="lt1"/>
+            </a:solidFill>
+            <a:prstDash val="solid"/>
+            <a:miter/>
+            <a:headEnd type="none" w="sm" len="sm"/>
+            <a:tailEnd type="none" w="sm" len="sm"/>
+          </a:ln>
+        </p:spPr>
+      </p:cxnSp>
+      <p:pic>
+        <p:nvPicPr>
+          <p:cNvPr id="97" name="Google Shape;81;p16"/>
+          <p:cNvPicPr>
+            <a:picLocks noChangeAspect="1"/>
+          </p:cNvPicPr>
+          <p:nvPr/>
+        </p:nvPicPr>
+        <p:blipFill rotWithShape="1">
+          <a:blip r:embed="rId5">
+            <a:alphaModFix/>
+          </a:blip>
+          <a:srcRect/>
+          <a:stretch/>
+        </p:blipFill>
+        <p:spPr>
+          <a:xfrm>
+            <a:off x="7732825" y="3955187"/>
+            <a:ext cx="1239726" cy="1753416"/>
+          </a:xfrm>
+          <a:prstGeom prst="rect">
+            <a:avLst/>
+          </a:prstGeom>
+          <a:ln>
+            <a:noFill/>
+          </a:ln>
+        </p:spPr>
+      </p:pic>
+      <p:sp>
+        <p:nvSpPr>
+          <p:cNvPr id="82" name="Google Shape;82;p16">
+            <a:extLst>
+              <a:ext uri="{FF2B5EF4-FFF2-40B4-BE49-F238E27FC236}">
+                <a16:creationId xmlns:a16="http://schemas.microsoft.com/office/drawing/2014/main" id="{D6B236AD-7344-733D-C8D4-7FFF4844EC55}"/>
+              </a:ext>
+            </a:extLst>
+          </p:cNvPr>
+          <p:cNvSpPr>
+            <a:spLocks noGrp="1"/>
+          </p:cNvSpPr>
+          <p:nvPr/>
+        </p:nvSpPr>
+        <p:spPr>
+          <a:xfrm>
+            <a:off x="8829675" y="4838700"/>
+            <a:ext cx="257175" cy="495270"/>
+          </a:xfrm>
+          <a:prstGeom prst="rect">
+            <a:avLst/>
+          </a:prstGeom>
+          <a:noFill/>
+          <a:ln>
+            <a:noFill/>
+          </a:ln>
+        </p:spPr>
+        <p:txBody>
+          <a:bodyPr spcFirstLastPara="1" wrap="square" lIns="0" tIns="0" rIns="0" bIns="0" anchor="t">
+            <a:noAutofit/>
+          </a:bodyPr>
+          <a:lstStyle/>
+          <a:p>
+            <a:pPr marL="0" marR="0" lvl="0" indent="0" algn="l">
+              <a:lnSpc>
+                <a:spcPct val="100000"/>
+              </a:lnSpc>
+              <a:spcBef>
+                <a:spcPts val="0"/>
+              </a:spcBef>
+              <a:spcAft>
+                <a:spcPts val="0"/>
+              </a:spcAft>
+              <a:buClr>
+                <a:srgbClr val="000000"/>
+              </a:buClr>
+              <a:buSzPts val="1400"/>
+              <a:buFont typeface="Arial"/>
+              <a:buNone/>
+              <a:defRPr sz="1125">
+                <a:solidFill>
+                  <a:srgbClr val="000000"/>
+                </a:solidFill>
+                <a:latin typeface="Arial"/>
+                <a:ea typeface="Arial"/>
+                <a:cs typeface="Arial"/>
+              </a:defRPr>
+            </a:pPr>
+            <a:r>
+              <a:rPr sz="1125" b="0" i="0" u="none" cap="none">
+                <a:solidFill>
+                  <a:srgbClr val="000000"/>
+                </a:solidFill>
+                <a:latin typeface="Arial"/>
+                <a:ea typeface="Arial"/>
+                <a:cs typeface="Arial"/>
+              </a:rPr>
+              <a:t>10</a:t>
+            </a:r>
+            <a:endParaRPr sz="1100" b="0" i="0" u="none" cap="none">
+              <a:solidFill>
+                <a:srgbClr val="000000"/>
+              </a:solidFill>
+              <a:latin typeface="Arial"/>
+              <a:ea typeface="Arial"/>
+              <a:cs typeface="Arial"/>
+            </a:endParaRPr>
+          </a:p>
+        </p:txBody>
+      </p:sp>
+      <p:sp>
+        <p:nvSpPr>
+          <p:cNvPr id="2" name="TextBox 1">
+            <a:extLst>
+              <a:ext uri="{FF2B5EF4-FFF2-40B4-BE49-F238E27FC236}">
+                <a16:creationId xmlns:a16="http://schemas.microsoft.com/office/drawing/2014/main" id="{C03B32CF-B251-58B0-7BAB-AFB6BCFA3973}"/>
+              </a:ext>
+            </a:extLst>
+          </p:cNvPr>
+          <p:cNvSpPr>
+            <a:spLocks noGrp="1"/>
+          </p:cNvSpPr>
+          <p:nvPr/>
+        </p:nvSpPr>
+        <p:spPr>
+          <a:xfrm>
+            <a:off x="209550" y="4810125"/>
+            <a:ext cx="2381250" cy="365760"/>
+          </a:xfrm>
+          <a:prstGeom prst="rect">
+            <a:avLst/>
+          </a:prstGeom>
+          <a:noFill/>
+        </p:spPr>
+        <p:txBody>
+          <a:bodyPr wrap="square" lIns="0" tIns="0" rIns="0" bIns="0">
+            <a:noAutofit/>
+          </a:bodyPr>
+          <a:lstStyle/>
+          <a:p>
+            <a:pPr marL="6350" marR="0" lvl="0" algn="l">
+              <a:lnSpc>
+                <a:spcPct val="90000"/>
+              </a:lnSpc>
+              <a:spcBef>
+                <a:spcPts val="800"/>
+              </a:spcBef>
+              <a:spcAft>
+                <a:spcPts val="0"/>
+              </a:spcAft>
+              <a:buClr>
+                <a:schemeClr val="dk1"/>
+              </a:buClr>
+              <a:buSzPts val="2100"/>
+              <a:buNone/>
+              <a:defRPr sz="1350">
+                <a:solidFill>
+                  <a:srgbClr val="000000"/>
+                </a:solidFill>
+                <a:latin typeface="Arial"/>
+                <a:ea typeface="Arial"/>
+                <a:cs typeface="Arial"/>
+              </a:defRPr>
+            </a:pPr>
+            <a:r>
+              <a:rPr sz="1350">
+                <a:solidFill>
+                  <a:srgbClr val="000000"/>
+                </a:solidFill>
+                <a:latin typeface="Arial"/>
+                <a:ea typeface="Arial"/>
+                <a:cs typeface="Arial"/>
+              </a:rPr>
+              <a:t>Fall 2026</a:t>
+            </a:r>
+            <a:endParaRPr sz="1400">
+              <a:solidFill>
+                <a:schemeClr val="dk1"/>
+              </a:solidFill>
+            </a:endParaRPr>
+          </a:p>
+        </p:txBody>
+      </p:sp>
+      <p:sp>
+        <p:nvSpPr>
+          <p:cNvPr id="86" name="Column 1 heading">
+            <a:extLst>
+              <a:ext uri="{FF2B5EF4-FFF2-40B4-BE49-F238E27FC236}">
+                <a16:creationId xmlns:a16="http://schemas.microsoft.com/office/drawing/2014/main" id="{2DE9F095-B1B7-4694-A4EB-65BCA882CC18}"/>
+              </a:ext>
+            </a:extLst>
+          </p:cNvPr>
+          <p:cNvSpPr>
+            <a:spLocks noGrp="1"/>
+          </p:cNvSpPr>
+          <p:nvPr/>
+        </p:nvSpPr>
+        <p:spPr>
+          <a:xfrm>
+            <a:off x="714375" y="1619250"/>
+            <a:ext cx="3686175" cy="361950"/>
+          </a:xfrm>
+          <a:prstGeom prst="rect">
+            <a:avLst/>
+          </a:prstGeom>
+          <a:noFill/>
+          <a:ln w="0">
+            <a:noFill/>
+          </a:ln>
+        </p:spPr>
+        <p:txBody>
+          <a:bodyPr wrap="square" lIns="0" tIns="0" rIns="0" bIns="0" anchor="t">
+            <a:noAutofit/>
+          </a:bodyPr>
+          <a:lstStyle/>
+          <a:p>
+            <a:pPr>
+              <a:lnSpc>
+                <a:spcPct val="108000"/>
+              </a:lnSpc>
+              <a:buNone/>
+              <a:defRPr sz="1875" b="1">
+                <a:solidFill>
+                  <a:srgbClr val="11284C"/>
+                </a:solidFill>
+                <a:latin typeface="Arial"/>
+                <a:ea typeface="Arial"/>
+                <a:cs typeface="Arial"/>
+              </a:defRPr>
+            </a:pPr>
+            <a:r>
+              <a:rPr sz="1875" b="1">
+                <a:solidFill>
+                  <a:srgbClr val="11284C"/>
+                </a:solidFill>
+                <a:latin typeface="Arial"/>
+                <a:ea typeface="Arial"/>
+                <a:cs typeface="Arial"/>
+              </a:rPr>
+              <a:t>Discharge Chamber</a:t>
+            </a:r>
+          </a:p>
+        </p:txBody>
+      </p:sp>
+      <p:sp>
+        <p:nvSpPr>
+          <p:cNvPr id="87" name="Column 1 body">
+            <a:extLst>
+              <a:ext uri="{FF2B5EF4-FFF2-40B4-BE49-F238E27FC236}">
+                <a16:creationId xmlns:a16="http://schemas.microsoft.com/office/drawing/2014/main" id="{BB69C427-3E75-49FD-B0A1-7642A355F868}"/>
+              </a:ext>
+            </a:extLst>
+          </p:cNvPr>
+          <p:cNvSpPr>
+            <a:spLocks noGrp="1"/>
+          </p:cNvSpPr>
+          <p:nvPr/>
+        </p:nvSpPr>
+        <p:spPr>
+          <a:xfrm>
+            <a:off x="714375" y="2066925"/>
+            <a:ext cx="3686175" cy="2428875"/>
+          </a:xfrm>
+          <a:prstGeom prst="rect">
+            <a:avLst/>
+          </a:prstGeom>
+          <a:noFill/>
+          <a:ln w="0">
+            <a:noFill/>
+          </a:ln>
+        </p:spPr>
+        <p:txBody>
+          <a:bodyPr wrap="square" lIns="0" tIns="0" rIns="0" bIns="0" anchor="t">
+            <a:noAutofit/>
+          </a:bodyPr>
+          <a:lstStyle/>
+          <a:p>
+            <a:pPr marL="203200" indent="-127000">
+              <a:lnSpc>
+                <a:spcPct val="108000"/>
+              </a:lnSpc>
+              <a:spcAft>
+                <a:spcPts val="1200"/>
+              </a:spcAft>
+              <a:buChar char="•"/>
+              <a:defRPr sz="1650" b="0">
+                <a:solidFill>
+                  <a:srgbClr val="404040"/>
+                </a:solidFill>
+                <a:latin typeface="Arial"/>
+                <a:ea typeface="Arial"/>
+                <a:cs typeface="Arial"/>
+              </a:defRPr>
+            </a:pPr>
+            <a:r>
+              <a:rPr sz="1650" b="0">
+                <a:solidFill>
+                  <a:srgbClr val="404040"/>
+                </a:solidFill>
+                <a:latin typeface="Arial"/>
+                <a:ea typeface="Arial"/>
+                <a:cs typeface="Arial"/>
+              </a:rPr>
+              <a:t>Early scope: chamber and magnet geometry</a:t>
+            </a:r>
+          </a:p>
+          <a:p>
+            <a:pPr marL="203200" indent="-127000">
+              <a:lnSpc>
+                <a:spcPct val="108000"/>
+              </a:lnSpc>
+              <a:spcAft>
+                <a:spcPts val="1200"/>
+              </a:spcAft>
+              <a:buChar char="•"/>
+              <a:defRPr sz="1650" b="0">
+                <a:solidFill>
+                  <a:srgbClr val="404040"/>
+                </a:solidFill>
+                <a:latin typeface="Arial"/>
+                <a:ea typeface="Arial"/>
+                <a:cs typeface="Arial"/>
+              </a:defRPr>
+            </a:pPr>
+            <a:r>
+              <a:rPr sz="1650" b="0">
+                <a:solidFill>
+                  <a:srgbClr val="404040"/>
+                </a:solidFill>
+                <a:latin typeface="Arial"/>
+                <a:ea typeface="Arial"/>
+                <a:cs typeface="Arial"/>
+              </a:rPr>
+              <a:t>With analysis data: magnetic-field maps and profiles</a:t>
+            </a:r>
+          </a:p>
+        </p:txBody>
+      </p:sp>
+      <p:sp>
+        <p:nvSpPr>
+          <p:cNvPr id="88" name="Column 2 heading">
+            <a:extLst>
+              <a:ext uri="{FF2B5EF4-FFF2-40B4-BE49-F238E27FC236}">
+                <a16:creationId xmlns:a16="http://schemas.microsoft.com/office/drawing/2014/main" id="{CC567F5E-3CF7-498C-B1F7-936F2B5ECBC9}"/>
+              </a:ext>
+            </a:extLst>
+          </p:cNvPr>
+          <p:cNvSpPr>
+            <a:spLocks noGrp="1"/>
+          </p:cNvSpPr>
+          <p:nvPr/>
+        </p:nvSpPr>
+        <p:spPr>
+          <a:xfrm>
+            <a:off x="4762500" y="1619250"/>
+            <a:ext cx="3686175" cy="361950"/>
+          </a:xfrm>
+          <a:prstGeom prst="rect">
+            <a:avLst/>
+          </a:prstGeom>
+          <a:noFill/>
+          <a:ln w="0">
+            <a:noFill/>
+          </a:ln>
+        </p:spPr>
+        <p:txBody>
+          <a:bodyPr wrap="square" lIns="0" tIns="0" rIns="0" bIns="0" anchor="t">
+            <a:noAutofit/>
+          </a:bodyPr>
+          <a:lstStyle/>
+          <a:p>
+            <a:pPr>
+              <a:lnSpc>
+                <a:spcPct val="108000"/>
+              </a:lnSpc>
+              <a:buNone/>
+              <a:defRPr sz="1875" b="1">
+                <a:solidFill>
+                  <a:srgbClr val="11284C"/>
+                </a:solidFill>
+                <a:latin typeface="Arial"/>
+                <a:ea typeface="Arial"/>
+                <a:cs typeface="Arial"/>
+              </a:defRPr>
+            </a:pPr>
+            <a:r>
+              <a:rPr sz="1875" b="1">
+                <a:solidFill>
+                  <a:srgbClr val="11284C"/>
+                </a:solidFill>
+                <a:latin typeface="Arial"/>
+                <a:ea typeface="Arial"/>
+                <a:cs typeface="Arial"/>
+              </a:rPr>
+              <a:t>Ion Optics</a:t>
+            </a:r>
+          </a:p>
+        </p:txBody>
+      </p:sp>
+      <p:sp>
+        <p:nvSpPr>
+          <p:cNvPr id="89" name="Column 2 body">
+            <a:extLst>
+              <a:ext uri="{FF2B5EF4-FFF2-40B4-BE49-F238E27FC236}">
+                <a16:creationId xmlns:a16="http://schemas.microsoft.com/office/drawing/2014/main" id="{097F249D-5356-46EB-8DC4-2E57F868A9BB}"/>
+              </a:ext>
+            </a:extLst>
+          </p:cNvPr>
+          <p:cNvSpPr>
+            <a:spLocks noGrp="1"/>
+          </p:cNvSpPr>
+          <p:nvPr/>
+        </p:nvSpPr>
+        <p:spPr>
+          <a:xfrm>
+            <a:off x="4762500" y="2066925"/>
+            <a:ext cx="3686175" cy="2428875"/>
+          </a:xfrm>
+          <a:prstGeom prst="rect">
+            <a:avLst/>
+          </a:prstGeom>
+          <a:noFill/>
+          <a:ln w="0">
+            <a:noFill/>
+          </a:ln>
+        </p:spPr>
+        <p:txBody>
+          <a:bodyPr wrap="square" lIns="0" tIns="0" rIns="0" bIns="0" anchor="t">
+            <a:noAutofit/>
+          </a:bodyPr>
+          <a:lstStyle/>
+          <a:p>
+            <a:pPr marL="203200" indent="-127000">
+              <a:lnSpc>
+                <a:spcPct val="108000"/>
+              </a:lnSpc>
+              <a:spcAft>
+                <a:spcPts val="1200"/>
+              </a:spcAft>
+              <a:buChar char="•"/>
+              <a:defRPr sz="1650" b="0">
+                <a:solidFill>
+                  <a:srgbClr val="404040"/>
+                </a:solidFill>
+                <a:latin typeface="Arial"/>
+                <a:ea typeface="Arial"/>
+                <a:cs typeface="Arial"/>
+              </a:defRPr>
+            </a:pPr>
+            <a:r>
+              <a:rPr sz="1650" b="0">
+                <a:solidFill>
+                  <a:srgbClr val="404040"/>
+                </a:solidFill>
+                <a:latin typeface="Arial"/>
+                <a:ea typeface="Arial"/>
+                <a:cs typeface="Arial"/>
+              </a:rPr>
+              <a:t>Early scope: grid geometry and aperture alignment</a:t>
+            </a:r>
+          </a:p>
+          <a:p>
+            <a:pPr marL="203200" indent="-127000">
+              <a:lnSpc>
+                <a:spcPct val="108000"/>
+              </a:lnSpc>
+              <a:spcAft>
+                <a:spcPts val="1200"/>
+              </a:spcAft>
+              <a:buChar char="•"/>
+              <a:defRPr sz="1650" b="0">
+                <a:solidFill>
+                  <a:srgbClr val="404040"/>
+                </a:solidFill>
+                <a:latin typeface="Arial"/>
+                <a:ea typeface="Arial"/>
+                <a:cs typeface="Arial"/>
+              </a:defRPr>
+            </a:pPr>
+            <a:r>
+              <a:rPr sz="1650" b="0">
+                <a:solidFill>
+                  <a:srgbClr val="404040"/>
+                </a:solidFill>
+                <a:latin typeface="Arial"/>
+                <a:ea typeface="Arial"/>
+                <a:cs typeface="Arial"/>
+              </a:rPr>
+              <a:t>With analysis data: potential contours and ion trajectories</a:t>
+            </a:r>
+          </a:p>
+        </p:txBody>
+      </p:sp>
+    </p:spTree>
+    <p:extLst>
+      <p:ext uri="{BB962C8B-B14F-4D97-AF65-F5344CB8AC3E}">
+        <p14:creationId xmlns:p14="http://schemas.microsoft.com/office/powerpoint/2010/main" val="4031246533"/>
+      </p:ext>
+    </p:extLst>
+  </p:cSld>
+  <p:clrMapOvr>
+    <a:masterClrMapping/>
+  </p:clrMapOvr>
+</p:sld>
+</file>
+
 <file path=ppt/slides/slide12.xml><?xml version="1.0" encoding="utf-8"?>
 <p:sld xmlns:a="http://schemas.openxmlformats.org/drawingml/2006/main" xmlns:p="http://schemas.openxmlformats.org/presentationml/2006/main" xmlns:r="http://schemas.openxmlformats.org/officeDocument/2006/relationships">
   <p:cSld>
@@ -6370,7 +7455,7 @@
                 <a:ea typeface="Arial"/>
                 <a:cs typeface="Arial"/>
               </a:rPr>
-              <a:t>This week's goals</a:t>
+              <a:t>Agenda</a:t>
             </a:r>
             <a:endParaRPr/>
           </a:p>
@@ -6832,7 +7917,7 @@
                 <a:ea typeface="Arial"/>
                 <a:cs typeface="Arial"/>
               </a:rPr>
-              <a:t>Audit shared particle datasets and Gott &amp; Xu cathode geometry</a:t>
+              <a:t>Recap: kickoff &amp; where we stand</a:t>
             </a:r>
           </a:p>
           <a:p>
@@ -6862,7 +7947,7 @@
                 <a:ea typeface="Arial"/>
                 <a:cs typeface="Arial"/>
               </a:rPr>
-              <a:t>Define the engineering-geometry / field-data input format</a:t>
+              <a:t>This week's goals: data &amp; geometry, rendering environment</a:t>
             </a:r>
           </a:p>
           <a:p>
@@ -6892,7 +7977,7 @@
                 <a:ea typeface="Arial"/>
                 <a:cs typeface="Arial"/>
               </a:rPr>
-              <a:t>Paper track: scope candidate topics, pick one</a:t>
+              <a:t>Paper track &amp; coordinating with the main ION-I club</a:t>
             </a:r>
           </a:p>
           <a:p>
@@ -6922,7 +8007,7 @@
                 <a:ea typeface="Arial"/>
                 <a:cs typeface="Arial"/>
               </a:rPr>
-              <a:t>Deliverable: data &amp; geometry inventory + import plan; paper topic selected</a:t>
+              <a:t>Team split, logistics, and looking ahead to Weeks 3–4</a:t>
             </a:r>
           </a:p>
         </p:txBody>
@@ -7014,7 +8099,673 @@
                 <a:ea typeface="Arial"/>
                 <a:cs typeface="Arial"/>
               </a:rPr>
-              <a:t>Rough team split (4–5 people)</a:t>
+              <a:t>Recap: kickoff &amp; where we stand</a:t>
+            </a:r>
+            <a:endParaRPr/>
+          </a:p>
+        </p:txBody>
+      </p:sp>
+      <p:sp>
+        <p:nvSpPr>
+          <p:cNvPr id="76" name="Google Shape;76;p16">
+            <a:extLst>
+              <a:ext uri="{FF2B5EF4-FFF2-40B4-BE49-F238E27FC236}">
+                <a16:creationId xmlns:a16="http://schemas.microsoft.com/office/drawing/2014/main" id="{C50CF39B-81F0-A7BF-E4FB-18A3BA818FA8}"/>
+              </a:ext>
+            </a:extLst>
+          </p:cNvPr>
+          <p:cNvSpPr>
+            <a:spLocks noGrp="1"/>
+          </p:cNvSpPr>
+          <p:nvPr/>
+        </p:nvSpPr>
+        <p:spPr>
+          <a:xfrm>
+            <a:off x="0" y="-4697"/>
+            <a:ext cx="9144000" cy="580200"/>
+          </a:xfrm>
+          <a:prstGeom prst="rect">
+            <a:avLst/>
+          </a:prstGeom>
+          <a:solidFill>
+            <a:srgbClr val="11284C"/>
+          </a:solidFill>
+          <a:ln>
+            <a:noFill/>
+          </a:ln>
+        </p:spPr>
+        <p:txBody>
+          <a:bodyPr spcFirstLastPara="1" wrap="square" lIns="68575" tIns="34275" rIns="68575" bIns="34275" anchor="ctr">
+            <a:noAutofit/>
+          </a:bodyPr>
+          <a:lstStyle/>
+          <a:p>
+            <a:pPr marL="0" marR="0" lvl="0" indent="0" algn="ctr">
+              <a:lnSpc>
+                <a:spcPct val="100000"/>
+              </a:lnSpc>
+              <a:spcBef>
+                <a:spcPts val="0"/>
+              </a:spcBef>
+              <a:spcAft>
+                <a:spcPts val="0"/>
+              </a:spcAft>
+              <a:buClr>
+                <a:srgbClr val="000000"/>
+              </a:buClr>
+              <a:buSzPts val="1400"/>
+              <a:buFont typeface="Arial"/>
+              <a:buNone/>
+            </a:pPr>
+            <a:endParaRPr sz="1400" b="0" i="0" u="none" cap="none">
+              <a:solidFill>
+                <a:schemeClr val="lt1"/>
+              </a:solidFill>
+              <a:latin typeface="Arial"/>
+              <a:ea typeface="Arial"/>
+              <a:cs typeface="Arial"/>
+            </a:endParaRPr>
+          </a:p>
+        </p:txBody>
+      </p:sp>
+      <p:sp>
+        <p:nvSpPr>
+          <p:cNvPr id="77" name="Google Shape;77;p16">
+            <a:extLst>
+              <a:ext uri="{FF2B5EF4-FFF2-40B4-BE49-F238E27FC236}">
+                <a16:creationId xmlns:a16="http://schemas.microsoft.com/office/drawing/2014/main" id="{E003ECB4-68A0-AF72-FDFD-EB7C2DD32890}"/>
+              </a:ext>
+            </a:extLst>
+          </p:cNvPr>
+          <p:cNvSpPr>
+            <a:spLocks noGrp="1"/>
+          </p:cNvSpPr>
+          <p:nvPr/>
+        </p:nvSpPr>
+        <p:spPr>
+          <a:xfrm>
+            <a:off x="6349014" y="50217"/>
+            <a:ext cx="2739000" cy="500100"/>
+          </a:xfrm>
+          <a:prstGeom prst="rect">
+            <a:avLst/>
+          </a:prstGeom>
+          <a:noFill/>
+          <a:ln>
+            <a:noFill/>
+          </a:ln>
+        </p:spPr>
+        <p:txBody>
+          <a:bodyPr spcFirstLastPara="1" wrap="square" lIns="68575" tIns="34275" rIns="68575" bIns="34275" anchor="t">
+            <a:spAutoFit/>
+          </a:bodyPr>
+          <a:lstStyle/>
+          <a:p>
+            <a:pPr marL="0" marR="0" lvl="0" indent="0" algn="l">
+              <a:lnSpc>
+                <a:spcPct val="100000"/>
+              </a:lnSpc>
+              <a:spcBef>
+                <a:spcPts val="0"/>
+              </a:spcBef>
+              <a:spcAft>
+                <a:spcPts val="0"/>
+              </a:spcAft>
+              <a:buClr>
+                <a:srgbClr val="000000"/>
+              </a:buClr>
+              <a:buSzPts val="1400"/>
+              <a:buFont typeface="Arial"/>
+              <a:buNone/>
+            </a:pPr>
+            <a:r>
+              <a:rPr sz="1400" b="0" i="0" u="none" cap="none">
+                <a:solidFill>
+                  <a:schemeClr val="lt1"/>
+                </a:solidFill>
+                <a:latin typeface="Arial"/>
+                <a:ea typeface="Arial"/>
+                <a:cs typeface="Arial"/>
+              </a:rPr>
+              <a:t>Electric Propulsion Initiative - ION-I</a:t>
+            </a:r>
+            <a:endParaRPr sz="1100" b="0" i="0" u="none" cap="none">
+              <a:solidFill>
+                <a:srgbClr val="000000"/>
+              </a:solidFill>
+              <a:latin typeface="Arial"/>
+              <a:ea typeface="Arial"/>
+              <a:cs typeface="Arial"/>
+            </a:endParaRPr>
+          </a:p>
+        </p:txBody>
+      </p:sp>
+      <p:pic>
+        <p:nvPicPr>
+          <p:cNvPr id="92" name="Google Shape;78;p16"/>
+          <p:cNvPicPr>
+            <a:picLocks noChangeAspect="1"/>
+          </p:cNvPicPr>
+          <p:nvPr/>
+        </p:nvPicPr>
+        <p:blipFill rotWithShape="1">
+          <a:blip r:embed="rId2">
+            <a:alphaModFix/>
+          </a:blip>
+          <a:srcRect/>
+          <a:stretch/>
+        </p:blipFill>
+        <p:spPr>
+          <a:xfrm>
+            <a:off x="151161" y="50231"/>
+            <a:ext cx="326328" cy="470421"/>
+          </a:xfrm>
+          <a:prstGeom prst="rect">
+            <a:avLst/>
+          </a:prstGeom>
+          <a:ln>
+            <a:noFill/>
+          </a:ln>
+        </p:spPr>
+      </p:pic>
+      <p:pic>
+        <p:nvPicPr>
+          <p:cNvPr id="93" name="Google Shape;79;p16"/>
+          <p:cNvPicPr>
+            <a:picLocks noChangeAspect="1"/>
+          </p:cNvPicPr>
+          <p:nvPr/>
+        </p:nvPicPr>
+        <p:blipFill rotWithShape="1">
+          <a:blip r:embed="rId6">
+            <a:alphaModFix/>
+          </a:blip>
+          <a:srcRect/>
+          <a:stretch/>
+        </p:blipFill>
+        <p:spPr>
+          <a:xfrm>
+            <a:off x="628650" y="-103200"/>
+            <a:ext cx="533165" cy="754089"/>
+          </a:xfrm>
+          <a:prstGeom prst="rect">
+            <a:avLst/>
+          </a:prstGeom>
+          <a:ln>
+            <a:noFill/>
+          </a:ln>
+        </p:spPr>
+      </p:pic>
+      <p:cxnSp>
+        <p:nvCxnSpPr>
+          <p:cNvPr id="94" name="Google Shape;80;p16"/>
+          <p:cNvCxnSpPr/>
+          <p:nvPr/>
+        </p:nvCxnSpPr>
+        <p:spPr>
+          <a:xfrm>
+            <a:off x="589359" y="50231"/>
+            <a:ext cx="0" cy="454500"/>
+          </a:xfrm>
+          <a:prstGeom prst="straightConnector1">
+            <a:avLst/>
+          </a:prstGeom>
+          <a:ln w="19050" cap="flat">
+            <a:solidFill>
+              <a:schemeClr val="lt1"/>
+            </a:solidFill>
+            <a:prstDash val="solid"/>
+            <a:miter/>
+            <a:headEnd type="none" w="sm" len="sm"/>
+            <a:tailEnd type="none" w="sm" len="sm"/>
+          </a:ln>
+        </p:spPr>
+      </p:cxnSp>
+      <p:pic>
+        <p:nvPicPr>
+          <p:cNvPr id="95" name="Google Shape;81;p16"/>
+          <p:cNvPicPr>
+            <a:picLocks noChangeAspect="1"/>
+          </p:cNvPicPr>
+          <p:nvPr/>
+        </p:nvPicPr>
+        <p:blipFill rotWithShape="1">
+          <a:blip r:embed="rId5">
+            <a:alphaModFix/>
+          </a:blip>
+          <a:srcRect/>
+          <a:stretch/>
+        </p:blipFill>
+        <p:spPr>
+          <a:xfrm>
+            <a:off x="7732825" y="3955187"/>
+            <a:ext cx="1239726" cy="1753416"/>
+          </a:xfrm>
+          <a:prstGeom prst="rect">
+            <a:avLst/>
+          </a:prstGeom>
+          <a:ln>
+            <a:noFill/>
+          </a:ln>
+        </p:spPr>
+      </p:pic>
+      <p:sp>
+        <p:nvSpPr>
+          <p:cNvPr id="82" name="Google Shape;82;p16">
+            <a:extLst>
+              <a:ext uri="{FF2B5EF4-FFF2-40B4-BE49-F238E27FC236}">
+                <a16:creationId xmlns:a16="http://schemas.microsoft.com/office/drawing/2014/main" id="{D6B236AD-7344-733D-C8D4-7FFF4844EC55}"/>
+              </a:ext>
+            </a:extLst>
+          </p:cNvPr>
+          <p:cNvSpPr>
+            <a:spLocks noGrp="1"/>
+          </p:cNvSpPr>
+          <p:nvPr/>
+        </p:nvSpPr>
+        <p:spPr>
+          <a:xfrm>
+            <a:off x="8829675" y="4838700"/>
+            <a:ext cx="257175" cy="281910"/>
+          </a:xfrm>
+          <a:prstGeom prst="rect">
+            <a:avLst/>
+          </a:prstGeom>
+          <a:noFill/>
+          <a:ln>
+            <a:noFill/>
+          </a:ln>
+        </p:spPr>
+        <p:txBody>
+          <a:bodyPr spcFirstLastPara="1" wrap="square" lIns="0" tIns="0" rIns="0" bIns="0" anchor="t">
+            <a:noAutofit/>
+          </a:bodyPr>
+          <a:lstStyle/>
+          <a:p>
+            <a:pPr marL="0" marR="0" lvl="0" indent="0" algn="l">
+              <a:lnSpc>
+                <a:spcPct val="100000"/>
+              </a:lnSpc>
+              <a:spcBef>
+                <a:spcPts val="0"/>
+              </a:spcBef>
+              <a:spcAft>
+                <a:spcPts val="0"/>
+              </a:spcAft>
+              <a:buClr>
+                <a:srgbClr val="000000"/>
+              </a:buClr>
+              <a:buSzPts val="1400"/>
+              <a:buFont typeface="Arial"/>
+              <a:buNone/>
+              <a:defRPr sz="1125">
+                <a:solidFill>
+                  <a:srgbClr val="000000"/>
+                </a:solidFill>
+                <a:latin typeface="Arial"/>
+                <a:ea typeface="Arial"/>
+                <a:cs typeface="Arial"/>
+              </a:defRPr>
+            </a:pPr>
+            <a:r>
+              <a:rPr sz="1125" b="0" i="0" u="none" cap="none">
+                <a:solidFill>
+                  <a:srgbClr val="000000"/>
+                </a:solidFill>
+                <a:latin typeface="Arial"/>
+                <a:ea typeface="Arial"/>
+                <a:cs typeface="Arial"/>
+              </a:rPr>
+              <a:t>3</a:t>
+            </a:r>
+            <a:endParaRPr sz="1100" b="0" i="0" u="none" cap="none">
+              <a:solidFill>
+                <a:srgbClr val="000000"/>
+              </a:solidFill>
+              <a:latin typeface="Arial"/>
+              <a:ea typeface="Arial"/>
+              <a:cs typeface="Arial"/>
+            </a:endParaRPr>
+          </a:p>
+        </p:txBody>
+      </p:sp>
+      <p:sp>
+        <p:nvSpPr>
+          <p:cNvPr id="2" name="TextBox 1">
+            <a:extLst>
+              <a:ext uri="{FF2B5EF4-FFF2-40B4-BE49-F238E27FC236}">
+                <a16:creationId xmlns:a16="http://schemas.microsoft.com/office/drawing/2014/main" id="{C03B32CF-B251-58B0-7BAB-AFB6BCFA3973}"/>
+              </a:ext>
+            </a:extLst>
+          </p:cNvPr>
+          <p:cNvSpPr>
+            <a:spLocks noGrp="1"/>
+          </p:cNvSpPr>
+          <p:nvPr/>
+        </p:nvSpPr>
+        <p:spPr>
+          <a:xfrm>
+            <a:off x="209550" y="4810125"/>
+            <a:ext cx="2381250" cy="365760"/>
+          </a:xfrm>
+          <a:prstGeom prst="rect">
+            <a:avLst/>
+          </a:prstGeom>
+          <a:noFill/>
+        </p:spPr>
+        <p:txBody>
+          <a:bodyPr wrap="square" lIns="0" tIns="0" rIns="0" bIns="0">
+            <a:noAutofit/>
+          </a:bodyPr>
+          <a:lstStyle/>
+          <a:p>
+            <a:pPr marL="6350" marR="0" lvl="0" algn="l">
+              <a:lnSpc>
+                <a:spcPct val="90000"/>
+              </a:lnSpc>
+              <a:spcBef>
+                <a:spcPts val="800"/>
+              </a:spcBef>
+              <a:spcAft>
+                <a:spcPts val="0"/>
+              </a:spcAft>
+              <a:buClr>
+                <a:schemeClr val="dk1"/>
+              </a:buClr>
+              <a:buSzPts val="2100"/>
+              <a:buNone/>
+              <a:defRPr sz="1350">
+                <a:solidFill>
+                  <a:srgbClr val="000000"/>
+                </a:solidFill>
+                <a:latin typeface="Arial"/>
+                <a:ea typeface="Arial"/>
+                <a:cs typeface="Arial"/>
+              </a:defRPr>
+            </a:pPr>
+            <a:r>
+              <a:rPr sz="1350">
+                <a:solidFill>
+                  <a:srgbClr val="000000"/>
+                </a:solidFill>
+                <a:latin typeface="Arial"/>
+                <a:ea typeface="Arial"/>
+                <a:cs typeface="Arial"/>
+              </a:rPr>
+              <a:t>Fall 2026</a:t>
+            </a:r>
+            <a:endParaRPr sz="1400">
+              <a:solidFill>
+                <a:schemeClr val="dk1"/>
+              </a:solidFill>
+            </a:endParaRPr>
+          </a:p>
+        </p:txBody>
+      </p:sp>
+      <p:sp>
+        <p:nvSpPr>
+          <p:cNvPr id="86" name="Image commentary">
+            <a:extLst>
+              <a:ext uri="{FF2B5EF4-FFF2-40B4-BE49-F238E27FC236}">
+                <a16:creationId xmlns:a16="http://schemas.microsoft.com/office/drawing/2014/main" id="{344320F0-F0A9-4293-B214-A90B977DB207}"/>
+              </a:ext>
+            </a:extLst>
+          </p:cNvPr>
+          <p:cNvSpPr>
+            <a:spLocks noGrp="1"/>
+          </p:cNvSpPr>
+          <p:nvPr/>
+        </p:nvSpPr>
+        <p:spPr>
+          <a:xfrm>
+            <a:off x="714375" y="1619250"/>
+            <a:ext cx="3162300" cy="2619375"/>
+          </a:xfrm>
+          <a:prstGeom prst="rect">
+            <a:avLst/>
+          </a:prstGeom>
+          <a:noFill/>
+          <a:ln w="0">
+            <a:noFill/>
+          </a:ln>
+        </p:spPr>
+        <p:txBody>
+          <a:bodyPr wrap="square" lIns="0" tIns="0" rIns="0" bIns="0" anchor="t">
+            <a:noAutofit/>
+          </a:bodyPr>
+          <a:lstStyle/>
+          <a:p>
+            <a:pPr marL="203200" indent="-127000">
+              <a:lnSpc>
+                <a:spcPct val="108000"/>
+              </a:lnSpc>
+              <a:spcAft>
+                <a:spcPts val="1200"/>
+              </a:spcAft>
+              <a:buChar char="•"/>
+              <a:defRPr sz="1500" b="0">
+                <a:solidFill>
+                  <a:srgbClr val="404040"/>
+                </a:solidFill>
+                <a:latin typeface="Arial"/>
+                <a:ea typeface="Arial"/>
+                <a:cs typeface="Arial"/>
+              </a:defRPr>
+            </a:pPr>
+            <a:r>
+              <a:rPr sz="1500" b="0">
+                <a:solidFill>
+                  <a:srgbClr val="404040"/>
+                </a:solidFill>
+                <a:latin typeface="Arial"/>
+                <a:ea typeface="Arial"/>
+                <a:cs typeface="Arial"/>
+              </a:rPr>
+              <a:t>Kickoff held Sep 12 — scope: club homepage, CAD/scientific-figure pipeline, interactive plasma viewer</a:t>
+            </a:r>
+          </a:p>
+          <a:p>
+            <a:pPr marL="203200" indent="-127000">
+              <a:lnSpc>
+                <a:spcPct val="108000"/>
+              </a:lnSpc>
+              <a:spcAft>
+                <a:spcPts val="1200"/>
+              </a:spcAft>
+              <a:buChar char="•"/>
+              <a:defRPr sz="1500" b="0">
+                <a:solidFill>
+                  <a:srgbClr val="404040"/>
+                </a:solidFill>
+                <a:latin typeface="Arial"/>
+                <a:ea typeface="Arial"/>
+                <a:cs typeface="Arial"/>
+              </a:defRPr>
+            </a:pPr>
+            <a:r>
+              <a:rPr sz="1500" b="0">
+                <a:solidFill>
+                  <a:srgbClr val="404040"/>
+                </a:solidFill>
+                <a:latin typeface="Arial"/>
+                <a:ea typeface="Arial"/>
+                <a:cs typeface="Arial"/>
+              </a:rPr>
+              <a:t>Builds on Spring 2026 foundation: particle-visualization prototype, Gott &amp; Xu microplasma cathode physics</a:t>
+            </a:r>
+          </a:p>
+          <a:p>
+            <a:pPr marL="203200" indent="-127000">
+              <a:lnSpc>
+                <a:spcPct val="108000"/>
+              </a:lnSpc>
+              <a:spcAft>
+                <a:spcPts val="1200"/>
+              </a:spcAft>
+              <a:buChar char="•"/>
+              <a:defRPr sz="1500" b="0">
+                <a:solidFill>
+                  <a:srgbClr val="404040"/>
+                </a:solidFill>
+                <a:latin typeface="Arial"/>
+                <a:ea typeface="Arial"/>
+                <a:cs typeface="Arial"/>
+              </a:defRPr>
+            </a:pPr>
+            <a:r>
+              <a:rPr sz="1500" b="0">
+                <a:solidFill>
+                  <a:srgbClr val="404040"/>
+                </a:solidFill>
+                <a:latin typeface="Arial"/>
+                <a:ea typeface="Arial"/>
+                <a:cs typeface="Arial"/>
+              </a:rPr>
+              <a:t>New this semester: a research-grade paper on our visualization work</a:t>
+            </a:r>
+          </a:p>
+          <a:p>
+            <a:pPr marL="203200" indent="-127000">
+              <a:lnSpc>
+                <a:spcPct val="108000"/>
+              </a:lnSpc>
+              <a:spcAft>
+                <a:spcPts val="1200"/>
+              </a:spcAft>
+              <a:buChar char="•"/>
+              <a:defRPr sz="1500" b="0">
+                <a:solidFill>
+                  <a:srgbClr val="404040"/>
+                </a:solidFill>
+                <a:latin typeface="Arial"/>
+                <a:ea typeface="Arial"/>
+                <a:cs typeface="Arial"/>
+              </a:defRPr>
+            </a:pPr>
+            <a:r>
+              <a:rPr sz="1500" b="0">
+                <a:solidFill>
+                  <a:srgbClr val="404040"/>
+                </a:solidFill>
+                <a:latin typeface="Arial"/>
+                <a:ea typeface="Arial"/>
+                <a:cs typeface="Arial"/>
+              </a:rPr>
+              <a:t>This week we move from planning into execution — data/geometry audit and environment setup</a:t>
+            </a:r>
+          </a:p>
+        </p:txBody>
+      </p:sp>
+      <p:pic>
+        <p:nvPicPr>
+          <p:cNvPr id="99" name="Picture 98"/>
+          <p:cNvPicPr>
+            <a:picLocks noChangeAspect="1"/>
+          </p:cNvPicPr>
+          <p:nvPr/>
+        </p:nvPicPr>
+        <p:blipFill>
+          <a:blip r:embed="rId4"/>
+          <a:stretch/>
+        </p:blipFill>
+        <p:spPr>
+          <a:xfrm>
+            <a:off x="4191000" y="1897742"/>
+            <a:ext cx="4267200" cy="2157641"/>
+          </a:xfrm>
+          <a:prstGeom prst="rect">
+            <a:avLst/>
+          </a:prstGeom>
+        </p:spPr>
+      </p:pic>
+    </p:spTree>
+  </p:cSld>
+  <p:clrMapOvr>
+    <a:masterClrMapping/>
+  </p:clrMapOvr>
+</p:sld>
+</file>
+
+<file path=ppt/slides/slide15.xml><?xml version="1.0" encoding="utf-8"?>
+<p:sld xmlns:a="http://schemas.openxmlformats.org/drawingml/2006/main" xmlns:p="http://schemas.openxmlformats.org/presentationml/2006/main" xmlns:r="http://schemas.openxmlformats.org/officeDocument/2006/relationships">
+  <p:cSld>
+    <p:spTree>
+      <p:nvGrpSpPr>
+        <p:cNvPr id="1" name=""/>
+        <p:cNvGrpSpPr/>
+        <p:nvPr/>
+      </p:nvGrpSpPr>
+      <p:grpSpPr/>
+      <p:sp>
+        <p:nvSpPr>
+          <p:cNvPr id="74" name="Google Shape;74;p16">
+            <a:extLst>
+              <a:ext uri="{FF2B5EF4-FFF2-40B4-BE49-F238E27FC236}">
+                <a16:creationId xmlns:a16="http://schemas.microsoft.com/office/drawing/2014/main" id="{F29C6079-CF50-3950-F7B3-37C5016CD1D4}"/>
+              </a:ext>
+            </a:extLst>
+          </p:cNvPr>
+          <p:cNvSpPr>
+            <a:spLocks noGrp="1"/>
+          </p:cNvSpPr>
+          <p:nvPr>
+            <p:ph type="title"/>
+          </p:nvPr>
+        </p:nvSpPr>
+        <p:spPr>
+          <a:xfrm>
+            <a:off x="695325" y="828675"/>
+            <a:ext cx="7953375" cy="619125"/>
+          </a:xfrm>
+          <a:prstGeom prst="rect">
+            <a:avLst/>
+          </a:prstGeom>
+          <a:noFill/>
+          <a:ln>
+            <a:noFill/>
+          </a:ln>
+        </p:spPr>
+        <p:txBody>
+          <a:bodyPr spcFirstLastPara="1" wrap="square" lIns="0" tIns="0" rIns="0" bIns="0" anchor="t">
+            <a:noAutofit/>
+          </a:bodyPr>
+          <a:lstStyle/>
+          <a:p>
+            <a:pPr marL="0" lvl="0" indent="0" algn="l">
+              <a:lnSpc>
+                <a:spcPct val="90000"/>
+              </a:lnSpc>
+              <a:spcBef>
+                <a:spcPts val="0"/>
+              </a:spcBef>
+              <a:spcAft>
+                <a:spcPts val="0"/>
+              </a:spcAft>
+              <a:buClr>
+                <a:schemeClr val="dk1"/>
+              </a:buClr>
+              <a:buSzPts val="3000"/>
+              <a:buFont typeface="Arial"/>
+              <a:buNone/>
+              <a:defRPr sz="3000" b="1">
+                <a:solidFill>
+                  <a:srgbClr val="000000"/>
+                </a:solidFill>
+                <a:latin typeface="Arial"/>
+                <a:ea typeface="Arial"/>
+                <a:cs typeface="Arial"/>
+              </a:defRPr>
+            </a:pPr>
+            <a:r>
+              <a:rPr sz="3000" b="1">
+                <a:solidFill>
+                  <a:srgbClr val="000000"/>
+                </a:solidFill>
+                <a:latin typeface="Arial"/>
+                <a:ea typeface="Arial"/>
+                <a:cs typeface="Arial"/>
+              </a:rPr>
+              <a:t>Where we are in the workflow</a:t>
             </a:r>
             <a:endParaRPr/>
           </a:p>
@@ -7331,7 +9082,4803 @@
                 <a:ea typeface="Arial"/>
                 <a:cs typeface="Arial"/>
               </a:rPr>
-              <a:t>3</a:t>
+              <a:t>4</a:t>
+            </a:r>
+            <a:endParaRPr sz="1100" b="0" i="0" u="none" cap="none">
+              <a:solidFill>
+                <a:srgbClr val="000000"/>
+              </a:solidFill>
+              <a:latin typeface="Arial"/>
+              <a:ea typeface="Arial"/>
+              <a:cs typeface="Arial"/>
+            </a:endParaRPr>
+          </a:p>
+        </p:txBody>
+      </p:sp>
+      <p:sp>
+        <p:nvSpPr>
+          <p:cNvPr id="2" name="TextBox 1">
+            <a:extLst>
+              <a:ext uri="{FF2B5EF4-FFF2-40B4-BE49-F238E27FC236}">
+                <a16:creationId xmlns:a16="http://schemas.microsoft.com/office/drawing/2014/main" id="{C03B32CF-B251-58B0-7BAB-AFB6BCFA3973}"/>
+              </a:ext>
+            </a:extLst>
+          </p:cNvPr>
+          <p:cNvSpPr>
+            <a:spLocks noGrp="1"/>
+          </p:cNvSpPr>
+          <p:nvPr/>
+        </p:nvSpPr>
+        <p:spPr>
+          <a:xfrm>
+            <a:off x="209550" y="4810125"/>
+            <a:ext cx="2381250" cy="365760"/>
+          </a:xfrm>
+          <a:prstGeom prst="rect">
+            <a:avLst/>
+          </a:prstGeom>
+          <a:noFill/>
+        </p:spPr>
+        <p:txBody>
+          <a:bodyPr wrap="square" lIns="0" tIns="0" rIns="0" bIns="0">
+            <a:noAutofit/>
+          </a:bodyPr>
+          <a:lstStyle/>
+          <a:p>
+            <a:pPr marL="6350" marR="0" lvl="0" algn="l">
+              <a:lnSpc>
+                <a:spcPct val="90000"/>
+              </a:lnSpc>
+              <a:spcBef>
+                <a:spcPts val="800"/>
+              </a:spcBef>
+              <a:spcAft>
+                <a:spcPts val="0"/>
+              </a:spcAft>
+              <a:buClr>
+                <a:schemeClr val="dk1"/>
+              </a:buClr>
+              <a:buSzPts val="2100"/>
+              <a:buNone/>
+              <a:defRPr sz="1350">
+                <a:solidFill>
+                  <a:srgbClr val="000000"/>
+                </a:solidFill>
+                <a:latin typeface="Arial"/>
+                <a:ea typeface="Arial"/>
+                <a:cs typeface="Arial"/>
+              </a:defRPr>
+            </a:pPr>
+            <a:r>
+              <a:rPr sz="1350">
+                <a:solidFill>
+                  <a:srgbClr val="000000"/>
+                </a:solidFill>
+                <a:latin typeface="Arial"/>
+                <a:ea typeface="Arial"/>
+                <a:cs typeface="Arial"/>
+              </a:rPr>
+              <a:t>Fall 2026</a:t>
+            </a:r>
+            <a:endParaRPr sz="1400">
+              <a:solidFill>
+                <a:schemeClr val="dk1"/>
+              </a:solidFill>
+            </a:endParaRPr>
+          </a:p>
+        </p:txBody>
+      </p:sp>
+      <p:graphicFrame>
+        <p:nvGraphicFramePr>
+          <p:cNvPr id="97" name="Table 96"/>
+          <p:cNvGraphicFramePr/>
+          <p:nvPr/>
+        </p:nvGraphicFramePr>
+        <p:xfrm>
+          <a:off x="714375" y="1619250"/>
+          <a:ext cx="7734300" cy="2705100"/>
+        </p:xfrm>
+        <a:graphic>
+          <a:graphicData uri="http://schemas.openxmlformats.org/drawingml/2006/table">
+            <a:tbl>
+              <a:tblPr/>
+              <a:tblGrid>
+                <a:gridCol w="2362200">
+                  <a:extLst>
+                    <a:ext uri="{9D8B030D-6E8A-4147-A177-3AD203B41FA5}">
+                      <a16:colId xmlns:a16="http://schemas.microsoft.com/office/drawing/2014/main" val="20000"/>
+                    </a:ext>
+                  </a:extLst>
+                </a:gridCol>
+                <a:gridCol w="5372100">
+                  <a:extLst>
+                    <a:ext uri="{9D8B030D-6E8A-4147-A177-3AD203B41FA5}">
+                      <a16:colId xmlns:a16="http://schemas.microsoft.com/office/drawing/2014/main" val="20001"/>
+                    </a:ext>
+                  </a:extLst>
+                </a:gridCol>
+              </a:tblGrid>
+              <a:tr h="676275">
+                <a:tc>
+                  <a:txBody>
+                    <a:bodyPr/>
+                    <a:lstStyle/>
+                    <a:p>
+                      <a:r>
+                        <a:rPr sz="1800" b="1">
+                          <a:solidFill>
+                            <a:srgbClr val="11284C"/>
+                          </a:solidFill>
+                          <a:latin typeface="Arial"/>
+                          <a:ea typeface="Arial"/>
+                          <a:cs typeface="Arial"/>
+                        </a:rPr>
+                        <a:t>1  Data &amp; geometry ← this week</a:t>
+                      </a:r>
+                    </a:p>
+                  </a:txBody>
+                  <a:tcPr anchor="ctr">
+                    <a:solidFill>
+                      <a:srgbClr val="FFFFFF"/>
+                    </a:solidFill>
+                  </a:tcPr>
+                </a:tc>
+                <a:tc>
+                  <a:txBody>
+                    <a:bodyPr/>
+                    <a:lstStyle/>
+                    <a:p>
+                      <a:r>
+                        <a:rPr sz="1725" b="0">
+                          <a:solidFill>
+                            <a:srgbClr val="404040"/>
+                          </a:solidFill>
+                          <a:latin typeface="Arial"/>
+                          <a:ea typeface="Arial"/>
+                          <a:cs typeface="Arial"/>
+                        </a:rPr>
+                        <a:t>Review source data, prepare geometry for visualization</a:t>
+                      </a:r>
+                    </a:p>
+                  </a:txBody>
+                  <a:tcPr anchor="ctr">
+                    <a:solidFill>
+                      <a:srgbClr val="FFFFFF"/>
+                    </a:solidFill>
+                  </a:tcPr>
+                </a:tc>
+                <a:extLst>
+                  <a:ext uri="{0D108BD9-81ED-4DB2-BD59-A6C34878D82A}">
+                    <a16:rowId xmlns:a16="http://schemas.microsoft.com/office/drawing/2014/main" val="10000"/>
+                  </a:ext>
+                </a:extLst>
+              </a:tr>
+              <a:tr h="676275">
+                <a:tc>
+                  <a:txBody>
+                    <a:bodyPr/>
+                    <a:lstStyle/>
+                    <a:p>
+                      <a:r>
+                        <a:rPr sz="1800" b="1">
+                          <a:solidFill>
+                            <a:srgbClr val="11284C"/>
+                          </a:solidFill>
+                          <a:latin typeface="Arial"/>
+                          <a:ea typeface="Arial"/>
+                          <a:cs typeface="Arial"/>
+                        </a:rPr>
+                        <a:t>2  Homepage</a:t>
+                      </a:r>
+                    </a:p>
+                  </a:txBody>
+                  <a:tcPr anchor="ctr">
+                    <a:solidFill>
+                      <a:srgbClr val="FFFFFF"/>
+                    </a:solidFill>
+                  </a:tcPr>
+                </a:tc>
+                <a:tc>
+                  <a:txBody>
+                    <a:bodyPr/>
+                    <a:lstStyle/>
+                    <a:p>
+                      <a:r>
+                        <a:rPr sz="1725" b="0">
+                          <a:solidFill>
+                            <a:srgbClr val="404040"/>
+                          </a:solidFill>
+                          <a:latin typeface="Arial"/>
+                          <a:ea typeface="Arial"/>
+                          <a:cs typeface="Arial"/>
+                        </a:rPr>
+                        <a:t>Publish the club overview and technical project pages</a:t>
+                      </a:r>
+                    </a:p>
+                  </a:txBody>
+                  <a:tcPr anchor="ctr">
+                    <a:solidFill>
+                      <a:srgbClr val="FFFFFF"/>
+                    </a:solidFill>
+                  </a:tcPr>
+                </a:tc>
+                <a:extLst>
+                  <a:ext uri="{0D108BD9-81ED-4DB2-BD59-A6C34878D82A}">
+                    <a16:rowId xmlns:a16="http://schemas.microsoft.com/office/drawing/2014/main" val="10001"/>
+                  </a:ext>
+                </a:extLst>
+              </a:tr>
+              <a:tr h="676275">
+                <a:tc>
+                  <a:txBody>
+                    <a:bodyPr/>
+                    <a:lstStyle/>
+                    <a:p>
+                      <a:r>
+                        <a:rPr sz="1800" b="1">
+                          <a:solidFill>
+                            <a:srgbClr val="11284C"/>
+                          </a:solidFill>
+                          <a:latin typeface="Arial"/>
+                          <a:ea typeface="Arial"/>
+                          <a:cs typeface="Arial"/>
+                        </a:rPr>
+                        <a:t>3  CAD and figures</a:t>
+                      </a:r>
+                    </a:p>
+                  </a:txBody>
+                  <a:tcPr anchor="ctr">
+                    <a:solidFill>
+                      <a:srgbClr val="FFFFFF"/>
+                    </a:solidFill>
+                  </a:tcPr>
+                </a:tc>
+                <a:tc>
+                  <a:txBody>
+                    <a:bodyPr/>
+                    <a:lstStyle/>
+                    <a:p>
+                      <a:r>
+                        <a:rPr sz="1725" b="0">
+                          <a:solidFill>
+                            <a:srgbClr val="404040"/>
+                          </a:solidFill>
+                          <a:latin typeface="Arial"/>
+                          <a:ea typeface="Arial"/>
+                          <a:cs typeface="Arial"/>
+                        </a:rPr>
+                        <a:t>Build a simplified cathode assembly and cutaway renders</a:t>
+                      </a:r>
+                    </a:p>
+                  </a:txBody>
+                  <a:tcPr anchor="ctr">
+                    <a:solidFill>
+                      <a:srgbClr val="FFFFFF"/>
+                    </a:solidFill>
+                  </a:tcPr>
+                </a:tc>
+                <a:extLst>
+                  <a:ext uri="{0D108BD9-81ED-4DB2-BD59-A6C34878D82A}">
+                    <a16:rowId xmlns:a16="http://schemas.microsoft.com/office/drawing/2014/main" val="10002"/>
+                  </a:ext>
+                </a:extLst>
+              </a:tr>
+              <a:tr h="676275">
+                <a:tc>
+                  <a:txBody>
+                    <a:bodyPr/>
+                    <a:lstStyle/>
+                    <a:p>
+                      <a:r>
+                        <a:rPr sz="1800" b="1">
+                          <a:solidFill>
+                            <a:srgbClr val="11284C"/>
+                          </a:solidFill>
+                          <a:latin typeface="Arial"/>
+                          <a:ea typeface="Arial"/>
+                          <a:cs typeface="Arial"/>
+                        </a:rPr>
+                        <a:t>4  Integration</a:t>
+                      </a:r>
+                    </a:p>
+                  </a:txBody>
+                  <a:tcPr anchor="ctr">
+                    <a:solidFill>
+                      <a:srgbClr val="FFFFFF"/>
+                    </a:solidFill>
+                  </a:tcPr>
+                </a:tc>
+                <a:tc>
+                  <a:txBody>
+                    <a:bodyPr/>
+                    <a:lstStyle/>
+                    <a:p>
+                      <a:r>
+                        <a:rPr sz="1725" b="0">
+                          <a:solidFill>
+                            <a:srgbClr val="404040"/>
+                          </a:solidFill>
+                          <a:latin typeface="Arial"/>
+                          <a:ea typeface="Arial"/>
+                          <a:cs typeface="Arial"/>
+                        </a:rPr>
+                        <a:t>Connect the viewer and publish documented figure examples</a:t>
+                      </a:r>
+                    </a:p>
+                  </a:txBody>
+                  <a:tcPr anchor="ctr">
+                    <a:solidFill>
+                      <a:srgbClr val="FFFFFF"/>
+                    </a:solidFill>
+                  </a:tcPr>
+                </a:tc>
+                <a:extLst>
+                  <a:ext uri="{0D108BD9-81ED-4DB2-BD59-A6C34878D82A}">
+                    <a16:rowId xmlns:a16="http://schemas.microsoft.com/office/drawing/2014/main" val="10003"/>
+                  </a:ext>
+                </a:extLst>
+              </a:tr>
+            </a:tbl>
+          </a:graphicData>
+        </a:graphic>
+      </p:graphicFrame>
+      <p:sp>
+        <p:nvSpPr>
+          <p:cNvPr id="87" name="Slide footnote">
+            <a:extLst>
+              <a:ext uri="{FF2B5EF4-FFF2-40B4-BE49-F238E27FC236}">
+                <a16:creationId xmlns:a16="http://schemas.microsoft.com/office/drawing/2014/main" id="{4E10962B-21A8-4B0E-BFDB-C33BB70D557E}"/>
+              </a:ext>
+            </a:extLst>
+          </p:cNvPr>
+          <p:cNvSpPr>
+            <a:spLocks noGrp="1"/>
+          </p:cNvSpPr>
+          <p:nvPr/>
+        </p:nvSpPr>
+        <p:spPr>
+          <a:xfrm>
+            <a:off x="714375" y="4505325"/>
+            <a:ext cx="7010400" cy="285750"/>
+          </a:xfrm>
+          <a:prstGeom prst="rect">
+            <a:avLst/>
+          </a:prstGeom>
+          <a:noFill/>
+          <a:ln w="0">
+            <a:noFill/>
+          </a:ln>
+        </p:spPr>
+        <p:txBody>
+          <a:bodyPr wrap="square" lIns="0" tIns="0" rIns="0" bIns="0" anchor="t">
+            <a:noAutofit/>
+          </a:bodyPr>
+          <a:lstStyle/>
+          <a:p>
+            <a:pPr>
+              <a:lnSpc>
+                <a:spcPct val="108000"/>
+              </a:lnSpc>
+              <a:buNone/>
+              <a:defRPr sz="1125" b="0">
+                <a:solidFill>
+                  <a:srgbClr val="666666"/>
+                </a:solidFill>
+                <a:latin typeface="Arial"/>
+                <a:ea typeface="Arial"/>
+                <a:cs typeface="Arial"/>
+              </a:defRPr>
+            </a:pPr>
+            <a:r>
+              <a:rPr sz="1125" b="0" dirty="0">
+                <a:solidFill>
+                  <a:srgbClr val="666666"/>
+                </a:solidFill>
+                <a:latin typeface="Arial"/>
+                <a:ea typeface="Arial"/>
+                <a:cs typeface="Arial"/>
+              </a:rPr>
+              <a:t>Target: club homepage, a plasma viewer, a reproducible figure workflow — plus a paper alongside</a:t>
+            </a:r>
+          </a:p>
+        </p:txBody>
+      </p:sp>
+    </p:spTree>
+  </p:cSld>
+  <p:clrMapOvr>
+    <a:masterClrMapping/>
+  </p:clrMapOvr>
+</p:sld>
+</file>
+
+<file path=ppt/slides/slide16.xml><?xml version="1.0" encoding="utf-8"?>
+<p:sld xmlns:a="http://schemas.openxmlformats.org/drawingml/2006/main" xmlns:p="http://schemas.openxmlformats.org/presentationml/2006/main" xmlns:r="http://schemas.openxmlformats.org/officeDocument/2006/relationships">
+  <p:cSld>
+    <p:spTree>
+      <p:nvGrpSpPr>
+        <p:cNvPr id="1" name=""/>
+        <p:cNvGrpSpPr/>
+        <p:nvPr/>
+      </p:nvGrpSpPr>
+      <p:grpSpPr/>
+      <p:sp>
+        <p:nvSpPr>
+          <p:cNvPr id="74" name="Google Shape;74;p16">
+            <a:extLst>
+              <a:ext uri="{FF2B5EF4-FFF2-40B4-BE49-F238E27FC236}">
+                <a16:creationId xmlns:a16="http://schemas.microsoft.com/office/drawing/2014/main" id="{F29C6079-CF50-3950-F7B3-37C5016CD1D4}"/>
+              </a:ext>
+            </a:extLst>
+          </p:cNvPr>
+          <p:cNvSpPr>
+            <a:spLocks noGrp="1"/>
+          </p:cNvSpPr>
+          <p:nvPr>
+            <p:ph type="title"/>
+          </p:nvPr>
+        </p:nvSpPr>
+        <p:spPr>
+          <a:xfrm>
+            <a:off x="695325" y="828675"/>
+            <a:ext cx="7953375" cy="619125"/>
+          </a:xfrm>
+          <a:prstGeom prst="rect">
+            <a:avLst/>
+          </a:prstGeom>
+          <a:noFill/>
+          <a:ln>
+            <a:noFill/>
+          </a:ln>
+        </p:spPr>
+        <p:txBody>
+          <a:bodyPr spcFirstLastPara="1" wrap="square" lIns="0" tIns="0" rIns="0" bIns="0" anchor="t">
+            <a:noAutofit/>
+          </a:bodyPr>
+          <a:lstStyle/>
+          <a:p>
+            <a:pPr marL="0" lvl="0" indent="0" algn="l">
+              <a:lnSpc>
+                <a:spcPct val="90000"/>
+              </a:lnSpc>
+              <a:spcBef>
+                <a:spcPts val="0"/>
+              </a:spcBef>
+              <a:spcAft>
+                <a:spcPts val="0"/>
+              </a:spcAft>
+              <a:buClr>
+                <a:schemeClr val="dk1"/>
+              </a:buClr>
+              <a:buSzPts val="3000"/>
+              <a:buFont typeface="Arial"/>
+              <a:buNone/>
+              <a:defRPr sz="3000" b="1">
+                <a:solidFill>
+                  <a:srgbClr val="000000"/>
+                </a:solidFill>
+                <a:latin typeface="Arial"/>
+                <a:ea typeface="Arial"/>
+                <a:cs typeface="Arial"/>
+              </a:defRPr>
+            </a:pPr>
+            <a:r>
+              <a:rPr sz="3000" b="1">
+                <a:solidFill>
+                  <a:srgbClr val="000000"/>
+                </a:solidFill>
+                <a:latin typeface="Arial"/>
+                <a:ea typeface="Arial"/>
+                <a:cs typeface="Arial"/>
+              </a:rPr>
+              <a:t>This week: data &amp; geometry</a:t>
+            </a:r>
+            <a:endParaRPr/>
+          </a:p>
+        </p:txBody>
+      </p:sp>
+      <p:sp>
+        <p:nvSpPr>
+          <p:cNvPr id="76" name="Google Shape;76;p16">
+            <a:extLst>
+              <a:ext uri="{FF2B5EF4-FFF2-40B4-BE49-F238E27FC236}">
+                <a16:creationId xmlns:a16="http://schemas.microsoft.com/office/drawing/2014/main" id="{C50CF39B-81F0-A7BF-E4FB-18A3BA818FA8}"/>
+              </a:ext>
+            </a:extLst>
+          </p:cNvPr>
+          <p:cNvSpPr>
+            <a:spLocks noGrp="1"/>
+          </p:cNvSpPr>
+          <p:nvPr/>
+        </p:nvSpPr>
+        <p:spPr>
+          <a:xfrm>
+            <a:off x="0" y="-4697"/>
+            <a:ext cx="9144000" cy="580200"/>
+          </a:xfrm>
+          <a:prstGeom prst="rect">
+            <a:avLst/>
+          </a:prstGeom>
+          <a:solidFill>
+            <a:srgbClr val="11284C"/>
+          </a:solidFill>
+          <a:ln>
+            <a:noFill/>
+          </a:ln>
+        </p:spPr>
+        <p:txBody>
+          <a:bodyPr spcFirstLastPara="1" wrap="square" lIns="68575" tIns="34275" rIns="68575" bIns="34275" anchor="ctr">
+            <a:noAutofit/>
+          </a:bodyPr>
+          <a:lstStyle/>
+          <a:p>
+            <a:pPr marL="0" marR="0" lvl="0" indent="0" algn="ctr">
+              <a:lnSpc>
+                <a:spcPct val="100000"/>
+              </a:lnSpc>
+              <a:spcBef>
+                <a:spcPts val="0"/>
+              </a:spcBef>
+              <a:spcAft>
+                <a:spcPts val="0"/>
+              </a:spcAft>
+              <a:buClr>
+                <a:srgbClr val="000000"/>
+              </a:buClr>
+              <a:buSzPts val="1400"/>
+              <a:buFont typeface="Arial"/>
+              <a:buNone/>
+            </a:pPr>
+            <a:endParaRPr sz="1400" b="0" i="0" u="none" cap="none">
+              <a:solidFill>
+                <a:schemeClr val="lt1"/>
+              </a:solidFill>
+              <a:latin typeface="Arial"/>
+              <a:ea typeface="Arial"/>
+              <a:cs typeface="Arial"/>
+            </a:endParaRPr>
+          </a:p>
+        </p:txBody>
+      </p:sp>
+      <p:sp>
+        <p:nvSpPr>
+          <p:cNvPr id="77" name="Google Shape;77;p16">
+            <a:extLst>
+              <a:ext uri="{FF2B5EF4-FFF2-40B4-BE49-F238E27FC236}">
+                <a16:creationId xmlns:a16="http://schemas.microsoft.com/office/drawing/2014/main" id="{E003ECB4-68A0-AF72-FDFD-EB7C2DD32890}"/>
+              </a:ext>
+            </a:extLst>
+          </p:cNvPr>
+          <p:cNvSpPr>
+            <a:spLocks noGrp="1"/>
+          </p:cNvSpPr>
+          <p:nvPr/>
+        </p:nvSpPr>
+        <p:spPr>
+          <a:xfrm>
+            <a:off x="6349014" y="50217"/>
+            <a:ext cx="2739000" cy="500100"/>
+          </a:xfrm>
+          <a:prstGeom prst="rect">
+            <a:avLst/>
+          </a:prstGeom>
+          <a:noFill/>
+          <a:ln>
+            <a:noFill/>
+          </a:ln>
+        </p:spPr>
+        <p:txBody>
+          <a:bodyPr spcFirstLastPara="1" wrap="square" lIns="68575" tIns="34275" rIns="68575" bIns="34275" anchor="t">
+            <a:spAutoFit/>
+          </a:bodyPr>
+          <a:lstStyle/>
+          <a:p>
+            <a:pPr marL="0" marR="0" lvl="0" indent="0" algn="l">
+              <a:lnSpc>
+                <a:spcPct val="100000"/>
+              </a:lnSpc>
+              <a:spcBef>
+                <a:spcPts val="0"/>
+              </a:spcBef>
+              <a:spcAft>
+                <a:spcPts val="0"/>
+              </a:spcAft>
+              <a:buClr>
+                <a:srgbClr val="000000"/>
+              </a:buClr>
+              <a:buSzPts val="1400"/>
+              <a:buFont typeface="Arial"/>
+              <a:buNone/>
+            </a:pPr>
+            <a:r>
+              <a:rPr sz="1400" b="0" i="0" u="none" cap="none">
+                <a:solidFill>
+                  <a:schemeClr val="lt1"/>
+                </a:solidFill>
+                <a:latin typeface="Arial"/>
+                <a:ea typeface="Arial"/>
+                <a:cs typeface="Arial"/>
+              </a:rPr>
+              <a:t>Electric Propulsion Initiative - ION-I</a:t>
+            </a:r>
+            <a:endParaRPr sz="1100" b="0" i="0" u="none" cap="none">
+              <a:solidFill>
+                <a:srgbClr val="000000"/>
+              </a:solidFill>
+              <a:latin typeface="Arial"/>
+              <a:ea typeface="Arial"/>
+              <a:cs typeface="Arial"/>
+            </a:endParaRPr>
+          </a:p>
+        </p:txBody>
+      </p:sp>
+      <p:pic>
+        <p:nvPicPr>
+          <p:cNvPr id="92" name="Google Shape;78;p16"/>
+          <p:cNvPicPr>
+            <a:picLocks noChangeAspect="1"/>
+          </p:cNvPicPr>
+          <p:nvPr/>
+        </p:nvPicPr>
+        <p:blipFill rotWithShape="1">
+          <a:blip r:embed="rId2">
+            <a:alphaModFix/>
+          </a:blip>
+          <a:srcRect/>
+          <a:stretch/>
+        </p:blipFill>
+        <p:spPr>
+          <a:xfrm>
+            <a:off x="151161" y="50231"/>
+            <a:ext cx="326328" cy="470421"/>
+          </a:xfrm>
+          <a:prstGeom prst="rect">
+            <a:avLst/>
+          </a:prstGeom>
+          <a:ln>
+            <a:noFill/>
+          </a:ln>
+        </p:spPr>
+      </p:pic>
+      <p:pic>
+        <p:nvPicPr>
+          <p:cNvPr id="93" name="Google Shape;79;p16"/>
+          <p:cNvPicPr>
+            <a:picLocks noChangeAspect="1"/>
+          </p:cNvPicPr>
+          <p:nvPr/>
+        </p:nvPicPr>
+        <p:blipFill rotWithShape="1">
+          <a:blip r:embed="rId5">
+            <a:alphaModFix/>
+          </a:blip>
+          <a:srcRect/>
+          <a:stretch/>
+        </p:blipFill>
+        <p:spPr>
+          <a:xfrm>
+            <a:off x="628650" y="-103200"/>
+            <a:ext cx="533165" cy="754089"/>
+          </a:xfrm>
+          <a:prstGeom prst="rect">
+            <a:avLst/>
+          </a:prstGeom>
+          <a:ln>
+            <a:noFill/>
+          </a:ln>
+        </p:spPr>
+      </p:pic>
+      <p:cxnSp>
+        <p:nvCxnSpPr>
+          <p:cNvPr id="94" name="Google Shape;80;p16"/>
+          <p:cNvCxnSpPr/>
+          <p:nvPr/>
+        </p:nvCxnSpPr>
+        <p:spPr>
+          <a:xfrm>
+            <a:off x="589359" y="50231"/>
+            <a:ext cx="0" cy="454500"/>
+          </a:xfrm>
+          <a:prstGeom prst="straightConnector1">
+            <a:avLst/>
+          </a:prstGeom>
+          <a:ln w="19050" cap="flat">
+            <a:solidFill>
+              <a:schemeClr val="lt1"/>
+            </a:solidFill>
+            <a:prstDash val="solid"/>
+            <a:miter/>
+            <a:headEnd type="none" w="sm" len="sm"/>
+            <a:tailEnd type="none" w="sm" len="sm"/>
+          </a:ln>
+        </p:spPr>
+      </p:cxnSp>
+      <p:pic>
+        <p:nvPicPr>
+          <p:cNvPr id="95" name="Google Shape;81;p16"/>
+          <p:cNvPicPr>
+            <a:picLocks noChangeAspect="1"/>
+          </p:cNvPicPr>
+          <p:nvPr/>
+        </p:nvPicPr>
+        <p:blipFill rotWithShape="1">
+          <a:blip r:embed="rId4">
+            <a:alphaModFix/>
+          </a:blip>
+          <a:srcRect/>
+          <a:stretch/>
+        </p:blipFill>
+        <p:spPr>
+          <a:xfrm>
+            <a:off x="7732825" y="3955187"/>
+            <a:ext cx="1239726" cy="1753416"/>
+          </a:xfrm>
+          <a:prstGeom prst="rect">
+            <a:avLst/>
+          </a:prstGeom>
+          <a:ln>
+            <a:noFill/>
+          </a:ln>
+        </p:spPr>
+      </p:pic>
+      <p:sp>
+        <p:nvSpPr>
+          <p:cNvPr id="82" name="Google Shape;82;p16">
+            <a:extLst>
+              <a:ext uri="{FF2B5EF4-FFF2-40B4-BE49-F238E27FC236}">
+                <a16:creationId xmlns:a16="http://schemas.microsoft.com/office/drawing/2014/main" id="{D6B236AD-7344-733D-C8D4-7FFF4844EC55}"/>
+              </a:ext>
+            </a:extLst>
+          </p:cNvPr>
+          <p:cNvSpPr>
+            <a:spLocks noGrp="1"/>
+          </p:cNvSpPr>
+          <p:nvPr/>
+        </p:nvSpPr>
+        <p:spPr>
+          <a:xfrm>
+            <a:off x="8829675" y="4838700"/>
+            <a:ext cx="257175" cy="281910"/>
+          </a:xfrm>
+          <a:prstGeom prst="rect">
+            <a:avLst/>
+          </a:prstGeom>
+          <a:noFill/>
+          <a:ln>
+            <a:noFill/>
+          </a:ln>
+        </p:spPr>
+        <p:txBody>
+          <a:bodyPr spcFirstLastPara="1" wrap="square" lIns="0" tIns="0" rIns="0" bIns="0" anchor="t">
+            <a:noAutofit/>
+          </a:bodyPr>
+          <a:lstStyle/>
+          <a:p>
+            <a:pPr marL="0" marR="0" lvl="0" indent="0" algn="l">
+              <a:lnSpc>
+                <a:spcPct val="100000"/>
+              </a:lnSpc>
+              <a:spcBef>
+                <a:spcPts val="0"/>
+              </a:spcBef>
+              <a:spcAft>
+                <a:spcPts val="0"/>
+              </a:spcAft>
+              <a:buClr>
+                <a:srgbClr val="000000"/>
+              </a:buClr>
+              <a:buSzPts val="1400"/>
+              <a:buFont typeface="Arial"/>
+              <a:buNone/>
+              <a:defRPr sz="1125">
+                <a:solidFill>
+                  <a:srgbClr val="000000"/>
+                </a:solidFill>
+                <a:latin typeface="Arial"/>
+                <a:ea typeface="Arial"/>
+                <a:cs typeface="Arial"/>
+              </a:defRPr>
+            </a:pPr>
+            <a:r>
+              <a:rPr sz="1125" b="0" i="0" u="none" cap="none">
+                <a:solidFill>
+                  <a:srgbClr val="000000"/>
+                </a:solidFill>
+                <a:latin typeface="Arial"/>
+                <a:ea typeface="Arial"/>
+                <a:cs typeface="Arial"/>
+              </a:rPr>
+              <a:t>5</a:t>
+            </a:r>
+            <a:endParaRPr sz="1100" b="0" i="0" u="none" cap="none">
+              <a:solidFill>
+                <a:srgbClr val="000000"/>
+              </a:solidFill>
+              <a:latin typeface="Arial"/>
+              <a:ea typeface="Arial"/>
+              <a:cs typeface="Arial"/>
+            </a:endParaRPr>
+          </a:p>
+        </p:txBody>
+      </p:sp>
+      <p:sp>
+        <p:nvSpPr>
+          <p:cNvPr id="2" name="TextBox 1">
+            <a:extLst>
+              <a:ext uri="{FF2B5EF4-FFF2-40B4-BE49-F238E27FC236}">
+                <a16:creationId xmlns:a16="http://schemas.microsoft.com/office/drawing/2014/main" id="{C03B32CF-B251-58B0-7BAB-AFB6BCFA3973}"/>
+              </a:ext>
+            </a:extLst>
+          </p:cNvPr>
+          <p:cNvSpPr>
+            <a:spLocks noGrp="1"/>
+          </p:cNvSpPr>
+          <p:nvPr/>
+        </p:nvSpPr>
+        <p:spPr>
+          <a:xfrm>
+            <a:off x="209550" y="4810125"/>
+            <a:ext cx="2381250" cy="365760"/>
+          </a:xfrm>
+          <a:prstGeom prst="rect">
+            <a:avLst/>
+          </a:prstGeom>
+          <a:noFill/>
+        </p:spPr>
+        <p:txBody>
+          <a:bodyPr wrap="square" lIns="0" tIns="0" rIns="0" bIns="0">
+            <a:noAutofit/>
+          </a:bodyPr>
+          <a:lstStyle/>
+          <a:p>
+            <a:pPr marL="6350" marR="0" lvl="0" algn="l">
+              <a:lnSpc>
+                <a:spcPct val="90000"/>
+              </a:lnSpc>
+              <a:spcBef>
+                <a:spcPts val="800"/>
+              </a:spcBef>
+              <a:spcAft>
+                <a:spcPts val="0"/>
+              </a:spcAft>
+              <a:buClr>
+                <a:schemeClr val="dk1"/>
+              </a:buClr>
+              <a:buSzPts val="2100"/>
+              <a:buNone/>
+              <a:defRPr sz="1350">
+                <a:solidFill>
+                  <a:srgbClr val="000000"/>
+                </a:solidFill>
+                <a:latin typeface="Arial"/>
+                <a:ea typeface="Arial"/>
+                <a:cs typeface="Arial"/>
+              </a:defRPr>
+            </a:pPr>
+            <a:r>
+              <a:rPr sz="1350">
+                <a:solidFill>
+                  <a:srgbClr val="000000"/>
+                </a:solidFill>
+                <a:latin typeface="Arial"/>
+                <a:ea typeface="Arial"/>
+                <a:cs typeface="Arial"/>
+              </a:rPr>
+              <a:t>Fall 2026</a:t>
+            </a:r>
+            <a:endParaRPr sz="1400">
+              <a:solidFill>
+                <a:schemeClr val="dk1"/>
+              </a:solidFill>
+            </a:endParaRPr>
+          </a:p>
+        </p:txBody>
+      </p:sp>
+      <p:sp>
+        <p:nvSpPr>
+          <p:cNvPr id="86" name="Slide introduction">
+            <a:extLst>
+              <a:ext uri="{FF2B5EF4-FFF2-40B4-BE49-F238E27FC236}">
+                <a16:creationId xmlns:a16="http://schemas.microsoft.com/office/drawing/2014/main" id="{B8F1483B-FB4D-492E-94FB-23C7526FDDD6}"/>
+              </a:ext>
+            </a:extLst>
+          </p:cNvPr>
+          <p:cNvSpPr>
+            <a:spLocks noGrp="1"/>
+          </p:cNvSpPr>
+          <p:nvPr/>
+        </p:nvSpPr>
+        <p:spPr>
+          <a:xfrm>
+            <a:off x="714375" y="1438275"/>
+            <a:ext cx="7734300" cy="485775"/>
+          </a:xfrm>
+          <a:prstGeom prst="rect">
+            <a:avLst/>
+          </a:prstGeom>
+          <a:noFill/>
+          <a:ln w="0">
+            <a:noFill/>
+          </a:ln>
+        </p:spPr>
+        <p:txBody>
+          <a:bodyPr wrap="square" lIns="0" tIns="0" rIns="0" bIns="0" anchor="t">
+            <a:noAutofit/>
+          </a:bodyPr>
+          <a:lstStyle/>
+          <a:p>
+            <a:pPr>
+              <a:lnSpc>
+                <a:spcPct val="108000"/>
+              </a:lnSpc>
+              <a:buNone/>
+              <a:defRPr sz="1650" b="0">
+                <a:solidFill>
+                  <a:srgbClr val="404040"/>
+                </a:solidFill>
+                <a:latin typeface="Arial"/>
+                <a:ea typeface="Arial"/>
+                <a:cs typeface="Arial"/>
+              </a:defRPr>
+            </a:pPr>
+            <a:r>
+              <a:rPr sz="1650" b="0">
+                <a:solidFill>
+                  <a:srgbClr val="404040"/>
+                </a:solidFill>
+                <a:latin typeface="Arial"/>
+                <a:ea typeface="Arial"/>
+                <a:cs typeface="Arial"/>
+              </a:rPr>
+              <a:t>Data &amp; geometry</a:t>
+            </a:r>
+          </a:p>
+        </p:txBody>
+      </p:sp>
+      <p:sp>
+        <p:nvSpPr>
+          <p:cNvPr id="87" name="Main bullets">
+            <a:extLst>
+              <a:ext uri="{FF2B5EF4-FFF2-40B4-BE49-F238E27FC236}">
+                <a16:creationId xmlns:a16="http://schemas.microsoft.com/office/drawing/2014/main" id="{211AE939-D7DF-44D9-A71C-20127A8F71E3}"/>
+              </a:ext>
+            </a:extLst>
+          </p:cNvPr>
+          <p:cNvSpPr>
+            <a:spLocks noGrp="1"/>
+          </p:cNvSpPr>
+          <p:nvPr/>
+        </p:nvSpPr>
+        <p:spPr>
+          <a:xfrm>
+            <a:off x="714375" y="1971675"/>
+            <a:ext cx="7734300" cy="2905125"/>
+          </a:xfrm>
+          <a:prstGeom prst="rect">
+            <a:avLst/>
+          </a:prstGeom>
+          <a:noFill/>
+          <a:ln w="0">
+            <a:noFill/>
+          </a:ln>
+        </p:spPr>
+        <p:txBody>
+          <a:bodyPr wrap="square" lIns="0" tIns="0" rIns="0" bIns="0" anchor="t">
+            <a:noAutofit/>
+          </a:bodyPr>
+          <a:lstStyle/>
+          <a:p>
+            <a:pPr marL="203200" indent="-127000">
+              <a:lnSpc>
+                <a:spcPct val="108000"/>
+              </a:lnSpc>
+              <a:spcAft>
+                <a:spcPts val="1200"/>
+              </a:spcAft>
+              <a:buChar char="•"/>
+              <a:defRPr sz="1800" b="0">
+                <a:solidFill>
+                  <a:srgbClr val="404040"/>
+                </a:solidFill>
+                <a:latin typeface="Arial"/>
+                <a:ea typeface="Arial"/>
+                <a:cs typeface="Arial"/>
+              </a:defRPr>
+            </a:pPr>
+            <a:r>
+              <a:rPr sz="1800" b="0">
+                <a:solidFill>
+                  <a:srgbClr val="404040"/>
+                </a:solidFill>
+                <a:latin typeface="Arial"/>
+                <a:ea typeface="Arial"/>
+                <a:cs typeface="Arial"/>
+              </a:rPr>
+              <a:t>Audit shared particle datasets and Gott &amp; Xu cathode geometry</a:t>
+            </a:r>
+          </a:p>
+          <a:p>
+            <a:pPr marL="203200" indent="-127000">
+              <a:lnSpc>
+                <a:spcPct val="108000"/>
+              </a:lnSpc>
+              <a:spcAft>
+                <a:spcPts val="1200"/>
+              </a:spcAft>
+              <a:buChar char="•"/>
+              <a:defRPr sz="1800" b="0">
+                <a:solidFill>
+                  <a:srgbClr val="404040"/>
+                </a:solidFill>
+                <a:latin typeface="Arial"/>
+                <a:ea typeface="Arial"/>
+                <a:cs typeface="Arial"/>
+              </a:defRPr>
+            </a:pPr>
+            <a:r>
+              <a:rPr sz="1800" b="0">
+                <a:solidFill>
+                  <a:srgbClr val="404040"/>
+                </a:solidFill>
+                <a:latin typeface="Arial"/>
+                <a:ea typeface="Arial"/>
+                <a:cs typeface="Arial"/>
+              </a:rPr>
+              <a:t>Define the engineering-geometry / field-data input format</a:t>
+            </a:r>
+          </a:p>
+        </p:txBody>
+      </p:sp>
+    </p:spTree>
+  </p:cSld>
+  <p:clrMapOvr>
+    <a:masterClrMapping/>
+  </p:clrMapOvr>
+</p:sld>
+</file>
+
+<file path=ppt/slides/slide17.xml><?xml version="1.0" encoding="utf-8"?>
+<p:sld xmlns:a="http://schemas.openxmlformats.org/drawingml/2006/main" xmlns:p="http://schemas.openxmlformats.org/presentationml/2006/main" xmlns:r="http://schemas.openxmlformats.org/officeDocument/2006/relationships">
+  <p:cSld>
+    <p:spTree>
+      <p:nvGrpSpPr>
+        <p:cNvPr id="1" name=""/>
+        <p:cNvGrpSpPr/>
+        <p:nvPr/>
+      </p:nvGrpSpPr>
+      <p:grpSpPr/>
+      <p:sp>
+        <p:nvSpPr>
+          <p:cNvPr id="74" name="Google Shape;74;p16">
+            <a:extLst>
+              <a:ext uri="{FF2B5EF4-FFF2-40B4-BE49-F238E27FC236}">
+                <a16:creationId xmlns:a16="http://schemas.microsoft.com/office/drawing/2014/main" id="{F29C6079-CF50-3950-F7B3-37C5016CD1D4}"/>
+              </a:ext>
+            </a:extLst>
+          </p:cNvPr>
+          <p:cNvSpPr>
+            <a:spLocks noGrp="1"/>
+          </p:cNvSpPr>
+          <p:nvPr>
+            <p:ph type="title"/>
+          </p:nvPr>
+        </p:nvSpPr>
+        <p:spPr>
+          <a:xfrm>
+            <a:off x="695325" y="828675"/>
+            <a:ext cx="7953375" cy="619125"/>
+          </a:xfrm>
+          <a:prstGeom prst="rect">
+            <a:avLst/>
+          </a:prstGeom>
+          <a:noFill/>
+          <a:ln>
+            <a:noFill/>
+          </a:ln>
+        </p:spPr>
+        <p:txBody>
+          <a:bodyPr spcFirstLastPara="1" wrap="square" lIns="0" tIns="0" rIns="0" bIns="0" anchor="t">
+            <a:noAutofit/>
+          </a:bodyPr>
+          <a:lstStyle/>
+          <a:p>
+            <a:pPr marL="0" lvl="0" indent="0" algn="l">
+              <a:lnSpc>
+                <a:spcPct val="90000"/>
+              </a:lnSpc>
+              <a:spcBef>
+                <a:spcPts val="0"/>
+              </a:spcBef>
+              <a:spcAft>
+                <a:spcPts val="0"/>
+              </a:spcAft>
+              <a:buClr>
+                <a:schemeClr val="dk1"/>
+              </a:buClr>
+              <a:buSzPts val="3000"/>
+              <a:buFont typeface="Arial"/>
+              <a:buNone/>
+              <a:defRPr sz="3000" b="1">
+                <a:solidFill>
+                  <a:srgbClr val="000000"/>
+                </a:solidFill>
+                <a:latin typeface="Arial"/>
+                <a:ea typeface="Arial"/>
+                <a:cs typeface="Arial"/>
+              </a:defRPr>
+            </a:pPr>
+            <a:r>
+              <a:rPr sz="3000" b="1">
+                <a:solidFill>
+                  <a:srgbClr val="000000"/>
+                </a:solidFill>
+                <a:latin typeface="Arial"/>
+                <a:ea typeface="Arial"/>
+                <a:cs typeface="Arial"/>
+              </a:rPr>
+              <a:t>This week: rendering environment</a:t>
+            </a:r>
+            <a:endParaRPr/>
+          </a:p>
+        </p:txBody>
+      </p:sp>
+      <p:sp>
+        <p:nvSpPr>
+          <p:cNvPr id="76" name="Google Shape;76;p16">
+            <a:extLst>
+              <a:ext uri="{FF2B5EF4-FFF2-40B4-BE49-F238E27FC236}">
+                <a16:creationId xmlns:a16="http://schemas.microsoft.com/office/drawing/2014/main" id="{C50CF39B-81F0-A7BF-E4FB-18A3BA818FA8}"/>
+              </a:ext>
+            </a:extLst>
+          </p:cNvPr>
+          <p:cNvSpPr>
+            <a:spLocks noGrp="1"/>
+          </p:cNvSpPr>
+          <p:nvPr/>
+        </p:nvSpPr>
+        <p:spPr>
+          <a:xfrm>
+            <a:off x="0" y="-4697"/>
+            <a:ext cx="9144000" cy="580200"/>
+          </a:xfrm>
+          <a:prstGeom prst="rect">
+            <a:avLst/>
+          </a:prstGeom>
+          <a:solidFill>
+            <a:srgbClr val="11284C"/>
+          </a:solidFill>
+          <a:ln>
+            <a:noFill/>
+          </a:ln>
+        </p:spPr>
+        <p:txBody>
+          <a:bodyPr spcFirstLastPara="1" wrap="square" lIns="68575" tIns="34275" rIns="68575" bIns="34275" anchor="ctr">
+            <a:noAutofit/>
+          </a:bodyPr>
+          <a:lstStyle/>
+          <a:p>
+            <a:pPr marL="0" marR="0" lvl="0" indent="0" algn="ctr">
+              <a:lnSpc>
+                <a:spcPct val="100000"/>
+              </a:lnSpc>
+              <a:spcBef>
+                <a:spcPts val="0"/>
+              </a:spcBef>
+              <a:spcAft>
+                <a:spcPts val="0"/>
+              </a:spcAft>
+              <a:buClr>
+                <a:srgbClr val="000000"/>
+              </a:buClr>
+              <a:buSzPts val="1400"/>
+              <a:buFont typeface="Arial"/>
+              <a:buNone/>
+            </a:pPr>
+            <a:endParaRPr sz="1400" b="0" i="0" u="none" cap="none">
+              <a:solidFill>
+                <a:schemeClr val="lt1"/>
+              </a:solidFill>
+              <a:latin typeface="Arial"/>
+              <a:ea typeface="Arial"/>
+              <a:cs typeface="Arial"/>
+            </a:endParaRPr>
+          </a:p>
+        </p:txBody>
+      </p:sp>
+      <p:sp>
+        <p:nvSpPr>
+          <p:cNvPr id="77" name="Google Shape;77;p16">
+            <a:extLst>
+              <a:ext uri="{FF2B5EF4-FFF2-40B4-BE49-F238E27FC236}">
+                <a16:creationId xmlns:a16="http://schemas.microsoft.com/office/drawing/2014/main" id="{E003ECB4-68A0-AF72-FDFD-EB7C2DD32890}"/>
+              </a:ext>
+            </a:extLst>
+          </p:cNvPr>
+          <p:cNvSpPr>
+            <a:spLocks noGrp="1"/>
+          </p:cNvSpPr>
+          <p:nvPr/>
+        </p:nvSpPr>
+        <p:spPr>
+          <a:xfrm>
+            <a:off x="6349014" y="50217"/>
+            <a:ext cx="2739000" cy="500100"/>
+          </a:xfrm>
+          <a:prstGeom prst="rect">
+            <a:avLst/>
+          </a:prstGeom>
+          <a:noFill/>
+          <a:ln>
+            <a:noFill/>
+          </a:ln>
+        </p:spPr>
+        <p:txBody>
+          <a:bodyPr spcFirstLastPara="1" wrap="square" lIns="68575" tIns="34275" rIns="68575" bIns="34275" anchor="t">
+            <a:spAutoFit/>
+          </a:bodyPr>
+          <a:lstStyle/>
+          <a:p>
+            <a:pPr marL="0" marR="0" lvl="0" indent="0" algn="l">
+              <a:lnSpc>
+                <a:spcPct val="100000"/>
+              </a:lnSpc>
+              <a:spcBef>
+                <a:spcPts val="0"/>
+              </a:spcBef>
+              <a:spcAft>
+                <a:spcPts val="0"/>
+              </a:spcAft>
+              <a:buClr>
+                <a:srgbClr val="000000"/>
+              </a:buClr>
+              <a:buSzPts val="1400"/>
+              <a:buFont typeface="Arial"/>
+              <a:buNone/>
+            </a:pPr>
+            <a:r>
+              <a:rPr sz="1400" b="0" i="0" u="none" cap="none">
+                <a:solidFill>
+                  <a:schemeClr val="lt1"/>
+                </a:solidFill>
+                <a:latin typeface="Arial"/>
+                <a:ea typeface="Arial"/>
+                <a:cs typeface="Arial"/>
+              </a:rPr>
+              <a:t>Electric Propulsion Initiative - ION-I</a:t>
+            </a:r>
+            <a:endParaRPr sz="1100" b="0" i="0" u="none" cap="none">
+              <a:solidFill>
+                <a:srgbClr val="000000"/>
+              </a:solidFill>
+              <a:latin typeface="Arial"/>
+              <a:ea typeface="Arial"/>
+              <a:cs typeface="Arial"/>
+            </a:endParaRPr>
+          </a:p>
+        </p:txBody>
+      </p:sp>
+      <p:pic>
+        <p:nvPicPr>
+          <p:cNvPr id="92" name="Google Shape;78;p16"/>
+          <p:cNvPicPr>
+            <a:picLocks noChangeAspect="1"/>
+          </p:cNvPicPr>
+          <p:nvPr/>
+        </p:nvPicPr>
+        <p:blipFill rotWithShape="1">
+          <a:blip r:embed="rId2">
+            <a:alphaModFix/>
+          </a:blip>
+          <a:srcRect/>
+          <a:stretch/>
+        </p:blipFill>
+        <p:spPr>
+          <a:xfrm>
+            <a:off x="151161" y="50231"/>
+            <a:ext cx="326328" cy="470421"/>
+          </a:xfrm>
+          <a:prstGeom prst="rect">
+            <a:avLst/>
+          </a:prstGeom>
+          <a:ln>
+            <a:noFill/>
+          </a:ln>
+        </p:spPr>
+      </p:pic>
+      <p:pic>
+        <p:nvPicPr>
+          <p:cNvPr id="93" name="Google Shape;79;p16"/>
+          <p:cNvPicPr>
+            <a:picLocks noChangeAspect="1"/>
+          </p:cNvPicPr>
+          <p:nvPr/>
+        </p:nvPicPr>
+        <p:blipFill rotWithShape="1">
+          <a:blip r:embed="rId5">
+            <a:alphaModFix/>
+          </a:blip>
+          <a:srcRect/>
+          <a:stretch/>
+        </p:blipFill>
+        <p:spPr>
+          <a:xfrm>
+            <a:off x="628650" y="-103200"/>
+            <a:ext cx="533165" cy="754089"/>
+          </a:xfrm>
+          <a:prstGeom prst="rect">
+            <a:avLst/>
+          </a:prstGeom>
+          <a:ln>
+            <a:noFill/>
+          </a:ln>
+        </p:spPr>
+      </p:pic>
+      <p:cxnSp>
+        <p:nvCxnSpPr>
+          <p:cNvPr id="94" name="Google Shape;80;p16"/>
+          <p:cNvCxnSpPr/>
+          <p:nvPr/>
+        </p:nvCxnSpPr>
+        <p:spPr>
+          <a:xfrm>
+            <a:off x="589359" y="50231"/>
+            <a:ext cx="0" cy="454500"/>
+          </a:xfrm>
+          <a:prstGeom prst="straightConnector1">
+            <a:avLst/>
+          </a:prstGeom>
+          <a:ln w="19050" cap="flat">
+            <a:solidFill>
+              <a:schemeClr val="lt1"/>
+            </a:solidFill>
+            <a:prstDash val="solid"/>
+            <a:miter/>
+            <a:headEnd type="none" w="sm" len="sm"/>
+            <a:tailEnd type="none" w="sm" len="sm"/>
+          </a:ln>
+        </p:spPr>
+      </p:cxnSp>
+      <p:pic>
+        <p:nvPicPr>
+          <p:cNvPr id="95" name="Google Shape;81;p16"/>
+          <p:cNvPicPr>
+            <a:picLocks noChangeAspect="1"/>
+          </p:cNvPicPr>
+          <p:nvPr/>
+        </p:nvPicPr>
+        <p:blipFill rotWithShape="1">
+          <a:blip r:embed="rId4">
+            <a:alphaModFix/>
+          </a:blip>
+          <a:srcRect/>
+          <a:stretch/>
+        </p:blipFill>
+        <p:spPr>
+          <a:xfrm>
+            <a:off x="7732825" y="3955187"/>
+            <a:ext cx="1239726" cy="1753416"/>
+          </a:xfrm>
+          <a:prstGeom prst="rect">
+            <a:avLst/>
+          </a:prstGeom>
+          <a:ln>
+            <a:noFill/>
+          </a:ln>
+        </p:spPr>
+      </p:pic>
+      <p:sp>
+        <p:nvSpPr>
+          <p:cNvPr id="82" name="Google Shape;82;p16">
+            <a:extLst>
+              <a:ext uri="{FF2B5EF4-FFF2-40B4-BE49-F238E27FC236}">
+                <a16:creationId xmlns:a16="http://schemas.microsoft.com/office/drawing/2014/main" id="{D6B236AD-7344-733D-C8D4-7FFF4844EC55}"/>
+              </a:ext>
+            </a:extLst>
+          </p:cNvPr>
+          <p:cNvSpPr>
+            <a:spLocks noGrp="1"/>
+          </p:cNvSpPr>
+          <p:nvPr/>
+        </p:nvSpPr>
+        <p:spPr>
+          <a:xfrm>
+            <a:off x="8829675" y="4838700"/>
+            <a:ext cx="257175" cy="281910"/>
+          </a:xfrm>
+          <a:prstGeom prst="rect">
+            <a:avLst/>
+          </a:prstGeom>
+          <a:noFill/>
+          <a:ln>
+            <a:noFill/>
+          </a:ln>
+        </p:spPr>
+        <p:txBody>
+          <a:bodyPr spcFirstLastPara="1" wrap="square" lIns="0" tIns="0" rIns="0" bIns="0" anchor="t">
+            <a:noAutofit/>
+          </a:bodyPr>
+          <a:lstStyle/>
+          <a:p>
+            <a:pPr marL="0" marR="0" lvl="0" indent="0" algn="l">
+              <a:lnSpc>
+                <a:spcPct val="100000"/>
+              </a:lnSpc>
+              <a:spcBef>
+                <a:spcPts val="0"/>
+              </a:spcBef>
+              <a:spcAft>
+                <a:spcPts val="0"/>
+              </a:spcAft>
+              <a:buClr>
+                <a:srgbClr val="000000"/>
+              </a:buClr>
+              <a:buSzPts val="1400"/>
+              <a:buFont typeface="Arial"/>
+              <a:buNone/>
+              <a:defRPr sz="1125">
+                <a:solidFill>
+                  <a:srgbClr val="000000"/>
+                </a:solidFill>
+                <a:latin typeface="Arial"/>
+                <a:ea typeface="Arial"/>
+                <a:cs typeface="Arial"/>
+              </a:defRPr>
+            </a:pPr>
+            <a:r>
+              <a:rPr sz="1125" b="0" i="0" u="none" cap="none">
+                <a:solidFill>
+                  <a:srgbClr val="000000"/>
+                </a:solidFill>
+                <a:latin typeface="Arial"/>
+                <a:ea typeface="Arial"/>
+                <a:cs typeface="Arial"/>
+              </a:rPr>
+              <a:t>6</a:t>
+            </a:r>
+            <a:endParaRPr sz="1100" b="0" i="0" u="none" cap="none">
+              <a:solidFill>
+                <a:srgbClr val="000000"/>
+              </a:solidFill>
+              <a:latin typeface="Arial"/>
+              <a:ea typeface="Arial"/>
+              <a:cs typeface="Arial"/>
+            </a:endParaRPr>
+          </a:p>
+        </p:txBody>
+      </p:sp>
+      <p:sp>
+        <p:nvSpPr>
+          <p:cNvPr id="2" name="TextBox 1">
+            <a:extLst>
+              <a:ext uri="{FF2B5EF4-FFF2-40B4-BE49-F238E27FC236}">
+                <a16:creationId xmlns:a16="http://schemas.microsoft.com/office/drawing/2014/main" id="{C03B32CF-B251-58B0-7BAB-AFB6BCFA3973}"/>
+              </a:ext>
+            </a:extLst>
+          </p:cNvPr>
+          <p:cNvSpPr>
+            <a:spLocks noGrp="1"/>
+          </p:cNvSpPr>
+          <p:nvPr/>
+        </p:nvSpPr>
+        <p:spPr>
+          <a:xfrm>
+            <a:off x="209550" y="4810125"/>
+            <a:ext cx="2381250" cy="365760"/>
+          </a:xfrm>
+          <a:prstGeom prst="rect">
+            <a:avLst/>
+          </a:prstGeom>
+          <a:noFill/>
+        </p:spPr>
+        <p:txBody>
+          <a:bodyPr wrap="square" lIns="0" tIns="0" rIns="0" bIns="0">
+            <a:noAutofit/>
+          </a:bodyPr>
+          <a:lstStyle/>
+          <a:p>
+            <a:pPr marL="6350" marR="0" lvl="0" algn="l">
+              <a:lnSpc>
+                <a:spcPct val="90000"/>
+              </a:lnSpc>
+              <a:spcBef>
+                <a:spcPts val="800"/>
+              </a:spcBef>
+              <a:spcAft>
+                <a:spcPts val="0"/>
+              </a:spcAft>
+              <a:buClr>
+                <a:schemeClr val="dk1"/>
+              </a:buClr>
+              <a:buSzPts val="2100"/>
+              <a:buNone/>
+              <a:defRPr sz="1350">
+                <a:solidFill>
+                  <a:srgbClr val="000000"/>
+                </a:solidFill>
+                <a:latin typeface="Arial"/>
+                <a:ea typeface="Arial"/>
+                <a:cs typeface="Arial"/>
+              </a:defRPr>
+            </a:pPr>
+            <a:r>
+              <a:rPr sz="1350">
+                <a:solidFill>
+                  <a:srgbClr val="000000"/>
+                </a:solidFill>
+                <a:latin typeface="Arial"/>
+                <a:ea typeface="Arial"/>
+                <a:cs typeface="Arial"/>
+              </a:rPr>
+              <a:t>Fall 2026</a:t>
+            </a:r>
+            <a:endParaRPr sz="1400">
+              <a:solidFill>
+                <a:schemeClr val="dk1"/>
+              </a:solidFill>
+            </a:endParaRPr>
+          </a:p>
+        </p:txBody>
+      </p:sp>
+      <p:sp>
+        <p:nvSpPr>
+          <p:cNvPr id="86" name="Slide introduction">
+            <a:extLst>
+              <a:ext uri="{FF2B5EF4-FFF2-40B4-BE49-F238E27FC236}">
+                <a16:creationId xmlns:a16="http://schemas.microsoft.com/office/drawing/2014/main" id="{B8F1483B-FB4D-492E-94FB-23C7526FDDD6}"/>
+              </a:ext>
+            </a:extLst>
+          </p:cNvPr>
+          <p:cNvSpPr>
+            <a:spLocks noGrp="1"/>
+          </p:cNvSpPr>
+          <p:nvPr/>
+        </p:nvSpPr>
+        <p:spPr>
+          <a:xfrm>
+            <a:off x="714375" y="1438275"/>
+            <a:ext cx="7734300" cy="485775"/>
+          </a:xfrm>
+          <a:prstGeom prst="rect">
+            <a:avLst/>
+          </a:prstGeom>
+          <a:noFill/>
+          <a:ln w="0">
+            <a:noFill/>
+          </a:ln>
+        </p:spPr>
+        <p:txBody>
+          <a:bodyPr wrap="square" lIns="0" tIns="0" rIns="0" bIns="0" anchor="t">
+            <a:noAutofit/>
+          </a:bodyPr>
+          <a:lstStyle/>
+          <a:p>
+            <a:pPr>
+              <a:lnSpc>
+                <a:spcPct val="108000"/>
+              </a:lnSpc>
+              <a:buNone/>
+              <a:defRPr sz="1650" b="0">
+                <a:solidFill>
+                  <a:srgbClr val="404040"/>
+                </a:solidFill>
+                <a:latin typeface="Arial"/>
+                <a:ea typeface="Arial"/>
+                <a:cs typeface="Arial"/>
+              </a:defRPr>
+            </a:pPr>
+            <a:r>
+              <a:rPr sz="1650" b="0">
+                <a:solidFill>
+                  <a:srgbClr val="404040"/>
+                </a:solidFill>
+                <a:latin typeface="Arial"/>
+                <a:ea typeface="Arial"/>
+                <a:cs typeface="Arial"/>
+              </a:rPr>
+              <a:t>Rendering environment</a:t>
+            </a:r>
+          </a:p>
+        </p:txBody>
+      </p:sp>
+      <p:sp>
+        <p:nvSpPr>
+          <p:cNvPr id="87" name="Main bullets">
+            <a:extLst>
+              <a:ext uri="{FF2B5EF4-FFF2-40B4-BE49-F238E27FC236}">
+                <a16:creationId xmlns:a16="http://schemas.microsoft.com/office/drawing/2014/main" id="{211AE939-D7DF-44D9-A71C-20127A8F71E3}"/>
+              </a:ext>
+            </a:extLst>
+          </p:cNvPr>
+          <p:cNvSpPr>
+            <a:spLocks noGrp="1"/>
+          </p:cNvSpPr>
+          <p:nvPr/>
+        </p:nvSpPr>
+        <p:spPr>
+          <a:xfrm>
+            <a:off x="714375" y="1971675"/>
+            <a:ext cx="7734300" cy="2905125"/>
+          </a:xfrm>
+          <a:prstGeom prst="rect">
+            <a:avLst/>
+          </a:prstGeom>
+          <a:noFill/>
+          <a:ln w="0">
+            <a:noFill/>
+          </a:ln>
+        </p:spPr>
+        <p:txBody>
+          <a:bodyPr wrap="square" lIns="0" tIns="0" rIns="0" bIns="0" anchor="t">
+            <a:noAutofit/>
+          </a:bodyPr>
+          <a:lstStyle/>
+          <a:p>
+            <a:pPr marL="203200" indent="-127000">
+              <a:lnSpc>
+                <a:spcPct val="108000"/>
+              </a:lnSpc>
+              <a:spcAft>
+                <a:spcPts val="1200"/>
+              </a:spcAft>
+              <a:buChar char="•"/>
+              <a:defRPr sz="1800" b="0">
+                <a:solidFill>
+                  <a:srgbClr val="404040"/>
+                </a:solidFill>
+                <a:latin typeface="Arial"/>
+                <a:ea typeface="Arial"/>
+                <a:cs typeface="Arial"/>
+              </a:defRPr>
+            </a:pPr>
+            <a:r>
+              <a:rPr sz="1800" b="0">
+                <a:solidFill>
+                  <a:srgbClr val="404040"/>
+                </a:solidFill>
+                <a:latin typeface="Arial"/>
+                <a:ea typeface="Arial"/>
+                <a:cs typeface="Arial"/>
+              </a:rPr>
+              <a:t>Stand up PyVista / VTK / Trame in this repo</a:t>
+            </a:r>
+          </a:p>
+          <a:p>
+            <a:pPr marL="203200" indent="-127000">
+              <a:lnSpc>
+                <a:spcPct val="108000"/>
+              </a:lnSpc>
+              <a:spcAft>
+                <a:spcPts val="1200"/>
+              </a:spcAft>
+              <a:buChar char="•"/>
+              <a:defRPr sz="1800" b="0">
+                <a:solidFill>
+                  <a:srgbClr val="404040"/>
+                </a:solidFill>
+                <a:latin typeface="Arial"/>
+                <a:ea typeface="Arial"/>
+                <a:cs typeface="Arial"/>
+              </a:defRPr>
+            </a:pPr>
+            <a:r>
+              <a:rPr sz="1800" b="0">
+                <a:solidFill>
+                  <a:srgbClr val="404040"/>
+                </a:solidFill>
+                <a:latin typeface="Arial"/>
+                <a:ea typeface="Arial"/>
+                <a:cs typeface="Arial"/>
+              </a:rPr>
+              <a:t>Wire it to the shared dataset from the plasma-visualization repo</a:t>
+            </a:r>
+          </a:p>
+        </p:txBody>
+      </p:sp>
+    </p:spTree>
+  </p:cSld>
+  <p:clrMapOvr>
+    <a:masterClrMapping/>
+  </p:clrMapOvr>
+</p:sld>
+</file>
+
+<file path=ppt/slides/slide18.xml><?xml version="1.0" encoding="utf-8"?>
+<p:sld xmlns:a="http://schemas.openxmlformats.org/drawingml/2006/main" xmlns:p="http://schemas.openxmlformats.org/presentationml/2006/main" xmlns:r="http://schemas.openxmlformats.org/officeDocument/2006/relationships">
+  <p:cSld>
+    <p:spTree>
+      <p:nvGrpSpPr>
+        <p:cNvPr id="1" name=""/>
+        <p:cNvGrpSpPr/>
+        <p:nvPr/>
+      </p:nvGrpSpPr>
+      <p:grpSpPr/>
+      <p:sp>
+        <p:nvSpPr>
+          <p:cNvPr id="74" name="Google Shape;74;p16">
+            <a:extLst>
+              <a:ext uri="{FF2B5EF4-FFF2-40B4-BE49-F238E27FC236}">
+                <a16:creationId xmlns:a16="http://schemas.microsoft.com/office/drawing/2014/main" id="{F29C6079-CF50-3950-F7B3-37C5016CD1D4}"/>
+              </a:ext>
+            </a:extLst>
+          </p:cNvPr>
+          <p:cNvSpPr>
+            <a:spLocks noGrp="1"/>
+          </p:cNvSpPr>
+          <p:nvPr>
+            <p:ph type="title"/>
+          </p:nvPr>
+        </p:nvSpPr>
+        <p:spPr>
+          <a:xfrm>
+            <a:off x="695325" y="828675"/>
+            <a:ext cx="7953375" cy="619125"/>
+          </a:xfrm>
+          <a:prstGeom prst="rect">
+            <a:avLst/>
+          </a:prstGeom>
+          <a:noFill/>
+          <a:ln>
+            <a:noFill/>
+          </a:ln>
+        </p:spPr>
+        <p:txBody>
+          <a:bodyPr spcFirstLastPara="1" wrap="square" lIns="0" tIns="0" rIns="0" bIns="0" anchor="t">
+            <a:noAutofit/>
+          </a:bodyPr>
+          <a:lstStyle/>
+          <a:p>
+            <a:pPr marL="0" lvl="0" indent="0" algn="l">
+              <a:lnSpc>
+                <a:spcPct val="90000"/>
+              </a:lnSpc>
+              <a:spcBef>
+                <a:spcPts val="0"/>
+              </a:spcBef>
+              <a:spcAft>
+                <a:spcPts val="0"/>
+              </a:spcAft>
+              <a:buClr>
+                <a:schemeClr val="dk1"/>
+              </a:buClr>
+              <a:buSzPts val="3000"/>
+              <a:buFont typeface="Arial"/>
+              <a:buNone/>
+              <a:defRPr sz="3000" b="1">
+                <a:solidFill>
+                  <a:srgbClr val="000000"/>
+                </a:solidFill>
+                <a:latin typeface="Arial"/>
+                <a:ea typeface="Arial"/>
+                <a:cs typeface="Arial"/>
+              </a:defRPr>
+            </a:pPr>
+            <a:r>
+              <a:rPr sz="3000" b="1">
+                <a:solidFill>
+                  <a:srgbClr val="000000"/>
+                </a:solidFill>
+                <a:latin typeface="Arial"/>
+                <a:ea typeface="Arial"/>
+                <a:cs typeface="Arial"/>
+              </a:rPr>
+              <a:t>Coordinating with the main ION-I club</a:t>
+            </a:r>
+            <a:endParaRPr/>
+          </a:p>
+        </p:txBody>
+      </p:sp>
+      <p:sp>
+        <p:nvSpPr>
+          <p:cNvPr id="76" name="Google Shape;76;p16">
+            <a:extLst>
+              <a:ext uri="{FF2B5EF4-FFF2-40B4-BE49-F238E27FC236}">
+                <a16:creationId xmlns:a16="http://schemas.microsoft.com/office/drawing/2014/main" id="{C50CF39B-81F0-A7BF-E4FB-18A3BA818FA8}"/>
+              </a:ext>
+            </a:extLst>
+          </p:cNvPr>
+          <p:cNvSpPr>
+            <a:spLocks noGrp="1"/>
+          </p:cNvSpPr>
+          <p:nvPr/>
+        </p:nvSpPr>
+        <p:spPr>
+          <a:xfrm>
+            <a:off x="0" y="-4697"/>
+            <a:ext cx="9144000" cy="580200"/>
+          </a:xfrm>
+          <a:prstGeom prst="rect">
+            <a:avLst/>
+          </a:prstGeom>
+          <a:solidFill>
+            <a:srgbClr val="11284C"/>
+          </a:solidFill>
+          <a:ln>
+            <a:noFill/>
+          </a:ln>
+        </p:spPr>
+        <p:txBody>
+          <a:bodyPr spcFirstLastPara="1" wrap="square" lIns="68575" tIns="34275" rIns="68575" bIns="34275" anchor="ctr">
+            <a:noAutofit/>
+          </a:bodyPr>
+          <a:lstStyle/>
+          <a:p>
+            <a:pPr marL="0" marR="0" lvl="0" indent="0" algn="ctr">
+              <a:lnSpc>
+                <a:spcPct val="100000"/>
+              </a:lnSpc>
+              <a:spcBef>
+                <a:spcPts val="0"/>
+              </a:spcBef>
+              <a:spcAft>
+                <a:spcPts val="0"/>
+              </a:spcAft>
+              <a:buClr>
+                <a:srgbClr val="000000"/>
+              </a:buClr>
+              <a:buSzPts val="1400"/>
+              <a:buFont typeface="Arial"/>
+              <a:buNone/>
+            </a:pPr>
+            <a:endParaRPr sz="1400" b="0" i="0" u="none" cap="none">
+              <a:solidFill>
+                <a:schemeClr val="lt1"/>
+              </a:solidFill>
+              <a:latin typeface="Arial"/>
+              <a:ea typeface="Arial"/>
+              <a:cs typeface="Arial"/>
+            </a:endParaRPr>
+          </a:p>
+        </p:txBody>
+      </p:sp>
+      <p:sp>
+        <p:nvSpPr>
+          <p:cNvPr id="77" name="Google Shape;77;p16">
+            <a:extLst>
+              <a:ext uri="{FF2B5EF4-FFF2-40B4-BE49-F238E27FC236}">
+                <a16:creationId xmlns:a16="http://schemas.microsoft.com/office/drawing/2014/main" id="{E003ECB4-68A0-AF72-FDFD-EB7C2DD32890}"/>
+              </a:ext>
+            </a:extLst>
+          </p:cNvPr>
+          <p:cNvSpPr>
+            <a:spLocks noGrp="1"/>
+          </p:cNvSpPr>
+          <p:nvPr/>
+        </p:nvSpPr>
+        <p:spPr>
+          <a:xfrm>
+            <a:off x="6349014" y="50217"/>
+            <a:ext cx="2739000" cy="500100"/>
+          </a:xfrm>
+          <a:prstGeom prst="rect">
+            <a:avLst/>
+          </a:prstGeom>
+          <a:noFill/>
+          <a:ln>
+            <a:noFill/>
+          </a:ln>
+        </p:spPr>
+        <p:txBody>
+          <a:bodyPr spcFirstLastPara="1" wrap="square" lIns="68575" tIns="34275" rIns="68575" bIns="34275" anchor="t">
+            <a:spAutoFit/>
+          </a:bodyPr>
+          <a:lstStyle/>
+          <a:p>
+            <a:pPr marL="0" marR="0" lvl="0" indent="0" algn="l">
+              <a:lnSpc>
+                <a:spcPct val="100000"/>
+              </a:lnSpc>
+              <a:spcBef>
+                <a:spcPts val="0"/>
+              </a:spcBef>
+              <a:spcAft>
+                <a:spcPts val="0"/>
+              </a:spcAft>
+              <a:buClr>
+                <a:srgbClr val="000000"/>
+              </a:buClr>
+              <a:buSzPts val="1400"/>
+              <a:buFont typeface="Arial"/>
+              <a:buNone/>
+            </a:pPr>
+            <a:r>
+              <a:rPr sz="1400" b="0" i="0" u="none" cap="none">
+                <a:solidFill>
+                  <a:schemeClr val="lt1"/>
+                </a:solidFill>
+                <a:latin typeface="Arial"/>
+                <a:ea typeface="Arial"/>
+                <a:cs typeface="Arial"/>
+              </a:rPr>
+              <a:t>Electric Propulsion Initiative - ION-I</a:t>
+            </a:r>
+            <a:endParaRPr sz="1100" b="0" i="0" u="none" cap="none">
+              <a:solidFill>
+                <a:srgbClr val="000000"/>
+              </a:solidFill>
+              <a:latin typeface="Arial"/>
+              <a:ea typeface="Arial"/>
+              <a:cs typeface="Arial"/>
+            </a:endParaRPr>
+          </a:p>
+        </p:txBody>
+      </p:sp>
+      <p:pic>
+        <p:nvPicPr>
+          <p:cNvPr id="94" name="Google Shape;78;p16"/>
+          <p:cNvPicPr>
+            <a:picLocks noChangeAspect="1"/>
+          </p:cNvPicPr>
+          <p:nvPr/>
+        </p:nvPicPr>
+        <p:blipFill rotWithShape="1">
+          <a:blip r:embed="rId2">
+            <a:alphaModFix/>
+          </a:blip>
+          <a:srcRect/>
+          <a:stretch/>
+        </p:blipFill>
+        <p:spPr>
+          <a:xfrm>
+            <a:off x="151161" y="50231"/>
+            <a:ext cx="326328" cy="470421"/>
+          </a:xfrm>
+          <a:prstGeom prst="rect">
+            <a:avLst/>
+          </a:prstGeom>
+          <a:ln>
+            <a:noFill/>
+          </a:ln>
+        </p:spPr>
+      </p:pic>
+      <p:pic>
+        <p:nvPicPr>
+          <p:cNvPr id="95" name="Google Shape;79;p16"/>
+          <p:cNvPicPr>
+            <a:picLocks noChangeAspect="1"/>
+          </p:cNvPicPr>
+          <p:nvPr/>
+        </p:nvPicPr>
+        <p:blipFill rotWithShape="1">
+          <a:blip r:embed="rId5">
+            <a:alphaModFix/>
+          </a:blip>
+          <a:srcRect/>
+          <a:stretch/>
+        </p:blipFill>
+        <p:spPr>
+          <a:xfrm>
+            <a:off x="628650" y="-103200"/>
+            <a:ext cx="533165" cy="754089"/>
+          </a:xfrm>
+          <a:prstGeom prst="rect">
+            <a:avLst/>
+          </a:prstGeom>
+          <a:ln>
+            <a:noFill/>
+          </a:ln>
+        </p:spPr>
+      </p:pic>
+      <p:cxnSp>
+        <p:nvCxnSpPr>
+          <p:cNvPr id="96" name="Google Shape;80;p16"/>
+          <p:cNvCxnSpPr/>
+          <p:nvPr/>
+        </p:nvCxnSpPr>
+        <p:spPr>
+          <a:xfrm>
+            <a:off x="589359" y="50231"/>
+            <a:ext cx="0" cy="454500"/>
+          </a:xfrm>
+          <a:prstGeom prst="straightConnector1">
+            <a:avLst/>
+          </a:prstGeom>
+          <a:ln w="19050" cap="flat">
+            <a:solidFill>
+              <a:schemeClr val="lt1"/>
+            </a:solidFill>
+            <a:prstDash val="solid"/>
+            <a:miter/>
+            <a:headEnd type="none" w="sm" len="sm"/>
+            <a:tailEnd type="none" w="sm" len="sm"/>
+          </a:ln>
+        </p:spPr>
+      </p:cxnSp>
+      <p:pic>
+        <p:nvPicPr>
+          <p:cNvPr id="97" name="Google Shape;81;p16"/>
+          <p:cNvPicPr>
+            <a:picLocks noChangeAspect="1"/>
+          </p:cNvPicPr>
+          <p:nvPr/>
+        </p:nvPicPr>
+        <p:blipFill rotWithShape="1">
+          <a:blip r:embed="rId4">
+            <a:alphaModFix/>
+          </a:blip>
+          <a:srcRect/>
+          <a:stretch/>
+        </p:blipFill>
+        <p:spPr>
+          <a:xfrm>
+            <a:off x="7732825" y="3955187"/>
+            <a:ext cx="1239726" cy="1753416"/>
+          </a:xfrm>
+          <a:prstGeom prst="rect">
+            <a:avLst/>
+          </a:prstGeom>
+          <a:ln>
+            <a:noFill/>
+          </a:ln>
+        </p:spPr>
+      </p:pic>
+      <p:sp>
+        <p:nvSpPr>
+          <p:cNvPr id="82" name="Google Shape;82;p16">
+            <a:extLst>
+              <a:ext uri="{FF2B5EF4-FFF2-40B4-BE49-F238E27FC236}">
+                <a16:creationId xmlns:a16="http://schemas.microsoft.com/office/drawing/2014/main" id="{D6B236AD-7344-733D-C8D4-7FFF4844EC55}"/>
+              </a:ext>
+            </a:extLst>
+          </p:cNvPr>
+          <p:cNvSpPr>
+            <a:spLocks noGrp="1"/>
+          </p:cNvSpPr>
+          <p:nvPr/>
+        </p:nvSpPr>
+        <p:spPr>
+          <a:xfrm>
+            <a:off x="8829675" y="4838700"/>
+            <a:ext cx="257175" cy="495270"/>
+          </a:xfrm>
+          <a:prstGeom prst="rect">
+            <a:avLst/>
+          </a:prstGeom>
+          <a:noFill/>
+          <a:ln>
+            <a:noFill/>
+          </a:ln>
+        </p:spPr>
+        <p:txBody>
+          <a:bodyPr spcFirstLastPara="1" wrap="square" lIns="0" tIns="0" rIns="0" bIns="0" anchor="t">
+            <a:noAutofit/>
+          </a:bodyPr>
+          <a:lstStyle/>
+          <a:p>
+            <a:pPr marL="0" marR="0" lvl="0" indent="0" algn="l">
+              <a:lnSpc>
+                <a:spcPct val="100000"/>
+              </a:lnSpc>
+              <a:spcBef>
+                <a:spcPts val="0"/>
+              </a:spcBef>
+              <a:spcAft>
+                <a:spcPts val="0"/>
+              </a:spcAft>
+              <a:buClr>
+                <a:srgbClr val="000000"/>
+              </a:buClr>
+              <a:buSzPts val="1400"/>
+              <a:buFont typeface="Arial"/>
+              <a:buNone/>
+              <a:defRPr sz="1125">
+                <a:solidFill>
+                  <a:srgbClr val="000000"/>
+                </a:solidFill>
+                <a:latin typeface="Arial"/>
+                <a:ea typeface="Arial"/>
+                <a:cs typeface="Arial"/>
+              </a:defRPr>
+            </a:pPr>
+            <a:r>
+              <a:rPr sz="1125" b="0" i="0" u="none" cap="none">
+                <a:solidFill>
+                  <a:srgbClr val="000000"/>
+                </a:solidFill>
+                <a:latin typeface="Arial"/>
+                <a:ea typeface="Arial"/>
+                <a:cs typeface="Arial"/>
+              </a:rPr>
+              <a:t>7</a:t>
+            </a:r>
+            <a:endParaRPr sz="1100" b="0" i="0" u="none" cap="none">
+              <a:solidFill>
+                <a:srgbClr val="000000"/>
+              </a:solidFill>
+              <a:latin typeface="Arial"/>
+              <a:ea typeface="Arial"/>
+              <a:cs typeface="Arial"/>
+            </a:endParaRPr>
+          </a:p>
+        </p:txBody>
+      </p:sp>
+      <p:sp>
+        <p:nvSpPr>
+          <p:cNvPr id="2" name="TextBox 1">
+            <a:extLst>
+              <a:ext uri="{FF2B5EF4-FFF2-40B4-BE49-F238E27FC236}">
+                <a16:creationId xmlns:a16="http://schemas.microsoft.com/office/drawing/2014/main" id="{C03B32CF-B251-58B0-7BAB-AFB6BCFA3973}"/>
+              </a:ext>
+            </a:extLst>
+          </p:cNvPr>
+          <p:cNvSpPr>
+            <a:spLocks noGrp="1"/>
+          </p:cNvSpPr>
+          <p:nvPr/>
+        </p:nvSpPr>
+        <p:spPr>
+          <a:xfrm>
+            <a:off x="209550" y="4810125"/>
+            <a:ext cx="2381250" cy="365760"/>
+          </a:xfrm>
+          <a:prstGeom prst="rect">
+            <a:avLst/>
+          </a:prstGeom>
+          <a:noFill/>
+        </p:spPr>
+        <p:txBody>
+          <a:bodyPr wrap="square" lIns="0" tIns="0" rIns="0" bIns="0">
+            <a:noAutofit/>
+          </a:bodyPr>
+          <a:lstStyle/>
+          <a:p>
+            <a:pPr marL="6350" marR="0" lvl="0" algn="l">
+              <a:lnSpc>
+                <a:spcPct val="90000"/>
+              </a:lnSpc>
+              <a:spcBef>
+                <a:spcPts val="800"/>
+              </a:spcBef>
+              <a:spcAft>
+                <a:spcPts val="0"/>
+              </a:spcAft>
+              <a:buClr>
+                <a:schemeClr val="dk1"/>
+              </a:buClr>
+              <a:buSzPts val="2100"/>
+              <a:buNone/>
+              <a:defRPr sz="1350">
+                <a:solidFill>
+                  <a:srgbClr val="000000"/>
+                </a:solidFill>
+                <a:latin typeface="Arial"/>
+                <a:ea typeface="Arial"/>
+                <a:cs typeface="Arial"/>
+              </a:defRPr>
+            </a:pPr>
+            <a:r>
+              <a:rPr sz="1350">
+                <a:solidFill>
+                  <a:srgbClr val="000000"/>
+                </a:solidFill>
+                <a:latin typeface="Arial"/>
+                <a:ea typeface="Arial"/>
+                <a:cs typeface="Arial"/>
+              </a:rPr>
+              <a:t>Fall 2026</a:t>
+            </a:r>
+            <a:endParaRPr sz="1400">
+              <a:solidFill>
+                <a:schemeClr val="dk1"/>
+              </a:solidFill>
+            </a:endParaRPr>
+          </a:p>
+        </p:txBody>
+      </p:sp>
+      <p:sp>
+        <p:nvSpPr>
+          <p:cNvPr id="86" name="Column 1 heading">
+            <a:extLst>
+              <a:ext uri="{FF2B5EF4-FFF2-40B4-BE49-F238E27FC236}">
+                <a16:creationId xmlns:a16="http://schemas.microsoft.com/office/drawing/2014/main" id="{2DE9F095-B1B7-4694-A4EB-65BCA882CC18}"/>
+              </a:ext>
+            </a:extLst>
+          </p:cNvPr>
+          <p:cNvSpPr>
+            <a:spLocks noGrp="1"/>
+          </p:cNvSpPr>
+          <p:nvPr/>
+        </p:nvSpPr>
+        <p:spPr>
+          <a:xfrm>
+            <a:off x="714375" y="1619250"/>
+            <a:ext cx="3686175" cy="361950"/>
+          </a:xfrm>
+          <a:prstGeom prst="rect">
+            <a:avLst/>
+          </a:prstGeom>
+          <a:noFill/>
+          <a:ln w="0">
+            <a:noFill/>
+          </a:ln>
+        </p:spPr>
+        <p:txBody>
+          <a:bodyPr wrap="square" lIns="0" tIns="0" rIns="0" bIns="0" anchor="t">
+            <a:noAutofit/>
+          </a:bodyPr>
+          <a:lstStyle/>
+          <a:p>
+            <a:pPr>
+              <a:lnSpc>
+                <a:spcPct val="108000"/>
+              </a:lnSpc>
+              <a:buNone/>
+              <a:defRPr sz="1875" b="1">
+                <a:solidFill>
+                  <a:srgbClr val="11284C"/>
+                </a:solidFill>
+                <a:latin typeface="Arial"/>
+                <a:ea typeface="Arial"/>
+                <a:cs typeface="Arial"/>
+              </a:defRPr>
+            </a:pPr>
+            <a:r>
+              <a:rPr sz="1875" b="1">
+                <a:solidFill>
+                  <a:srgbClr val="11284C"/>
+                </a:solidFill>
+                <a:latin typeface="Arial"/>
+                <a:ea typeface="Arial"/>
+                <a:cs typeface="Arial"/>
+              </a:rPr>
+              <a:t>How we stay in sync</a:t>
+            </a:r>
+          </a:p>
+        </p:txBody>
+      </p:sp>
+      <p:sp>
+        <p:nvSpPr>
+          <p:cNvPr id="87" name="Column 1 body">
+            <a:extLst>
+              <a:ext uri="{FF2B5EF4-FFF2-40B4-BE49-F238E27FC236}">
+                <a16:creationId xmlns:a16="http://schemas.microsoft.com/office/drawing/2014/main" id="{BB69C427-3E75-49FD-B0A1-7642A355F868}"/>
+              </a:ext>
+            </a:extLst>
+          </p:cNvPr>
+          <p:cNvSpPr>
+            <a:spLocks noGrp="1"/>
+          </p:cNvSpPr>
+          <p:nvPr/>
+        </p:nvSpPr>
+        <p:spPr>
+          <a:xfrm>
+            <a:off x="714375" y="2066925"/>
+            <a:ext cx="3686175" cy="2428875"/>
+          </a:xfrm>
+          <a:prstGeom prst="rect">
+            <a:avLst/>
+          </a:prstGeom>
+          <a:noFill/>
+          <a:ln w="0">
+            <a:noFill/>
+          </a:ln>
+        </p:spPr>
+        <p:txBody>
+          <a:bodyPr wrap="square" lIns="0" tIns="0" rIns="0" bIns="0" anchor="t">
+            <a:noAutofit/>
+          </a:bodyPr>
+          <a:lstStyle/>
+          <a:p>
+            <a:pPr marL="203200" indent="-127000">
+              <a:lnSpc>
+                <a:spcPct val="108000"/>
+              </a:lnSpc>
+              <a:spcAft>
+                <a:spcPts val="1200"/>
+              </a:spcAft>
+              <a:buChar char="•"/>
+              <a:defRPr sz="1650" b="0">
+                <a:solidFill>
+                  <a:srgbClr val="404040"/>
+                </a:solidFill>
+                <a:latin typeface="Arial"/>
+                <a:ea typeface="Arial"/>
+                <a:cs typeface="Arial"/>
+              </a:defRPr>
+            </a:pPr>
+            <a:r>
+              <a:rPr sz="1650" b="0">
+                <a:solidFill>
+                  <a:srgbClr val="404040"/>
+                </a:solidFill>
+                <a:latin typeface="Arial"/>
+                <a:ea typeface="Arial"/>
+                <a:cs typeface="Arial"/>
+              </a:rPr>
+              <a:t>Check in with the main club on CAD/analysis timelines</a:t>
+            </a:r>
+          </a:p>
+          <a:p>
+            <a:pPr marL="203200" indent="-127000">
+              <a:lnSpc>
+                <a:spcPct val="108000"/>
+              </a:lnSpc>
+              <a:spcAft>
+                <a:spcPts val="1200"/>
+              </a:spcAft>
+              <a:buChar char="•"/>
+              <a:defRPr sz="1650" b="0">
+                <a:solidFill>
+                  <a:srgbClr val="404040"/>
+                </a:solidFill>
+                <a:latin typeface="Arial"/>
+                <a:ea typeface="Arial"/>
+                <a:cs typeface="Arial"/>
+              </a:defRPr>
+            </a:pPr>
+            <a:r>
+              <a:rPr sz="1650" b="0">
+                <a:solidFill>
+                  <a:srgbClr val="404040"/>
+                </a:solidFill>
+                <a:latin typeface="Arial"/>
+                <a:ea typeface="Arial"/>
+                <a:cs typeface="Arial"/>
+              </a:rPr>
+              <a:t>Adjust this plan as their deliverables land</a:t>
+            </a:r>
+          </a:p>
+        </p:txBody>
+      </p:sp>
+      <p:sp>
+        <p:nvSpPr>
+          <p:cNvPr id="88" name="Column 2 heading">
+            <a:extLst>
+              <a:ext uri="{FF2B5EF4-FFF2-40B4-BE49-F238E27FC236}">
+                <a16:creationId xmlns:a16="http://schemas.microsoft.com/office/drawing/2014/main" id="{CC567F5E-3CF7-498C-B1F7-936F2B5ECBC9}"/>
+              </a:ext>
+            </a:extLst>
+          </p:cNvPr>
+          <p:cNvSpPr>
+            <a:spLocks noGrp="1"/>
+          </p:cNvSpPr>
+          <p:nvPr/>
+        </p:nvSpPr>
+        <p:spPr>
+          <a:xfrm>
+            <a:off x="4762500" y="1619250"/>
+            <a:ext cx="3686175" cy="361950"/>
+          </a:xfrm>
+          <a:prstGeom prst="rect">
+            <a:avLst/>
+          </a:prstGeom>
+          <a:noFill/>
+          <a:ln w="0">
+            <a:noFill/>
+          </a:ln>
+        </p:spPr>
+        <p:txBody>
+          <a:bodyPr wrap="square" lIns="0" tIns="0" rIns="0" bIns="0" anchor="t">
+            <a:noAutofit/>
+          </a:bodyPr>
+          <a:lstStyle/>
+          <a:p>
+            <a:pPr>
+              <a:lnSpc>
+                <a:spcPct val="108000"/>
+              </a:lnSpc>
+              <a:buNone/>
+              <a:defRPr sz="1875" b="1">
+                <a:solidFill>
+                  <a:srgbClr val="11284C"/>
+                </a:solidFill>
+                <a:latin typeface="Arial"/>
+                <a:ea typeface="Arial"/>
+                <a:cs typeface="Arial"/>
+              </a:defRPr>
+            </a:pPr>
+            <a:r>
+              <a:rPr sz="1875" b="1">
+                <a:solidFill>
+                  <a:srgbClr val="11284C"/>
+                </a:solidFill>
+                <a:latin typeface="Arial"/>
+                <a:ea typeface="Arial"/>
+                <a:cs typeface="Arial"/>
+              </a:rPr>
+              <a:t>Early cross-team scope</a:t>
+            </a:r>
+          </a:p>
+        </p:txBody>
+      </p:sp>
+      <p:sp>
+        <p:nvSpPr>
+          <p:cNvPr id="89" name="Column 2 body">
+            <a:extLst>
+              <a:ext uri="{FF2B5EF4-FFF2-40B4-BE49-F238E27FC236}">
+                <a16:creationId xmlns:a16="http://schemas.microsoft.com/office/drawing/2014/main" id="{097F249D-5356-46EB-8DC4-2E57F868A9BB}"/>
+              </a:ext>
+            </a:extLst>
+          </p:cNvPr>
+          <p:cNvSpPr>
+            <a:spLocks noGrp="1"/>
+          </p:cNvSpPr>
+          <p:nvPr/>
+        </p:nvSpPr>
+        <p:spPr>
+          <a:xfrm>
+            <a:off x="4762500" y="2066925"/>
+            <a:ext cx="3686175" cy="2428875"/>
+          </a:xfrm>
+          <a:prstGeom prst="rect">
+            <a:avLst/>
+          </a:prstGeom>
+          <a:noFill/>
+          <a:ln w="0">
+            <a:noFill/>
+          </a:ln>
+        </p:spPr>
+        <p:txBody>
+          <a:bodyPr wrap="square" lIns="0" tIns="0" rIns="0" bIns="0" anchor="t">
+            <a:noAutofit/>
+          </a:bodyPr>
+          <a:lstStyle/>
+          <a:p>
+            <a:pPr marL="203200" indent="-127000">
+              <a:lnSpc>
+                <a:spcPct val="108000"/>
+              </a:lnSpc>
+              <a:spcAft>
+                <a:spcPts val="1200"/>
+              </a:spcAft>
+              <a:buChar char="•"/>
+              <a:defRPr sz="1650" b="0">
+                <a:solidFill>
+                  <a:srgbClr val="404040"/>
+                </a:solidFill>
+                <a:latin typeface="Arial"/>
+                <a:ea typeface="Arial"/>
+                <a:cs typeface="Arial"/>
+              </a:defRPr>
+            </a:pPr>
+            <a:r>
+              <a:rPr sz="1650" b="0">
+                <a:solidFill>
+                  <a:srgbClr val="404040"/>
+                </a:solidFill>
+                <a:latin typeface="Arial"/>
+                <a:ea typeface="Arial"/>
+                <a:cs typeface="Arial"/>
+              </a:rPr>
+              <a:t>Discharge Chamber: magnet geometry, field maps (later)</a:t>
+            </a:r>
+          </a:p>
+          <a:p>
+            <a:pPr marL="203200" indent="-127000">
+              <a:lnSpc>
+                <a:spcPct val="108000"/>
+              </a:lnSpc>
+              <a:spcAft>
+                <a:spcPts val="1200"/>
+              </a:spcAft>
+              <a:buChar char="•"/>
+              <a:defRPr sz="1650" b="0">
+                <a:solidFill>
+                  <a:srgbClr val="404040"/>
+                </a:solidFill>
+                <a:latin typeface="Arial"/>
+                <a:ea typeface="Arial"/>
+                <a:cs typeface="Arial"/>
+              </a:defRPr>
+            </a:pPr>
+            <a:r>
+              <a:rPr sz="1650" b="0">
+                <a:solidFill>
+                  <a:srgbClr val="404040"/>
+                </a:solidFill>
+                <a:latin typeface="Arial"/>
+                <a:ea typeface="Arial"/>
+                <a:cs typeface="Arial"/>
+              </a:rPr>
+              <a:t>Ion Optics: grid geometry, ion trajectories (later)</a:t>
+            </a:r>
+          </a:p>
+        </p:txBody>
+      </p:sp>
+    </p:spTree>
+  </p:cSld>
+  <p:clrMapOvr>
+    <a:masterClrMapping/>
+  </p:clrMapOvr>
+</p:sld>
+</file>
+
+<file path=ppt/slides/slide19.xml><?xml version="1.0" encoding="utf-8"?>
+<p:sld xmlns:a="http://schemas.openxmlformats.org/drawingml/2006/main" xmlns:p="http://schemas.openxmlformats.org/presentationml/2006/main" xmlns:r="http://schemas.openxmlformats.org/officeDocument/2006/relationships">
+  <p:cSld>
+    <p:spTree>
+      <p:nvGrpSpPr>
+        <p:cNvPr id="1" name=""/>
+        <p:cNvGrpSpPr/>
+        <p:nvPr/>
+      </p:nvGrpSpPr>
+      <p:grpSpPr/>
+      <p:sp>
+        <p:nvSpPr>
+          <p:cNvPr id="74" name="Google Shape;74;p16">
+            <a:extLst>
+              <a:ext uri="{FF2B5EF4-FFF2-40B4-BE49-F238E27FC236}">
+                <a16:creationId xmlns:a16="http://schemas.microsoft.com/office/drawing/2014/main" id="{F29C6079-CF50-3950-F7B3-37C5016CD1D4}"/>
+              </a:ext>
+            </a:extLst>
+          </p:cNvPr>
+          <p:cNvSpPr>
+            <a:spLocks noGrp="1"/>
+          </p:cNvSpPr>
+          <p:nvPr>
+            <p:ph type="title"/>
+          </p:nvPr>
+        </p:nvSpPr>
+        <p:spPr>
+          <a:xfrm>
+            <a:off x="695325" y="828675"/>
+            <a:ext cx="7953375" cy="619125"/>
+          </a:xfrm>
+          <a:prstGeom prst="rect">
+            <a:avLst/>
+          </a:prstGeom>
+          <a:noFill/>
+          <a:ln>
+            <a:noFill/>
+          </a:ln>
+        </p:spPr>
+        <p:txBody>
+          <a:bodyPr spcFirstLastPara="1" wrap="square" lIns="0" tIns="0" rIns="0" bIns="0" anchor="t">
+            <a:noAutofit/>
+          </a:bodyPr>
+          <a:lstStyle/>
+          <a:p>
+            <a:pPr marL="0" lvl="0" indent="0" algn="l">
+              <a:lnSpc>
+                <a:spcPct val="90000"/>
+              </a:lnSpc>
+              <a:spcBef>
+                <a:spcPts val="0"/>
+              </a:spcBef>
+              <a:spcAft>
+                <a:spcPts val="0"/>
+              </a:spcAft>
+              <a:buClr>
+                <a:schemeClr val="dk1"/>
+              </a:buClr>
+              <a:buSzPts val="3000"/>
+              <a:buFont typeface="Arial"/>
+              <a:buNone/>
+              <a:defRPr sz="3000" b="1">
+                <a:solidFill>
+                  <a:srgbClr val="000000"/>
+                </a:solidFill>
+                <a:latin typeface="Arial"/>
+                <a:ea typeface="Arial"/>
+                <a:cs typeface="Arial"/>
+              </a:defRPr>
+            </a:pPr>
+            <a:r>
+              <a:rPr sz="3000" b="1">
+                <a:solidFill>
+                  <a:srgbClr val="000000"/>
+                </a:solidFill>
+                <a:latin typeface="Arial"/>
+                <a:ea typeface="Arial"/>
+                <a:cs typeface="Arial"/>
+              </a:rPr>
+              <a:t>Paper track</a:t>
+            </a:r>
+            <a:endParaRPr/>
+          </a:p>
+        </p:txBody>
+      </p:sp>
+      <p:sp>
+        <p:nvSpPr>
+          <p:cNvPr id="76" name="Google Shape;76;p16">
+            <a:extLst>
+              <a:ext uri="{FF2B5EF4-FFF2-40B4-BE49-F238E27FC236}">
+                <a16:creationId xmlns:a16="http://schemas.microsoft.com/office/drawing/2014/main" id="{C50CF39B-81F0-A7BF-E4FB-18A3BA818FA8}"/>
+              </a:ext>
+            </a:extLst>
+          </p:cNvPr>
+          <p:cNvSpPr>
+            <a:spLocks noGrp="1"/>
+          </p:cNvSpPr>
+          <p:nvPr/>
+        </p:nvSpPr>
+        <p:spPr>
+          <a:xfrm>
+            <a:off x="0" y="-4697"/>
+            <a:ext cx="9144000" cy="580200"/>
+          </a:xfrm>
+          <a:prstGeom prst="rect">
+            <a:avLst/>
+          </a:prstGeom>
+          <a:solidFill>
+            <a:srgbClr val="11284C"/>
+          </a:solidFill>
+          <a:ln>
+            <a:noFill/>
+          </a:ln>
+        </p:spPr>
+        <p:txBody>
+          <a:bodyPr spcFirstLastPara="1" wrap="square" lIns="68575" tIns="34275" rIns="68575" bIns="34275" anchor="ctr">
+            <a:noAutofit/>
+          </a:bodyPr>
+          <a:lstStyle/>
+          <a:p>
+            <a:pPr marL="0" marR="0" lvl="0" indent="0" algn="ctr">
+              <a:lnSpc>
+                <a:spcPct val="100000"/>
+              </a:lnSpc>
+              <a:spcBef>
+                <a:spcPts val="0"/>
+              </a:spcBef>
+              <a:spcAft>
+                <a:spcPts val="0"/>
+              </a:spcAft>
+              <a:buClr>
+                <a:srgbClr val="000000"/>
+              </a:buClr>
+              <a:buSzPts val="1400"/>
+              <a:buFont typeface="Arial"/>
+              <a:buNone/>
+            </a:pPr>
+            <a:endParaRPr sz="1400" b="0" i="0" u="none" cap="none">
+              <a:solidFill>
+                <a:schemeClr val="lt1"/>
+              </a:solidFill>
+              <a:latin typeface="Arial"/>
+              <a:ea typeface="Arial"/>
+              <a:cs typeface="Arial"/>
+            </a:endParaRPr>
+          </a:p>
+        </p:txBody>
+      </p:sp>
+      <p:sp>
+        <p:nvSpPr>
+          <p:cNvPr id="77" name="Google Shape;77;p16">
+            <a:extLst>
+              <a:ext uri="{FF2B5EF4-FFF2-40B4-BE49-F238E27FC236}">
+                <a16:creationId xmlns:a16="http://schemas.microsoft.com/office/drawing/2014/main" id="{E003ECB4-68A0-AF72-FDFD-EB7C2DD32890}"/>
+              </a:ext>
+            </a:extLst>
+          </p:cNvPr>
+          <p:cNvSpPr>
+            <a:spLocks noGrp="1"/>
+          </p:cNvSpPr>
+          <p:nvPr/>
+        </p:nvSpPr>
+        <p:spPr>
+          <a:xfrm>
+            <a:off x="6349014" y="50217"/>
+            <a:ext cx="2739000" cy="500100"/>
+          </a:xfrm>
+          <a:prstGeom prst="rect">
+            <a:avLst/>
+          </a:prstGeom>
+          <a:noFill/>
+          <a:ln>
+            <a:noFill/>
+          </a:ln>
+        </p:spPr>
+        <p:txBody>
+          <a:bodyPr spcFirstLastPara="1" wrap="square" lIns="68575" tIns="34275" rIns="68575" bIns="34275" anchor="t">
+            <a:spAutoFit/>
+          </a:bodyPr>
+          <a:lstStyle/>
+          <a:p>
+            <a:pPr marL="0" marR="0" lvl="0" indent="0" algn="l">
+              <a:lnSpc>
+                <a:spcPct val="100000"/>
+              </a:lnSpc>
+              <a:spcBef>
+                <a:spcPts val="0"/>
+              </a:spcBef>
+              <a:spcAft>
+                <a:spcPts val="0"/>
+              </a:spcAft>
+              <a:buClr>
+                <a:srgbClr val="000000"/>
+              </a:buClr>
+              <a:buSzPts val="1400"/>
+              <a:buFont typeface="Arial"/>
+              <a:buNone/>
+            </a:pPr>
+            <a:r>
+              <a:rPr sz="1400" b="0" i="0" u="none" cap="none">
+                <a:solidFill>
+                  <a:schemeClr val="lt1"/>
+                </a:solidFill>
+                <a:latin typeface="Arial"/>
+                <a:ea typeface="Arial"/>
+                <a:cs typeface="Arial"/>
+              </a:rPr>
+              <a:t>Electric Propulsion Initiative - ION-I</a:t>
+            </a:r>
+            <a:endParaRPr sz="1100" b="0" i="0" u="none" cap="none">
+              <a:solidFill>
+                <a:srgbClr val="000000"/>
+              </a:solidFill>
+              <a:latin typeface="Arial"/>
+              <a:ea typeface="Arial"/>
+              <a:cs typeface="Arial"/>
+            </a:endParaRPr>
+          </a:p>
+        </p:txBody>
+      </p:sp>
+      <p:pic>
+        <p:nvPicPr>
+          <p:cNvPr id="92" name="Google Shape;78;p16"/>
+          <p:cNvPicPr>
+            <a:picLocks noChangeAspect="1"/>
+          </p:cNvPicPr>
+          <p:nvPr/>
+        </p:nvPicPr>
+        <p:blipFill rotWithShape="1">
+          <a:blip r:embed="rId2">
+            <a:alphaModFix/>
+          </a:blip>
+          <a:srcRect/>
+          <a:stretch/>
+        </p:blipFill>
+        <p:spPr>
+          <a:xfrm>
+            <a:off x="151161" y="50231"/>
+            <a:ext cx="326328" cy="470421"/>
+          </a:xfrm>
+          <a:prstGeom prst="rect">
+            <a:avLst/>
+          </a:prstGeom>
+          <a:ln>
+            <a:noFill/>
+          </a:ln>
+        </p:spPr>
+      </p:pic>
+      <p:pic>
+        <p:nvPicPr>
+          <p:cNvPr id="93" name="Google Shape;79;p16"/>
+          <p:cNvPicPr>
+            <a:picLocks noChangeAspect="1"/>
+          </p:cNvPicPr>
+          <p:nvPr/>
+        </p:nvPicPr>
+        <p:blipFill rotWithShape="1">
+          <a:blip r:embed="rId5">
+            <a:alphaModFix/>
+          </a:blip>
+          <a:srcRect/>
+          <a:stretch/>
+        </p:blipFill>
+        <p:spPr>
+          <a:xfrm>
+            <a:off x="628650" y="-103200"/>
+            <a:ext cx="533165" cy="754089"/>
+          </a:xfrm>
+          <a:prstGeom prst="rect">
+            <a:avLst/>
+          </a:prstGeom>
+          <a:ln>
+            <a:noFill/>
+          </a:ln>
+        </p:spPr>
+      </p:pic>
+      <p:cxnSp>
+        <p:nvCxnSpPr>
+          <p:cNvPr id="94" name="Google Shape;80;p16"/>
+          <p:cNvCxnSpPr/>
+          <p:nvPr/>
+        </p:nvCxnSpPr>
+        <p:spPr>
+          <a:xfrm>
+            <a:off x="589359" y="50231"/>
+            <a:ext cx="0" cy="454500"/>
+          </a:xfrm>
+          <a:prstGeom prst="straightConnector1">
+            <a:avLst/>
+          </a:prstGeom>
+          <a:ln w="19050" cap="flat">
+            <a:solidFill>
+              <a:schemeClr val="lt1"/>
+            </a:solidFill>
+            <a:prstDash val="solid"/>
+            <a:miter/>
+            <a:headEnd type="none" w="sm" len="sm"/>
+            <a:tailEnd type="none" w="sm" len="sm"/>
+          </a:ln>
+        </p:spPr>
+      </p:cxnSp>
+      <p:pic>
+        <p:nvPicPr>
+          <p:cNvPr id="95" name="Google Shape;81;p16"/>
+          <p:cNvPicPr>
+            <a:picLocks noChangeAspect="1"/>
+          </p:cNvPicPr>
+          <p:nvPr/>
+        </p:nvPicPr>
+        <p:blipFill rotWithShape="1">
+          <a:blip r:embed="rId4">
+            <a:alphaModFix/>
+          </a:blip>
+          <a:srcRect/>
+          <a:stretch/>
+        </p:blipFill>
+        <p:spPr>
+          <a:xfrm>
+            <a:off x="7732825" y="3955187"/>
+            <a:ext cx="1239726" cy="1753416"/>
+          </a:xfrm>
+          <a:prstGeom prst="rect">
+            <a:avLst/>
+          </a:prstGeom>
+          <a:ln>
+            <a:noFill/>
+          </a:ln>
+        </p:spPr>
+      </p:pic>
+      <p:sp>
+        <p:nvSpPr>
+          <p:cNvPr id="82" name="Google Shape;82;p16">
+            <a:extLst>
+              <a:ext uri="{FF2B5EF4-FFF2-40B4-BE49-F238E27FC236}">
+                <a16:creationId xmlns:a16="http://schemas.microsoft.com/office/drawing/2014/main" id="{D6B236AD-7344-733D-C8D4-7FFF4844EC55}"/>
+              </a:ext>
+            </a:extLst>
+          </p:cNvPr>
+          <p:cNvSpPr>
+            <a:spLocks noGrp="1"/>
+          </p:cNvSpPr>
+          <p:nvPr/>
+        </p:nvSpPr>
+        <p:spPr>
+          <a:xfrm>
+            <a:off x="8829675" y="4838700"/>
+            <a:ext cx="257175" cy="281910"/>
+          </a:xfrm>
+          <a:prstGeom prst="rect">
+            <a:avLst/>
+          </a:prstGeom>
+          <a:noFill/>
+          <a:ln>
+            <a:noFill/>
+          </a:ln>
+        </p:spPr>
+        <p:txBody>
+          <a:bodyPr spcFirstLastPara="1" wrap="square" lIns="0" tIns="0" rIns="0" bIns="0" anchor="t">
+            <a:noAutofit/>
+          </a:bodyPr>
+          <a:lstStyle/>
+          <a:p>
+            <a:pPr marL="0" marR="0" lvl="0" indent="0" algn="l">
+              <a:lnSpc>
+                <a:spcPct val="100000"/>
+              </a:lnSpc>
+              <a:spcBef>
+                <a:spcPts val="0"/>
+              </a:spcBef>
+              <a:spcAft>
+                <a:spcPts val="0"/>
+              </a:spcAft>
+              <a:buClr>
+                <a:srgbClr val="000000"/>
+              </a:buClr>
+              <a:buSzPts val="1400"/>
+              <a:buFont typeface="Arial"/>
+              <a:buNone/>
+              <a:defRPr sz="1125">
+                <a:solidFill>
+                  <a:srgbClr val="000000"/>
+                </a:solidFill>
+                <a:latin typeface="Arial"/>
+                <a:ea typeface="Arial"/>
+                <a:cs typeface="Arial"/>
+              </a:defRPr>
+            </a:pPr>
+            <a:r>
+              <a:rPr sz="1125" b="0" i="0" u="none" cap="none">
+                <a:solidFill>
+                  <a:srgbClr val="000000"/>
+                </a:solidFill>
+                <a:latin typeface="Arial"/>
+                <a:ea typeface="Arial"/>
+                <a:cs typeface="Arial"/>
+              </a:rPr>
+              <a:t>8</a:t>
+            </a:r>
+            <a:endParaRPr sz="1100" b="0" i="0" u="none" cap="none">
+              <a:solidFill>
+                <a:srgbClr val="000000"/>
+              </a:solidFill>
+              <a:latin typeface="Arial"/>
+              <a:ea typeface="Arial"/>
+              <a:cs typeface="Arial"/>
+            </a:endParaRPr>
+          </a:p>
+        </p:txBody>
+      </p:sp>
+      <p:sp>
+        <p:nvSpPr>
+          <p:cNvPr id="2" name="TextBox 1">
+            <a:extLst>
+              <a:ext uri="{FF2B5EF4-FFF2-40B4-BE49-F238E27FC236}">
+                <a16:creationId xmlns:a16="http://schemas.microsoft.com/office/drawing/2014/main" id="{C03B32CF-B251-58B0-7BAB-AFB6BCFA3973}"/>
+              </a:ext>
+            </a:extLst>
+          </p:cNvPr>
+          <p:cNvSpPr>
+            <a:spLocks noGrp="1"/>
+          </p:cNvSpPr>
+          <p:nvPr/>
+        </p:nvSpPr>
+        <p:spPr>
+          <a:xfrm>
+            <a:off x="209550" y="4810125"/>
+            <a:ext cx="2381250" cy="365760"/>
+          </a:xfrm>
+          <a:prstGeom prst="rect">
+            <a:avLst/>
+          </a:prstGeom>
+          <a:noFill/>
+        </p:spPr>
+        <p:txBody>
+          <a:bodyPr wrap="square" lIns="0" tIns="0" rIns="0" bIns="0">
+            <a:noAutofit/>
+          </a:bodyPr>
+          <a:lstStyle/>
+          <a:p>
+            <a:pPr marL="6350" marR="0" lvl="0" algn="l">
+              <a:lnSpc>
+                <a:spcPct val="90000"/>
+              </a:lnSpc>
+              <a:spcBef>
+                <a:spcPts val="800"/>
+              </a:spcBef>
+              <a:spcAft>
+                <a:spcPts val="0"/>
+              </a:spcAft>
+              <a:buClr>
+                <a:schemeClr val="dk1"/>
+              </a:buClr>
+              <a:buSzPts val="2100"/>
+              <a:buNone/>
+              <a:defRPr sz="1350">
+                <a:solidFill>
+                  <a:srgbClr val="000000"/>
+                </a:solidFill>
+                <a:latin typeface="Arial"/>
+                <a:ea typeface="Arial"/>
+                <a:cs typeface="Arial"/>
+              </a:defRPr>
+            </a:pPr>
+            <a:r>
+              <a:rPr sz="1350">
+                <a:solidFill>
+                  <a:srgbClr val="000000"/>
+                </a:solidFill>
+                <a:latin typeface="Arial"/>
+                <a:ea typeface="Arial"/>
+                <a:cs typeface="Arial"/>
+              </a:rPr>
+              <a:t>Fall 2026</a:t>
+            </a:r>
+            <a:endParaRPr sz="1400">
+              <a:solidFill>
+                <a:schemeClr val="dk1"/>
+              </a:solidFill>
+            </a:endParaRPr>
+          </a:p>
+        </p:txBody>
+      </p:sp>
+      <p:sp>
+        <p:nvSpPr>
+          <p:cNvPr id="86" name="Slide introduction">
+            <a:extLst>
+              <a:ext uri="{FF2B5EF4-FFF2-40B4-BE49-F238E27FC236}">
+                <a16:creationId xmlns:a16="http://schemas.microsoft.com/office/drawing/2014/main" id="{B8F1483B-FB4D-492E-94FB-23C7526FDDD6}"/>
+              </a:ext>
+            </a:extLst>
+          </p:cNvPr>
+          <p:cNvSpPr>
+            <a:spLocks noGrp="1"/>
+          </p:cNvSpPr>
+          <p:nvPr/>
+        </p:nvSpPr>
+        <p:spPr>
+          <a:xfrm>
+            <a:off x="714375" y="1438275"/>
+            <a:ext cx="7734300" cy="485775"/>
+          </a:xfrm>
+          <a:prstGeom prst="rect">
+            <a:avLst/>
+          </a:prstGeom>
+          <a:noFill/>
+          <a:ln w="0">
+            <a:noFill/>
+          </a:ln>
+        </p:spPr>
+        <p:txBody>
+          <a:bodyPr wrap="square" lIns="0" tIns="0" rIns="0" bIns="0" anchor="t">
+            <a:noAutofit/>
+          </a:bodyPr>
+          <a:lstStyle/>
+          <a:p>
+            <a:pPr>
+              <a:lnSpc>
+                <a:spcPct val="108000"/>
+              </a:lnSpc>
+              <a:buNone/>
+              <a:defRPr sz="1650" b="0">
+                <a:solidFill>
+                  <a:srgbClr val="404040"/>
+                </a:solidFill>
+                <a:latin typeface="Arial"/>
+                <a:ea typeface="Arial"/>
+                <a:cs typeface="Arial"/>
+              </a:defRPr>
+            </a:pPr>
+            <a:r>
+              <a:rPr sz="1650" b="0">
+                <a:solidFill>
+                  <a:srgbClr val="404040"/>
+                </a:solidFill>
+                <a:latin typeface="Arial"/>
+                <a:ea typeface="Arial"/>
+                <a:cs typeface="Arial"/>
+              </a:rPr>
+              <a:t>Research-grade paper, topic TBD</a:t>
+            </a:r>
+          </a:p>
+        </p:txBody>
+      </p:sp>
+      <p:sp>
+        <p:nvSpPr>
+          <p:cNvPr id="87" name="Main bullets">
+            <a:extLst>
+              <a:ext uri="{FF2B5EF4-FFF2-40B4-BE49-F238E27FC236}">
+                <a16:creationId xmlns:a16="http://schemas.microsoft.com/office/drawing/2014/main" id="{211AE939-D7DF-44D9-A71C-20127A8F71E3}"/>
+              </a:ext>
+            </a:extLst>
+          </p:cNvPr>
+          <p:cNvSpPr>
+            <a:spLocks noGrp="1"/>
+          </p:cNvSpPr>
+          <p:nvPr/>
+        </p:nvSpPr>
+        <p:spPr>
+          <a:xfrm>
+            <a:off x="714375" y="1971675"/>
+            <a:ext cx="7734300" cy="2905125"/>
+          </a:xfrm>
+          <a:prstGeom prst="rect">
+            <a:avLst/>
+          </a:prstGeom>
+          <a:noFill/>
+          <a:ln w="0">
+            <a:noFill/>
+          </a:ln>
+        </p:spPr>
+        <p:txBody>
+          <a:bodyPr wrap="square" lIns="0" tIns="0" rIns="0" bIns="0" anchor="t">
+            <a:noAutofit/>
+          </a:bodyPr>
+          <a:lstStyle/>
+          <a:p>
+            <a:pPr marL="203200" indent="-127000">
+              <a:lnSpc>
+                <a:spcPct val="108000"/>
+              </a:lnSpc>
+              <a:spcAft>
+                <a:spcPts val="1200"/>
+              </a:spcAft>
+              <a:buChar char="•"/>
+              <a:defRPr sz="1800" b="0">
+                <a:solidFill>
+                  <a:srgbClr val="404040"/>
+                </a:solidFill>
+                <a:latin typeface="Arial"/>
+                <a:ea typeface="Arial"/>
+                <a:cs typeface="Arial"/>
+              </a:defRPr>
+            </a:pPr>
+            <a:r>
+              <a:rPr sz="1800" b="0">
+                <a:solidFill>
+                  <a:srgbClr val="404040"/>
+                </a:solidFill>
+                <a:latin typeface="Arial"/>
+                <a:ea typeface="Arial"/>
+                <a:cs typeface="Arial"/>
+              </a:rPr>
+              <a:t>This week: scope candidate topics against our workstreams, pick one</a:t>
+            </a:r>
+          </a:p>
+          <a:p>
+            <a:pPr marL="203200" indent="-127000">
+              <a:lnSpc>
+                <a:spcPct val="108000"/>
+              </a:lnSpc>
+              <a:spcAft>
+                <a:spcPts val="1200"/>
+              </a:spcAft>
+              <a:buChar char="•"/>
+              <a:defRPr sz="1800" b="0">
+                <a:solidFill>
+                  <a:srgbClr val="404040"/>
+                </a:solidFill>
+                <a:latin typeface="Arial"/>
+                <a:ea typeface="Arial"/>
+                <a:cs typeface="Arial"/>
+              </a:defRPr>
+            </a:pPr>
+            <a:r>
+              <a:rPr sz="1800" b="0">
+                <a:solidFill>
+                  <a:srgbClr val="404040"/>
+                </a:solidFill>
+                <a:latin typeface="Arial"/>
+                <a:ea typeface="Arial"/>
+                <a:cs typeface="Arial"/>
+              </a:rPr>
+              <a:t>Target venues if ready in time: Engineering Open House (Apr 9–10, 2027), Undergraduate Research Symposium (Apr 28–29, 2027)</a:t>
+            </a:r>
+          </a:p>
+        </p:txBody>
+      </p:sp>
+    </p:spTree>
+  </p:cSld>
+  <p:clrMapOvr>
+    <a:masterClrMapping/>
+  </p:clrMapOvr>
+</p:sld>
+</file>
+
+<file path=ppt/slides/slide2.xml><?xml version="1.0" encoding="utf-8"?>
+<p:sld xmlns:a="http://schemas.openxmlformats.org/drawingml/2006/main" xmlns:r="http://schemas.openxmlformats.org/officeDocument/2006/relationships" xmlns:p="http://schemas.openxmlformats.org/presentationml/2006/main">
+  <p:cSld>
+    <p:spTree>
+      <p:nvGrpSpPr>
+        <p:cNvPr id="1" name=""/>
+        <p:cNvGrpSpPr/>
+        <p:nvPr/>
+      </p:nvGrpSpPr>
+      <p:grpSpPr>
+        <a:xfrm>
+          <a:off x="0" y="0"/>
+          <a:ext cx="0" cy="0"/>
+          <a:chOff x="0" y="0"/>
+          <a:chExt cx="0" cy="0"/>
+        </a:xfrm>
+      </p:grpSpPr>
+      <p:sp>
+        <p:nvSpPr>
+          <p:cNvPr id="74" name="Google Shape;74;p16">
+            <a:extLst>
+              <a:ext uri="{FF2B5EF4-FFF2-40B4-BE49-F238E27FC236}">
+                <a16:creationId xmlns:a16="http://schemas.microsoft.com/office/drawing/2014/main" id="{F29C6079-CF50-3950-F7B3-37C5016CD1D4}"/>
+              </a:ext>
+            </a:extLst>
+          </p:cNvPr>
+          <p:cNvSpPr>
+            <a:spLocks noGrp="1"/>
+          </p:cNvSpPr>
+          <p:nvPr>
+            <p:ph type="title"/>
+          </p:nvPr>
+        </p:nvSpPr>
+        <p:spPr>
+          <a:xfrm>
+            <a:off x="695325" y="828675"/>
+            <a:ext cx="7953375" cy="619125"/>
+          </a:xfrm>
+          <a:prstGeom prst="rect">
+            <a:avLst/>
+          </a:prstGeom>
+          <a:noFill/>
+          <a:ln>
+            <a:noFill/>
+          </a:ln>
+        </p:spPr>
+        <p:txBody>
+          <a:bodyPr spcFirstLastPara="1" wrap="square" lIns="0" tIns="0" rIns="0" bIns="0" anchor="t">
+            <a:noAutofit/>
+          </a:bodyPr>
+          <a:lstStyle/>
+          <a:p>
+            <a:pPr marL="0" lvl="0" indent="0" algn="l">
+              <a:lnSpc>
+                <a:spcPct val="90000"/>
+              </a:lnSpc>
+              <a:spcBef>
+                <a:spcPts val="0"/>
+              </a:spcBef>
+              <a:spcAft>
+                <a:spcPts val="0"/>
+              </a:spcAft>
+              <a:buClr>
+                <a:schemeClr val="dk1"/>
+              </a:buClr>
+              <a:buSzPts val="3000"/>
+              <a:buFont typeface="Arial"/>
+              <a:buNone/>
+              <a:defRPr sz="3000" b="1">
+                <a:solidFill>
+                  <a:srgbClr val="000000"/>
+                </a:solidFill>
+                <a:latin typeface="Arial"/>
+                <a:ea typeface="Arial"/>
+                <a:cs typeface="Arial"/>
+              </a:defRPr>
+            </a:pPr>
+            <a:r>
+              <a:rPr sz="3000" b="1">
+                <a:solidFill>
+                  <a:srgbClr val="000000"/>
+                </a:solidFill>
+                <a:latin typeface="Arial"/>
+                <a:ea typeface="Arial"/>
+                <a:cs typeface="Arial"/>
+              </a:rPr>
+              <a:t>Research scope</a:t>
+            </a:r>
+            <a:endParaRPr/>
+          </a:p>
+        </p:txBody>
+      </p:sp>
+      <p:sp>
+        <p:nvSpPr>
+          <p:cNvPr id="76" name="Google Shape;76;p16">
+            <a:extLst>
+              <a:ext uri="{FF2B5EF4-FFF2-40B4-BE49-F238E27FC236}">
+                <a16:creationId xmlns:a16="http://schemas.microsoft.com/office/drawing/2014/main" id="{C50CF39B-81F0-A7BF-E4FB-18A3BA818FA8}"/>
+              </a:ext>
+            </a:extLst>
+          </p:cNvPr>
+          <p:cNvSpPr>
+            <a:spLocks noGrp="1"/>
+          </p:cNvSpPr>
+          <p:nvPr/>
+        </p:nvSpPr>
+        <p:spPr>
+          <a:xfrm>
+            <a:off x="0" y="-4697"/>
+            <a:ext cx="9144000" cy="580200"/>
+          </a:xfrm>
+          <a:prstGeom prst="rect">
+            <a:avLst/>
+          </a:prstGeom>
+          <a:solidFill>
+            <a:srgbClr val="11284C"/>
+          </a:solidFill>
+          <a:ln>
+            <a:noFill/>
+          </a:ln>
+        </p:spPr>
+        <p:txBody>
+          <a:bodyPr spcFirstLastPara="1" wrap="square" lIns="68575" tIns="34275" rIns="68575" bIns="34275" anchor="ctr">
+            <a:noAutofit/>
+          </a:bodyPr>
+          <a:lstStyle/>
+          <a:p>
+            <a:pPr marL="0" marR="0" lvl="0" indent="0" algn="ctr">
+              <a:lnSpc>
+                <a:spcPct val="100000"/>
+              </a:lnSpc>
+              <a:spcBef>
+                <a:spcPts val="0"/>
+              </a:spcBef>
+              <a:spcAft>
+                <a:spcPts val="0"/>
+              </a:spcAft>
+              <a:buClr>
+                <a:srgbClr val="000000"/>
+              </a:buClr>
+              <a:buSzPts val="1400"/>
+              <a:buFont typeface="Arial"/>
+              <a:buNone/>
+            </a:pPr>
+            <a:endParaRPr sz="1400" b="0" i="0" u="none" cap="none">
+              <a:solidFill>
+                <a:schemeClr val="lt1"/>
+              </a:solidFill>
+              <a:latin typeface="Arial"/>
+              <a:ea typeface="Arial"/>
+              <a:cs typeface="Arial"/>
+            </a:endParaRPr>
+          </a:p>
+        </p:txBody>
+      </p:sp>
+      <p:sp>
+        <p:nvSpPr>
+          <p:cNvPr id="77" name="Google Shape;77;p16">
+            <a:extLst>
+              <a:ext uri="{FF2B5EF4-FFF2-40B4-BE49-F238E27FC236}">
+                <a16:creationId xmlns:a16="http://schemas.microsoft.com/office/drawing/2014/main" id="{E003ECB4-68A0-AF72-FDFD-EB7C2DD32890}"/>
+              </a:ext>
+            </a:extLst>
+          </p:cNvPr>
+          <p:cNvSpPr>
+            <a:spLocks noGrp="1"/>
+          </p:cNvSpPr>
+          <p:nvPr/>
+        </p:nvSpPr>
+        <p:spPr>
+          <a:xfrm>
+            <a:off x="6349014" y="50217"/>
+            <a:ext cx="2739000" cy="500100"/>
+          </a:xfrm>
+          <a:prstGeom prst="rect">
+            <a:avLst/>
+          </a:prstGeom>
+          <a:noFill/>
+          <a:ln>
+            <a:noFill/>
+          </a:ln>
+        </p:spPr>
+        <p:txBody>
+          <a:bodyPr spcFirstLastPara="1" wrap="square" lIns="68575" tIns="34275" rIns="68575" bIns="34275" anchor="t">
+            <a:spAutoFit/>
+          </a:bodyPr>
+          <a:lstStyle/>
+          <a:p>
+            <a:pPr marL="0" marR="0" lvl="0" indent="0" algn="l">
+              <a:lnSpc>
+                <a:spcPct val="100000"/>
+              </a:lnSpc>
+              <a:spcBef>
+                <a:spcPts val="0"/>
+              </a:spcBef>
+              <a:spcAft>
+                <a:spcPts val="0"/>
+              </a:spcAft>
+              <a:buClr>
+                <a:srgbClr val="000000"/>
+              </a:buClr>
+              <a:buSzPts val="1400"/>
+              <a:buFont typeface="Arial"/>
+              <a:buNone/>
+            </a:pPr>
+            <a:r>
+              <a:rPr sz="1400" b="0" i="0" u="none" cap="none">
+                <a:solidFill>
+                  <a:schemeClr val="lt1"/>
+                </a:solidFill>
+                <a:latin typeface="Arial"/>
+                <a:ea typeface="Arial"/>
+                <a:cs typeface="Arial"/>
+              </a:rPr>
+              <a:t>Electric Propulsion Initiative - ION-I</a:t>
+            </a:r>
+            <a:endParaRPr sz="1100" b="0" i="0" u="none" cap="none">
+              <a:solidFill>
+                <a:srgbClr val="000000"/>
+              </a:solidFill>
+              <a:latin typeface="Arial"/>
+              <a:ea typeface="Arial"/>
+              <a:cs typeface="Arial"/>
+            </a:endParaRPr>
+          </a:p>
+        </p:txBody>
+      </p:sp>
+      <p:pic>
+        <p:nvPicPr>
+          <p:cNvPr id="90" name="Google Shape;78;p16"/>
+          <p:cNvPicPr>
+            <a:picLocks noChangeAspect="1"/>
+          </p:cNvPicPr>
+          <p:nvPr/>
+        </p:nvPicPr>
+        <p:blipFill rotWithShape="1">
+          <a:blip r:embed="rId3">
+            <a:alphaModFix/>
+          </a:blip>
+          <a:srcRect/>
+          <a:stretch/>
+        </p:blipFill>
+        <p:spPr>
+          <a:xfrm>
+            <a:off x="151161" y="50231"/>
+            <a:ext cx="326328" cy="470421"/>
+          </a:xfrm>
+          <a:prstGeom prst="rect">
+            <a:avLst/>
+          </a:prstGeom>
+          <a:ln>
+            <a:noFill/>
+          </a:ln>
+        </p:spPr>
+      </p:pic>
+      <p:pic>
+        <p:nvPicPr>
+          <p:cNvPr id="91" name="Google Shape;79;p16"/>
+          <p:cNvPicPr>
+            <a:picLocks noChangeAspect="1"/>
+          </p:cNvPicPr>
+          <p:nvPr/>
+        </p:nvPicPr>
+        <p:blipFill rotWithShape="1">
+          <a:blip r:embed="rId4">
+            <a:alphaModFix/>
+          </a:blip>
+          <a:srcRect/>
+          <a:stretch/>
+        </p:blipFill>
+        <p:spPr>
+          <a:xfrm>
+            <a:off x="628650" y="-103200"/>
+            <a:ext cx="533165" cy="754089"/>
+          </a:xfrm>
+          <a:prstGeom prst="rect">
+            <a:avLst/>
+          </a:prstGeom>
+          <a:ln>
+            <a:noFill/>
+          </a:ln>
+        </p:spPr>
+      </p:pic>
+      <p:cxnSp>
+        <p:nvCxnSpPr>
+          <p:cNvPr id="92" name="Google Shape;80;p16"/>
+          <p:cNvCxnSpPr/>
+          <p:nvPr/>
+        </p:nvCxnSpPr>
+        <p:spPr>
+          <a:xfrm>
+            <a:off x="589359" y="50231"/>
+            <a:ext cx="0" cy="454500"/>
+          </a:xfrm>
+          <a:prstGeom prst="straightConnector1">
+            <a:avLst/>
+          </a:prstGeom>
+          <a:ln w="19050" cap="flat">
+            <a:solidFill>
+              <a:schemeClr val="lt1"/>
+            </a:solidFill>
+            <a:prstDash val="solid"/>
+            <a:miter/>
+            <a:headEnd type="none" w="sm" len="sm"/>
+            <a:tailEnd type="none" w="sm" len="sm"/>
+          </a:ln>
+        </p:spPr>
+      </p:cxnSp>
+      <p:pic>
+        <p:nvPicPr>
+          <p:cNvPr id="93" name="Google Shape;81;p16"/>
+          <p:cNvPicPr>
+            <a:picLocks noChangeAspect="1"/>
+          </p:cNvPicPr>
+          <p:nvPr/>
+        </p:nvPicPr>
+        <p:blipFill rotWithShape="1">
+          <a:blip r:embed="rId5">
+            <a:alphaModFix/>
+          </a:blip>
+          <a:srcRect/>
+          <a:stretch/>
+        </p:blipFill>
+        <p:spPr>
+          <a:xfrm>
+            <a:off x="7732825" y="3955187"/>
+            <a:ext cx="1239726" cy="1753416"/>
+          </a:xfrm>
+          <a:prstGeom prst="rect">
+            <a:avLst/>
+          </a:prstGeom>
+          <a:ln>
+            <a:noFill/>
+          </a:ln>
+        </p:spPr>
+      </p:pic>
+      <p:sp>
+        <p:nvSpPr>
+          <p:cNvPr id="82" name="Google Shape;82;p16">
+            <a:extLst>
+              <a:ext uri="{FF2B5EF4-FFF2-40B4-BE49-F238E27FC236}">
+                <a16:creationId xmlns:a16="http://schemas.microsoft.com/office/drawing/2014/main" id="{D6B236AD-7344-733D-C8D4-7FFF4844EC55}"/>
+              </a:ext>
+            </a:extLst>
+          </p:cNvPr>
+          <p:cNvSpPr>
+            <a:spLocks noGrp="1"/>
+          </p:cNvSpPr>
+          <p:nvPr/>
+        </p:nvSpPr>
+        <p:spPr>
+          <a:xfrm>
+            <a:off x="8829675" y="4838700"/>
+            <a:ext cx="257175" cy="281910"/>
+          </a:xfrm>
+          <a:prstGeom prst="rect">
+            <a:avLst/>
+          </a:prstGeom>
+          <a:noFill/>
+          <a:ln>
+            <a:noFill/>
+          </a:ln>
+        </p:spPr>
+        <p:txBody>
+          <a:bodyPr spcFirstLastPara="1" wrap="square" lIns="0" tIns="0" rIns="0" bIns="0" anchor="t">
+            <a:noAutofit/>
+          </a:bodyPr>
+          <a:lstStyle/>
+          <a:p>
+            <a:pPr marL="0" marR="0" lvl="0" indent="0" algn="l">
+              <a:lnSpc>
+                <a:spcPct val="100000"/>
+              </a:lnSpc>
+              <a:spcBef>
+                <a:spcPts val="0"/>
+              </a:spcBef>
+              <a:spcAft>
+                <a:spcPts val="0"/>
+              </a:spcAft>
+              <a:buClr>
+                <a:srgbClr val="000000"/>
+              </a:buClr>
+              <a:buSzPts val="1400"/>
+              <a:buFont typeface="Arial"/>
+              <a:buNone/>
+              <a:defRPr sz="1125">
+                <a:solidFill>
+                  <a:srgbClr val="000000"/>
+                </a:solidFill>
+                <a:latin typeface="Arial"/>
+                <a:ea typeface="Arial"/>
+                <a:cs typeface="Arial"/>
+              </a:defRPr>
+            </a:pPr>
+            <a:r>
+              <a:rPr sz="1125" b="0" i="0" u="none" cap="none">
+                <a:solidFill>
+                  <a:srgbClr val="000000"/>
+                </a:solidFill>
+                <a:latin typeface="Arial"/>
+                <a:ea typeface="Arial"/>
+                <a:cs typeface="Arial"/>
+              </a:rPr>
+              <a:t>2</a:t>
+            </a:r>
+            <a:endParaRPr sz="1100" b="0" i="0" u="none" cap="none">
+              <a:solidFill>
+                <a:srgbClr val="000000"/>
+              </a:solidFill>
+              <a:latin typeface="Arial"/>
+              <a:ea typeface="Arial"/>
+              <a:cs typeface="Arial"/>
+            </a:endParaRPr>
+          </a:p>
+        </p:txBody>
+      </p:sp>
+      <p:sp>
+        <p:nvSpPr>
+          <p:cNvPr id="2" name="TextBox 1">
+            <a:extLst>
+              <a:ext uri="{FF2B5EF4-FFF2-40B4-BE49-F238E27FC236}">
+                <a16:creationId xmlns:a16="http://schemas.microsoft.com/office/drawing/2014/main" id="{C03B32CF-B251-58B0-7BAB-AFB6BCFA3973}"/>
+              </a:ext>
+            </a:extLst>
+          </p:cNvPr>
+          <p:cNvSpPr>
+            <a:spLocks noGrp="1"/>
+          </p:cNvSpPr>
+          <p:nvPr/>
+        </p:nvSpPr>
+        <p:spPr>
+          <a:xfrm>
+            <a:off x="209550" y="4810125"/>
+            <a:ext cx="2381250" cy="365760"/>
+          </a:xfrm>
+          <a:prstGeom prst="rect">
+            <a:avLst/>
+          </a:prstGeom>
+          <a:noFill/>
+        </p:spPr>
+        <p:txBody>
+          <a:bodyPr wrap="square" lIns="0" tIns="0" rIns="0" bIns="0">
+            <a:noAutofit/>
+          </a:bodyPr>
+          <a:lstStyle/>
+          <a:p>
+            <a:pPr marL="6350" marR="0" lvl="0" algn="l">
+              <a:lnSpc>
+                <a:spcPct val="90000"/>
+              </a:lnSpc>
+              <a:spcBef>
+                <a:spcPts val="800"/>
+              </a:spcBef>
+              <a:spcAft>
+                <a:spcPts val="0"/>
+              </a:spcAft>
+              <a:buClr>
+                <a:schemeClr val="dk1"/>
+              </a:buClr>
+              <a:buSzPts val="2100"/>
+              <a:buNone/>
+              <a:defRPr sz="1350">
+                <a:solidFill>
+                  <a:srgbClr val="000000"/>
+                </a:solidFill>
+                <a:latin typeface="Arial"/>
+                <a:ea typeface="Arial"/>
+                <a:cs typeface="Arial"/>
+              </a:defRPr>
+            </a:pPr>
+            <a:r>
+              <a:rPr sz="1350">
+                <a:solidFill>
+                  <a:srgbClr val="000000"/>
+                </a:solidFill>
+                <a:latin typeface="Arial"/>
+                <a:ea typeface="Arial"/>
+                <a:cs typeface="Arial"/>
+              </a:rPr>
+              <a:t>Fall 2026</a:t>
+            </a:r>
+            <a:endParaRPr sz="1400">
+              <a:solidFill>
+                <a:schemeClr val="dk1"/>
+              </a:solidFill>
+            </a:endParaRPr>
+          </a:p>
+        </p:txBody>
+      </p:sp>
+      <p:sp>
+        <p:nvSpPr>
+          <p:cNvPr id="86" name="Main bullets">
+            <a:extLst>
+              <a:ext uri="{FF2B5EF4-FFF2-40B4-BE49-F238E27FC236}">
+                <a16:creationId xmlns:a16="http://schemas.microsoft.com/office/drawing/2014/main" id="{959ADAE8-AE81-4B6A-957C-54ACA1F407A0}"/>
+              </a:ext>
+            </a:extLst>
+          </p:cNvPr>
+          <p:cNvSpPr>
+            <a:spLocks noGrp="1"/>
+          </p:cNvSpPr>
+          <p:nvPr/>
+        </p:nvSpPr>
+        <p:spPr>
+          <a:xfrm>
+            <a:off x="714375" y="1619250"/>
+            <a:ext cx="7734300" cy="2905125"/>
+          </a:xfrm>
+          <a:prstGeom prst="rect">
+            <a:avLst/>
+          </a:prstGeom>
+          <a:noFill/>
+          <a:ln w="0">
+            <a:noFill/>
+          </a:ln>
+        </p:spPr>
+        <p:txBody>
+          <a:bodyPr wrap="square" lIns="0" tIns="0" rIns="0" bIns="0" anchor="t">
+            <a:noAutofit/>
+          </a:bodyPr>
+          <a:lstStyle/>
+          <a:p>
+            <a:pPr marL="203200" indent="-127000">
+              <a:lnSpc>
+                <a:spcPct val="108000"/>
+              </a:lnSpc>
+              <a:spcAft>
+                <a:spcPts val="1200"/>
+              </a:spcAft>
+              <a:buChar char="•"/>
+              <a:defRPr sz="1800" b="0">
+                <a:solidFill>
+                  <a:srgbClr val="404040"/>
+                </a:solidFill>
+                <a:latin typeface="Arial"/>
+                <a:ea typeface="Arial"/>
+                <a:cs typeface="Arial"/>
+              </a:defRPr>
+            </a:pPr>
+            <a:r>
+              <a:rPr sz="1800" b="0">
+                <a:solidFill>
+                  <a:srgbClr val="404040"/>
+                </a:solidFill>
+                <a:latin typeface="Arial"/>
+                <a:ea typeface="Arial"/>
+                <a:cs typeface="Arial"/>
+              </a:rPr>
+              <a:t>Scientific visualization within Plasma Source</a:t>
+            </a:r>
+          </a:p>
+          <a:p>
+            <a:pPr marL="203200" indent="-127000">
+              <a:lnSpc>
+                <a:spcPct val="108000"/>
+              </a:lnSpc>
+              <a:spcAft>
+                <a:spcPts val="1200"/>
+              </a:spcAft>
+              <a:buChar char="•"/>
+              <a:defRPr sz="1800" b="0">
+                <a:solidFill>
+                  <a:srgbClr val="404040"/>
+                </a:solidFill>
+                <a:latin typeface="Arial"/>
+                <a:ea typeface="Arial"/>
+                <a:cs typeface="Arial"/>
+              </a:defRPr>
+            </a:pPr>
+            <a:r>
+              <a:rPr sz="1800" b="0">
+                <a:solidFill>
+                  <a:srgbClr val="404040"/>
+                </a:solidFill>
+                <a:latin typeface="Arial"/>
+                <a:ea typeface="Arial"/>
+                <a:cs typeface="Arial"/>
+              </a:rPr>
+              <a:t>Extend particle visualization to engineering geometry and field data</a:t>
+            </a:r>
+          </a:p>
+          <a:p>
+            <a:pPr marL="203200" indent="-127000">
+              <a:lnSpc>
+                <a:spcPct val="108000"/>
+              </a:lnSpc>
+              <a:spcAft>
+                <a:spcPts val="1200"/>
+              </a:spcAft>
+              <a:buChar char="•"/>
+              <a:defRPr sz="1800" b="0">
+                <a:solidFill>
+                  <a:srgbClr val="404040"/>
+                </a:solidFill>
+                <a:latin typeface="Arial"/>
+                <a:ea typeface="Arial"/>
+                <a:cs typeface="Arial"/>
+              </a:defRPr>
+            </a:pPr>
+            <a:r>
+              <a:rPr sz="1800" b="0">
+                <a:solidFill>
+                  <a:srgbClr val="404040"/>
+                </a:solidFill>
+                <a:latin typeface="Arial"/>
+                <a:ea typeface="Arial"/>
+                <a:cs typeface="Arial"/>
+              </a:rPr>
+              <a:t>Develop scientific figures for papers and technical reviews</a:t>
+            </a:r>
+          </a:p>
+          <a:p>
+            <a:pPr marL="203200" indent="-127000">
+              <a:lnSpc>
+                <a:spcPct val="108000"/>
+              </a:lnSpc>
+              <a:spcAft>
+                <a:spcPts val="1200"/>
+              </a:spcAft>
+              <a:buChar char="•"/>
+              <a:defRPr sz="1800" b="0">
+                <a:solidFill>
+                  <a:srgbClr val="404040"/>
+                </a:solidFill>
+                <a:latin typeface="Arial"/>
+                <a:ea typeface="Arial"/>
+                <a:cs typeface="Arial"/>
+              </a:defRPr>
+            </a:pPr>
+            <a:r>
+              <a:rPr sz="1800" b="0">
+                <a:solidFill>
+                  <a:srgbClr val="404040"/>
+                </a:solidFill>
+                <a:latin typeface="Arial"/>
+                <a:ea typeface="Arial"/>
+                <a:cs typeface="Arial"/>
+              </a:rPr>
+              <a:t>This semester: Club homepage for research results and visualizations</a:t>
+            </a:r>
+          </a:p>
+        </p:txBody>
+      </p:sp>
+    </p:spTree>
+    <p:extLst>
+      <p:ext uri="{BB962C8B-B14F-4D97-AF65-F5344CB8AC3E}">
+        <p14:creationId xmlns:p14="http://schemas.microsoft.com/office/powerpoint/2010/main" val="4031246533"/>
+      </p:ext>
+    </p:extLst>
+  </p:cSld>
+  <p:clrMapOvr>
+    <a:masterClrMapping/>
+  </p:clrMapOvr>
+</p:sld>
+</file>
+
+<file path=ppt/slides/slide20.xml><?xml version="1.0" encoding="utf-8"?>
+<p:sld xmlns:a="http://schemas.openxmlformats.org/drawingml/2006/main" xmlns:p="http://schemas.openxmlformats.org/presentationml/2006/main" xmlns:r="http://schemas.openxmlformats.org/officeDocument/2006/relationships">
+  <p:cSld>
+    <p:spTree>
+      <p:nvGrpSpPr>
+        <p:cNvPr id="1" name=""/>
+        <p:cNvGrpSpPr/>
+        <p:nvPr/>
+      </p:nvGrpSpPr>
+      <p:grpSpPr/>
+      <p:sp>
+        <p:nvSpPr>
+          <p:cNvPr id="74" name="Google Shape;74;p16">
+            <a:extLst>
+              <a:ext uri="{FF2B5EF4-FFF2-40B4-BE49-F238E27FC236}">
+                <a16:creationId xmlns:a16="http://schemas.microsoft.com/office/drawing/2014/main" id="{F29C6079-CF50-3950-F7B3-37C5016CD1D4}"/>
+              </a:ext>
+            </a:extLst>
+          </p:cNvPr>
+          <p:cNvSpPr>
+            <a:spLocks noGrp="1"/>
+          </p:cNvSpPr>
+          <p:nvPr>
+            <p:ph type="title"/>
+          </p:nvPr>
+        </p:nvSpPr>
+        <p:spPr>
+          <a:xfrm>
+            <a:off x="695325" y="828675"/>
+            <a:ext cx="7953375" cy="619125"/>
+          </a:xfrm>
+          <a:prstGeom prst="rect">
+            <a:avLst/>
+          </a:prstGeom>
+          <a:noFill/>
+          <a:ln>
+            <a:noFill/>
+          </a:ln>
+        </p:spPr>
+        <p:txBody>
+          <a:bodyPr spcFirstLastPara="1" wrap="square" lIns="0" tIns="0" rIns="0" bIns="0" anchor="t">
+            <a:noAutofit/>
+          </a:bodyPr>
+          <a:lstStyle/>
+          <a:p>
+            <a:pPr marL="0" lvl="0" indent="0" algn="l">
+              <a:lnSpc>
+                <a:spcPct val="90000"/>
+              </a:lnSpc>
+              <a:spcBef>
+                <a:spcPts val="0"/>
+              </a:spcBef>
+              <a:spcAft>
+                <a:spcPts val="0"/>
+              </a:spcAft>
+              <a:buClr>
+                <a:schemeClr val="dk1"/>
+              </a:buClr>
+              <a:buSzPts val="3000"/>
+              <a:buFont typeface="Arial"/>
+              <a:buNone/>
+              <a:defRPr sz="3000" b="1">
+                <a:solidFill>
+                  <a:srgbClr val="000000"/>
+                </a:solidFill>
+                <a:latin typeface="Arial"/>
+                <a:ea typeface="Arial"/>
+                <a:cs typeface="Arial"/>
+              </a:defRPr>
+            </a:pPr>
+            <a:r>
+              <a:rPr sz="3000" b="1">
+                <a:solidFill>
+                  <a:srgbClr val="000000"/>
+                </a:solidFill>
+                <a:latin typeface="Arial"/>
+                <a:ea typeface="Arial"/>
+                <a:cs typeface="Arial"/>
+              </a:rPr>
+              <a:t>Deliverables this week</a:t>
+            </a:r>
+            <a:endParaRPr/>
+          </a:p>
+        </p:txBody>
+      </p:sp>
+      <p:sp>
+        <p:nvSpPr>
+          <p:cNvPr id="76" name="Google Shape;76;p16">
+            <a:extLst>
+              <a:ext uri="{FF2B5EF4-FFF2-40B4-BE49-F238E27FC236}">
+                <a16:creationId xmlns:a16="http://schemas.microsoft.com/office/drawing/2014/main" id="{C50CF39B-81F0-A7BF-E4FB-18A3BA818FA8}"/>
+              </a:ext>
+            </a:extLst>
+          </p:cNvPr>
+          <p:cNvSpPr>
+            <a:spLocks noGrp="1"/>
+          </p:cNvSpPr>
+          <p:nvPr/>
+        </p:nvSpPr>
+        <p:spPr>
+          <a:xfrm>
+            <a:off x="0" y="-4697"/>
+            <a:ext cx="9144000" cy="580200"/>
+          </a:xfrm>
+          <a:prstGeom prst="rect">
+            <a:avLst/>
+          </a:prstGeom>
+          <a:solidFill>
+            <a:srgbClr val="11284C"/>
+          </a:solidFill>
+          <a:ln>
+            <a:noFill/>
+          </a:ln>
+        </p:spPr>
+        <p:txBody>
+          <a:bodyPr spcFirstLastPara="1" wrap="square" lIns="68575" tIns="34275" rIns="68575" bIns="34275" anchor="ctr">
+            <a:noAutofit/>
+          </a:bodyPr>
+          <a:lstStyle/>
+          <a:p>
+            <a:pPr marL="0" marR="0" lvl="0" indent="0" algn="ctr">
+              <a:lnSpc>
+                <a:spcPct val="100000"/>
+              </a:lnSpc>
+              <a:spcBef>
+                <a:spcPts val="0"/>
+              </a:spcBef>
+              <a:spcAft>
+                <a:spcPts val="0"/>
+              </a:spcAft>
+              <a:buClr>
+                <a:srgbClr val="000000"/>
+              </a:buClr>
+              <a:buSzPts val="1400"/>
+              <a:buFont typeface="Arial"/>
+              <a:buNone/>
+            </a:pPr>
+            <a:endParaRPr sz="1400" b="0" i="0" u="none" cap="none">
+              <a:solidFill>
+                <a:schemeClr val="lt1"/>
+              </a:solidFill>
+              <a:latin typeface="Arial"/>
+              <a:ea typeface="Arial"/>
+              <a:cs typeface="Arial"/>
+            </a:endParaRPr>
+          </a:p>
+        </p:txBody>
+      </p:sp>
+      <p:sp>
+        <p:nvSpPr>
+          <p:cNvPr id="77" name="Google Shape;77;p16">
+            <a:extLst>
+              <a:ext uri="{FF2B5EF4-FFF2-40B4-BE49-F238E27FC236}">
+                <a16:creationId xmlns:a16="http://schemas.microsoft.com/office/drawing/2014/main" id="{E003ECB4-68A0-AF72-FDFD-EB7C2DD32890}"/>
+              </a:ext>
+            </a:extLst>
+          </p:cNvPr>
+          <p:cNvSpPr>
+            <a:spLocks noGrp="1"/>
+          </p:cNvSpPr>
+          <p:nvPr/>
+        </p:nvSpPr>
+        <p:spPr>
+          <a:xfrm>
+            <a:off x="6349014" y="50217"/>
+            <a:ext cx="2739000" cy="500100"/>
+          </a:xfrm>
+          <a:prstGeom prst="rect">
+            <a:avLst/>
+          </a:prstGeom>
+          <a:noFill/>
+          <a:ln>
+            <a:noFill/>
+          </a:ln>
+        </p:spPr>
+        <p:txBody>
+          <a:bodyPr spcFirstLastPara="1" wrap="square" lIns="68575" tIns="34275" rIns="68575" bIns="34275" anchor="t">
+            <a:spAutoFit/>
+          </a:bodyPr>
+          <a:lstStyle/>
+          <a:p>
+            <a:pPr marL="0" marR="0" lvl="0" indent="0" algn="l">
+              <a:lnSpc>
+                <a:spcPct val="100000"/>
+              </a:lnSpc>
+              <a:spcBef>
+                <a:spcPts val="0"/>
+              </a:spcBef>
+              <a:spcAft>
+                <a:spcPts val="0"/>
+              </a:spcAft>
+              <a:buClr>
+                <a:srgbClr val="000000"/>
+              </a:buClr>
+              <a:buSzPts val="1400"/>
+              <a:buFont typeface="Arial"/>
+              <a:buNone/>
+            </a:pPr>
+            <a:r>
+              <a:rPr sz="1400" b="0" i="0" u="none" cap="none">
+                <a:solidFill>
+                  <a:schemeClr val="lt1"/>
+                </a:solidFill>
+                <a:latin typeface="Arial"/>
+                <a:ea typeface="Arial"/>
+                <a:cs typeface="Arial"/>
+              </a:rPr>
+              <a:t>Electric Propulsion Initiative - ION-I</a:t>
+            </a:r>
+            <a:endParaRPr sz="1100" b="0" i="0" u="none" cap="none">
+              <a:solidFill>
+                <a:srgbClr val="000000"/>
+              </a:solidFill>
+              <a:latin typeface="Arial"/>
+              <a:ea typeface="Arial"/>
+              <a:cs typeface="Arial"/>
+            </a:endParaRPr>
+          </a:p>
+        </p:txBody>
+      </p:sp>
+      <p:pic>
+        <p:nvPicPr>
+          <p:cNvPr id="92" name="Google Shape;78;p16"/>
+          <p:cNvPicPr>
+            <a:picLocks noChangeAspect="1"/>
+          </p:cNvPicPr>
+          <p:nvPr/>
+        </p:nvPicPr>
+        <p:blipFill rotWithShape="1">
+          <a:blip r:embed="rId2">
+            <a:alphaModFix/>
+          </a:blip>
+          <a:srcRect/>
+          <a:stretch/>
+        </p:blipFill>
+        <p:spPr>
+          <a:xfrm>
+            <a:off x="151161" y="50231"/>
+            <a:ext cx="326328" cy="470421"/>
+          </a:xfrm>
+          <a:prstGeom prst="rect">
+            <a:avLst/>
+          </a:prstGeom>
+          <a:ln>
+            <a:noFill/>
+          </a:ln>
+        </p:spPr>
+      </p:pic>
+      <p:pic>
+        <p:nvPicPr>
+          <p:cNvPr id="93" name="Google Shape;79;p16"/>
+          <p:cNvPicPr>
+            <a:picLocks noChangeAspect="1"/>
+          </p:cNvPicPr>
+          <p:nvPr/>
+        </p:nvPicPr>
+        <p:blipFill rotWithShape="1">
+          <a:blip r:embed="rId6">
+            <a:alphaModFix/>
+          </a:blip>
+          <a:srcRect/>
+          <a:stretch/>
+        </p:blipFill>
+        <p:spPr>
+          <a:xfrm>
+            <a:off x="628650" y="-103200"/>
+            <a:ext cx="533165" cy="754089"/>
+          </a:xfrm>
+          <a:prstGeom prst="rect">
+            <a:avLst/>
+          </a:prstGeom>
+          <a:ln>
+            <a:noFill/>
+          </a:ln>
+        </p:spPr>
+      </p:pic>
+      <p:cxnSp>
+        <p:nvCxnSpPr>
+          <p:cNvPr id="94" name="Google Shape;80;p16"/>
+          <p:cNvCxnSpPr/>
+          <p:nvPr/>
+        </p:nvCxnSpPr>
+        <p:spPr>
+          <a:xfrm>
+            <a:off x="589359" y="50231"/>
+            <a:ext cx="0" cy="454500"/>
+          </a:xfrm>
+          <a:prstGeom prst="straightConnector1">
+            <a:avLst/>
+          </a:prstGeom>
+          <a:ln w="19050" cap="flat">
+            <a:solidFill>
+              <a:schemeClr val="lt1"/>
+            </a:solidFill>
+            <a:prstDash val="solid"/>
+            <a:miter/>
+            <a:headEnd type="none" w="sm" len="sm"/>
+            <a:tailEnd type="none" w="sm" len="sm"/>
+          </a:ln>
+        </p:spPr>
+      </p:cxnSp>
+      <p:pic>
+        <p:nvPicPr>
+          <p:cNvPr id="95" name="Google Shape;81;p16"/>
+          <p:cNvPicPr>
+            <a:picLocks noChangeAspect="1"/>
+          </p:cNvPicPr>
+          <p:nvPr/>
+        </p:nvPicPr>
+        <p:blipFill rotWithShape="1">
+          <a:blip r:embed="rId5">
+            <a:alphaModFix/>
+          </a:blip>
+          <a:srcRect/>
+          <a:stretch/>
+        </p:blipFill>
+        <p:spPr>
+          <a:xfrm>
+            <a:off x="7732825" y="3955187"/>
+            <a:ext cx="1239726" cy="1753416"/>
+          </a:xfrm>
+          <a:prstGeom prst="rect">
+            <a:avLst/>
+          </a:prstGeom>
+          <a:ln>
+            <a:noFill/>
+          </a:ln>
+        </p:spPr>
+      </p:pic>
+      <p:sp>
+        <p:nvSpPr>
+          <p:cNvPr id="82" name="Google Shape;82;p16">
+            <a:extLst>
+              <a:ext uri="{FF2B5EF4-FFF2-40B4-BE49-F238E27FC236}">
+                <a16:creationId xmlns:a16="http://schemas.microsoft.com/office/drawing/2014/main" id="{D6B236AD-7344-733D-C8D4-7FFF4844EC55}"/>
+              </a:ext>
+            </a:extLst>
+          </p:cNvPr>
+          <p:cNvSpPr>
+            <a:spLocks noGrp="1"/>
+          </p:cNvSpPr>
+          <p:nvPr/>
+        </p:nvSpPr>
+        <p:spPr>
+          <a:xfrm>
+            <a:off x="8829675" y="4838700"/>
+            <a:ext cx="257175" cy="281910"/>
+          </a:xfrm>
+          <a:prstGeom prst="rect">
+            <a:avLst/>
+          </a:prstGeom>
+          <a:noFill/>
+          <a:ln>
+            <a:noFill/>
+          </a:ln>
+        </p:spPr>
+        <p:txBody>
+          <a:bodyPr spcFirstLastPara="1" wrap="square" lIns="0" tIns="0" rIns="0" bIns="0" anchor="t">
+            <a:noAutofit/>
+          </a:bodyPr>
+          <a:lstStyle/>
+          <a:p>
+            <a:pPr marL="0" marR="0" lvl="0" indent="0" algn="l">
+              <a:lnSpc>
+                <a:spcPct val="100000"/>
+              </a:lnSpc>
+              <a:spcBef>
+                <a:spcPts val="0"/>
+              </a:spcBef>
+              <a:spcAft>
+                <a:spcPts val="0"/>
+              </a:spcAft>
+              <a:buClr>
+                <a:srgbClr val="000000"/>
+              </a:buClr>
+              <a:buSzPts val="1400"/>
+              <a:buFont typeface="Arial"/>
+              <a:buNone/>
+              <a:defRPr sz="1125">
+                <a:solidFill>
+                  <a:srgbClr val="000000"/>
+                </a:solidFill>
+                <a:latin typeface="Arial"/>
+                <a:ea typeface="Arial"/>
+                <a:cs typeface="Arial"/>
+              </a:defRPr>
+            </a:pPr>
+            <a:r>
+              <a:rPr sz="1125" b="0" i="0" u="none" cap="none">
+                <a:solidFill>
+                  <a:srgbClr val="000000"/>
+                </a:solidFill>
+                <a:latin typeface="Arial"/>
+                <a:ea typeface="Arial"/>
+                <a:cs typeface="Arial"/>
+              </a:rPr>
+              <a:t>9</a:t>
+            </a:r>
+            <a:endParaRPr sz="1100" b="0" i="0" u="none" cap="none">
+              <a:solidFill>
+                <a:srgbClr val="000000"/>
+              </a:solidFill>
+              <a:latin typeface="Arial"/>
+              <a:ea typeface="Arial"/>
+              <a:cs typeface="Arial"/>
+            </a:endParaRPr>
+          </a:p>
+        </p:txBody>
+      </p:sp>
+      <p:sp>
+        <p:nvSpPr>
+          <p:cNvPr id="2" name="TextBox 1">
+            <a:extLst>
+              <a:ext uri="{FF2B5EF4-FFF2-40B4-BE49-F238E27FC236}">
+                <a16:creationId xmlns:a16="http://schemas.microsoft.com/office/drawing/2014/main" id="{C03B32CF-B251-58B0-7BAB-AFB6BCFA3973}"/>
+              </a:ext>
+            </a:extLst>
+          </p:cNvPr>
+          <p:cNvSpPr>
+            <a:spLocks noGrp="1"/>
+          </p:cNvSpPr>
+          <p:nvPr/>
+        </p:nvSpPr>
+        <p:spPr>
+          <a:xfrm>
+            <a:off x="209550" y="4810125"/>
+            <a:ext cx="2381250" cy="365760"/>
+          </a:xfrm>
+          <a:prstGeom prst="rect">
+            <a:avLst/>
+          </a:prstGeom>
+          <a:noFill/>
+        </p:spPr>
+        <p:txBody>
+          <a:bodyPr wrap="square" lIns="0" tIns="0" rIns="0" bIns="0">
+            <a:noAutofit/>
+          </a:bodyPr>
+          <a:lstStyle/>
+          <a:p>
+            <a:pPr marL="6350" marR="0" lvl="0" algn="l">
+              <a:lnSpc>
+                <a:spcPct val="90000"/>
+              </a:lnSpc>
+              <a:spcBef>
+                <a:spcPts val="800"/>
+              </a:spcBef>
+              <a:spcAft>
+                <a:spcPts val="0"/>
+              </a:spcAft>
+              <a:buClr>
+                <a:schemeClr val="dk1"/>
+              </a:buClr>
+              <a:buSzPts val="2100"/>
+              <a:buNone/>
+              <a:defRPr sz="1350">
+                <a:solidFill>
+                  <a:srgbClr val="000000"/>
+                </a:solidFill>
+                <a:latin typeface="Arial"/>
+                <a:ea typeface="Arial"/>
+                <a:cs typeface="Arial"/>
+              </a:defRPr>
+            </a:pPr>
+            <a:r>
+              <a:rPr sz="1350">
+                <a:solidFill>
+                  <a:srgbClr val="000000"/>
+                </a:solidFill>
+                <a:latin typeface="Arial"/>
+                <a:ea typeface="Arial"/>
+                <a:cs typeface="Arial"/>
+              </a:rPr>
+              <a:t>Fall 2026</a:t>
+            </a:r>
+            <a:endParaRPr sz="1400">
+              <a:solidFill>
+                <a:schemeClr val="dk1"/>
+              </a:solidFill>
+            </a:endParaRPr>
+          </a:p>
+        </p:txBody>
+      </p:sp>
+      <p:sp>
+        <p:nvSpPr>
+          <p:cNvPr id="86" name="Slide introduction">
+            <a:extLst>
+              <a:ext uri="{FF2B5EF4-FFF2-40B4-BE49-F238E27FC236}">
+                <a16:creationId xmlns:a16="http://schemas.microsoft.com/office/drawing/2014/main" id="{8526F57D-8710-4494-82DA-EB0E0B2C5E2D}"/>
+              </a:ext>
+            </a:extLst>
+          </p:cNvPr>
+          <p:cNvSpPr>
+            <a:spLocks noGrp="1"/>
+          </p:cNvSpPr>
+          <p:nvPr/>
+        </p:nvSpPr>
+        <p:spPr>
+          <a:xfrm>
+            <a:off x="714375" y="1438275"/>
+            <a:ext cx="7734300" cy="485775"/>
+          </a:xfrm>
+          <a:prstGeom prst="rect">
+            <a:avLst/>
+          </a:prstGeom>
+          <a:noFill/>
+          <a:ln w="0">
+            <a:noFill/>
+          </a:ln>
+        </p:spPr>
+        <p:txBody>
+          <a:bodyPr wrap="square" lIns="0" tIns="0" rIns="0" bIns="0" anchor="t">
+            <a:noAutofit/>
+          </a:bodyPr>
+          <a:lstStyle/>
+          <a:p>
+            <a:pPr>
+              <a:lnSpc>
+                <a:spcPct val="108000"/>
+              </a:lnSpc>
+              <a:buNone/>
+              <a:defRPr sz="1650" b="0">
+                <a:solidFill>
+                  <a:srgbClr val="404040"/>
+                </a:solidFill>
+                <a:latin typeface="Arial"/>
+                <a:ea typeface="Arial"/>
+                <a:cs typeface="Arial"/>
+              </a:defRPr>
+            </a:pPr>
+            <a:r>
+              <a:rPr sz="1650" b="0">
+                <a:solidFill>
+                  <a:srgbClr val="404040"/>
+                </a:solidFill>
+                <a:latin typeface="Arial"/>
+                <a:ea typeface="Arial"/>
+                <a:cs typeface="Arial"/>
+              </a:rPr>
+              <a:t>Data &amp; geometry inventory and import plan</a:t>
+            </a:r>
+          </a:p>
+          <a:p>
+            <a:pPr>
+              <a:lnSpc>
+                <a:spcPct val="108000"/>
+              </a:lnSpc>
+              <a:buNone/>
+              <a:defRPr sz="1650" b="0">
+                <a:solidFill>
+                  <a:srgbClr val="404040"/>
+                </a:solidFill>
+                <a:latin typeface="Arial"/>
+                <a:ea typeface="Arial"/>
+                <a:cs typeface="Arial"/>
+              </a:defRPr>
+            </a:pPr>
+            <a:r>
+              <a:rPr sz="1650" b="0">
+                <a:solidFill>
+                  <a:srgbClr val="404040"/>
+                </a:solidFill>
+                <a:latin typeface="Arial"/>
+                <a:ea typeface="Arial"/>
+                <a:cs typeface="Arial"/>
+              </a:rPr>
+              <a:t>Paper topic selected</a:t>
+            </a:r>
+          </a:p>
+        </p:txBody>
+      </p:sp>
+      <p:pic>
+        <p:nvPicPr>
+          <p:cNvPr id="99" name="Picture 98"/>
+          <p:cNvPicPr>
+            <a:picLocks noChangeAspect="1"/>
+          </p:cNvPicPr>
+          <p:nvPr/>
+        </p:nvPicPr>
+        <p:blipFill>
+          <a:blip r:embed="rId4"/>
+          <a:stretch/>
+        </p:blipFill>
+        <p:spPr>
+          <a:xfrm>
+            <a:off x="2280114" y="2019300"/>
+            <a:ext cx="4602822" cy="2400300"/>
+          </a:xfrm>
+          <a:prstGeom prst="rect">
+            <a:avLst/>
+          </a:prstGeom>
+        </p:spPr>
+      </p:pic>
+    </p:spTree>
+  </p:cSld>
+  <p:clrMapOvr>
+    <a:masterClrMapping/>
+  </p:clrMapOvr>
+</p:sld>
+</file>
+
+<file path=ppt/slides/slide21.xml><?xml version="1.0" encoding="utf-8"?>
+<p:sld xmlns:a="http://schemas.openxmlformats.org/drawingml/2006/main" xmlns:p="http://schemas.openxmlformats.org/presentationml/2006/main" xmlns:r="http://schemas.openxmlformats.org/officeDocument/2006/relationships">
+  <p:cSld>
+    <p:spTree>
+      <p:nvGrpSpPr>
+        <p:cNvPr id="1" name=""/>
+        <p:cNvGrpSpPr/>
+        <p:nvPr/>
+      </p:nvGrpSpPr>
+      <p:grpSpPr/>
+      <p:sp>
+        <p:nvSpPr>
+          <p:cNvPr id="74" name="Google Shape;74;p16">
+            <a:extLst>
+              <a:ext uri="{FF2B5EF4-FFF2-40B4-BE49-F238E27FC236}">
+                <a16:creationId xmlns:a16="http://schemas.microsoft.com/office/drawing/2014/main" id="{F29C6079-CF50-3950-F7B3-37C5016CD1D4}"/>
+              </a:ext>
+            </a:extLst>
+          </p:cNvPr>
+          <p:cNvSpPr>
+            <a:spLocks noGrp="1"/>
+          </p:cNvSpPr>
+          <p:nvPr>
+            <p:ph type="title"/>
+          </p:nvPr>
+        </p:nvSpPr>
+        <p:spPr>
+          <a:xfrm>
+            <a:off x="695325" y="828675"/>
+            <a:ext cx="7953375" cy="619125"/>
+          </a:xfrm>
+          <a:prstGeom prst="rect">
+            <a:avLst/>
+          </a:prstGeom>
+          <a:noFill/>
+          <a:ln>
+            <a:noFill/>
+          </a:ln>
+        </p:spPr>
+        <p:txBody>
+          <a:bodyPr spcFirstLastPara="1" wrap="square" lIns="0" tIns="0" rIns="0" bIns="0" anchor="t">
+            <a:noAutofit/>
+          </a:bodyPr>
+          <a:lstStyle/>
+          <a:p>
+            <a:pPr marL="0" lvl="0" indent="0" algn="l">
+              <a:lnSpc>
+                <a:spcPct val="90000"/>
+              </a:lnSpc>
+              <a:spcBef>
+                <a:spcPts val="0"/>
+              </a:spcBef>
+              <a:spcAft>
+                <a:spcPts val="0"/>
+              </a:spcAft>
+              <a:buClr>
+                <a:schemeClr val="dk1"/>
+              </a:buClr>
+              <a:buSzPts val="3000"/>
+              <a:buFont typeface="Arial"/>
+              <a:buNone/>
+              <a:defRPr sz="3000" b="1">
+                <a:solidFill>
+                  <a:srgbClr val="000000"/>
+                </a:solidFill>
+                <a:latin typeface="Arial"/>
+                <a:ea typeface="Arial"/>
+                <a:cs typeface="Arial"/>
+              </a:defRPr>
+            </a:pPr>
+            <a:r>
+              <a:rPr sz="3000" b="1">
+                <a:solidFill>
+                  <a:srgbClr val="000000"/>
+                </a:solidFill>
+                <a:latin typeface="Arial"/>
+                <a:ea typeface="Arial"/>
+                <a:cs typeface="Arial"/>
+              </a:rPr>
+              <a:t>Rough team split (4–5 people)</a:t>
+            </a:r>
+            <a:endParaRPr/>
+          </a:p>
+        </p:txBody>
+      </p:sp>
+      <p:sp>
+        <p:nvSpPr>
+          <p:cNvPr id="76" name="Google Shape;76;p16">
+            <a:extLst>
+              <a:ext uri="{FF2B5EF4-FFF2-40B4-BE49-F238E27FC236}">
+                <a16:creationId xmlns:a16="http://schemas.microsoft.com/office/drawing/2014/main" id="{C50CF39B-81F0-A7BF-E4FB-18A3BA818FA8}"/>
+              </a:ext>
+            </a:extLst>
+          </p:cNvPr>
+          <p:cNvSpPr>
+            <a:spLocks noGrp="1"/>
+          </p:cNvSpPr>
+          <p:nvPr/>
+        </p:nvSpPr>
+        <p:spPr>
+          <a:xfrm>
+            <a:off x="0" y="-4697"/>
+            <a:ext cx="9144000" cy="580200"/>
+          </a:xfrm>
+          <a:prstGeom prst="rect">
+            <a:avLst/>
+          </a:prstGeom>
+          <a:solidFill>
+            <a:srgbClr val="11284C"/>
+          </a:solidFill>
+          <a:ln>
+            <a:noFill/>
+          </a:ln>
+        </p:spPr>
+        <p:txBody>
+          <a:bodyPr spcFirstLastPara="1" wrap="square" lIns="68575" tIns="34275" rIns="68575" bIns="34275" anchor="ctr">
+            <a:noAutofit/>
+          </a:bodyPr>
+          <a:lstStyle/>
+          <a:p>
+            <a:pPr marL="0" marR="0" lvl="0" indent="0" algn="ctr">
+              <a:lnSpc>
+                <a:spcPct val="100000"/>
+              </a:lnSpc>
+              <a:spcBef>
+                <a:spcPts val="0"/>
+              </a:spcBef>
+              <a:spcAft>
+                <a:spcPts val="0"/>
+              </a:spcAft>
+              <a:buClr>
+                <a:srgbClr val="000000"/>
+              </a:buClr>
+              <a:buSzPts val="1400"/>
+              <a:buFont typeface="Arial"/>
+              <a:buNone/>
+            </a:pPr>
+            <a:endParaRPr sz="1400" b="0" i="0" u="none" cap="none">
+              <a:solidFill>
+                <a:schemeClr val="lt1"/>
+              </a:solidFill>
+              <a:latin typeface="Arial"/>
+              <a:ea typeface="Arial"/>
+              <a:cs typeface="Arial"/>
+            </a:endParaRPr>
+          </a:p>
+        </p:txBody>
+      </p:sp>
+      <p:sp>
+        <p:nvSpPr>
+          <p:cNvPr id="77" name="Google Shape;77;p16">
+            <a:extLst>
+              <a:ext uri="{FF2B5EF4-FFF2-40B4-BE49-F238E27FC236}">
+                <a16:creationId xmlns:a16="http://schemas.microsoft.com/office/drawing/2014/main" id="{E003ECB4-68A0-AF72-FDFD-EB7C2DD32890}"/>
+              </a:ext>
+            </a:extLst>
+          </p:cNvPr>
+          <p:cNvSpPr>
+            <a:spLocks noGrp="1"/>
+          </p:cNvSpPr>
+          <p:nvPr/>
+        </p:nvSpPr>
+        <p:spPr>
+          <a:xfrm>
+            <a:off x="6349014" y="50217"/>
+            <a:ext cx="2739000" cy="500100"/>
+          </a:xfrm>
+          <a:prstGeom prst="rect">
+            <a:avLst/>
+          </a:prstGeom>
+          <a:noFill/>
+          <a:ln>
+            <a:noFill/>
+          </a:ln>
+        </p:spPr>
+        <p:txBody>
+          <a:bodyPr spcFirstLastPara="1" wrap="square" lIns="68575" tIns="34275" rIns="68575" bIns="34275" anchor="t">
+            <a:spAutoFit/>
+          </a:bodyPr>
+          <a:lstStyle/>
+          <a:p>
+            <a:pPr marL="0" marR="0" lvl="0" indent="0" algn="l">
+              <a:lnSpc>
+                <a:spcPct val="100000"/>
+              </a:lnSpc>
+              <a:spcBef>
+                <a:spcPts val="0"/>
+              </a:spcBef>
+              <a:spcAft>
+                <a:spcPts val="0"/>
+              </a:spcAft>
+              <a:buClr>
+                <a:srgbClr val="000000"/>
+              </a:buClr>
+              <a:buSzPts val="1400"/>
+              <a:buFont typeface="Arial"/>
+              <a:buNone/>
+            </a:pPr>
+            <a:r>
+              <a:rPr sz="1400" b="0" i="0" u="none" cap="none">
+                <a:solidFill>
+                  <a:schemeClr val="lt1"/>
+                </a:solidFill>
+                <a:latin typeface="Arial"/>
+                <a:ea typeface="Arial"/>
+                <a:cs typeface="Arial"/>
+              </a:rPr>
+              <a:t>Electric Propulsion Initiative - ION-I</a:t>
+            </a:r>
+            <a:endParaRPr sz="1100" b="0" i="0" u="none" cap="none">
+              <a:solidFill>
+                <a:srgbClr val="000000"/>
+              </a:solidFill>
+              <a:latin typeface="Arial"/>
+              <a:ea typeface="Arial"/>
+              <a:cs typeface="Arial"/>
+            </a:endParaRPr>
+          </a:p>
+        </p:txBody>
+      </p:sp>
+      <p:pic>
+        <p:nvPicPr>
+          <p:cNvPr id="91" name="Google Shape;78;p16"/>
+          <p:cNvPicPr>
+            <a:picLocks noChangeAspect="1"/>
+          </p:cNvPicPr>
+          <p:nvPr/>
+        </p:nvPicPr>
+        <p:blipFill rotWithShape="1">
+          <a:blip r:embed="rId2">
+            <a:alphaModFix/>
+          </a:blip>
+          <a:srcRect/>
+          <a:stretch/>
+        </p:blipFill>
+        <p:spPr>
+          <a:xfrm>
+            <a:off x="151161" y="50231"/>
+            <a:ext cx="326328" cy="470421"/>
+          </a:xfrm>
+          <a:prstGeom prst="rect">
+            <a:avLst/>
+          </a:prstGeom>
+          <a:ln>
+            <a:noFill/>
+          </a:ln>
+        </p:spPr>
+      </p:pic>
+      <p:pic>
+        <p:nvPicPr>
+          <p:cNvPr id="92" name="Google Shape;79;p16"/>
+          <p:cNvPicPr>
+            <a:picLocks noChangeAspect="1"/>
+          </p:cNvPicPr>
+          <p:nvPr/>
+        </p:nvPicPr>
+        <p:blipFill rotWithShape="1">
+          <a:blip r:embed="rId5">
+            <a:alphaModFix/>
+          </a:blip>
+          <a:srcRect/>
+          <a:stretch/>
+        </p:blipFill>
+        <p:spPr>
+          <a:xfrm>
+            <a:off x="628650" y="-103200"/>
+            <a:ext cx="533165" cy="754089"/>
+          </a:xfrm>
+          <a:prstGeom prst="rect">
+            <a:avLst/>
+          </a:prstGeom>
+          <a:ln>
+            <a:noFill/>
+          </a:ln>
+        </p:spPr>
+      </p:pic>
+      <p:cxnSp>
+        <p:nvCxnSpPr>
+          <p:cNvPr id="93" name="Google Shape;80;p16"/>
+          <p:cNvCxnSpPr/>
+          <p:nvPr/>
+        </p:nvCxnSpPr>
+        <p:spPr>
+          <a:xfrm>
+            <a:off x="589359" y="50231"/>
+            <a:ext cx="0" cy="454500"/>
+          </a:xfrm>
+          <a:prstGeom prst="straightConnector1">
+            <a:avLst/>
+          </a:prstGeom>
+          <a:ln w="19050" cap="flat">
+            <a:solidFill>
+              <a:schemeClr val="lt1"/>
+            </a:solidFill>
+            <a:prstDash val="solid"/>
+            <a:miter/>
+            <a:headEnd type="none" w="sm" len="sm"/>
+            <a:tailEnd type="none" w="sm" len="sm"/>
+          </a:ln>
+        </p:spPr>
+      </p:cxnSp>
+      <p:pic>
+        <p:nvPicPr>
+          <p:cNvPr id="94" name="Google Shape;81;p16"/>
+          <p:cNvPicPr>
+            <a:picLocks noChangeAspect="1"/>
+          </p:cNvPicPr>
+          <p:nvPr/>
+        </p:nvPicPr>
+        <p:blipFill rotWithShape="1">
+          <a:blip r:embed="rId4">
+            <a:alphaModFix/>
+          </a:blip>
+          <a:srcRect/>
+          <a:stretch/>
+        </p:blipFill>
+        <p:spPr>
+          <a:xfrm>
+            <a:off x="7732825" y="3955187"/>
+            <a:ext cx="1239726" cy="1753416"/>
+          </a:xfrm>
+          <a:prstGeom prst="rect">
+            <a:avLst/>
+          </a:prstGeom>
+          <a:ln>
+            <a:noFill/>
+          </a:ln>
+        </p:spPr>
+      </p:pic>
+      <p:sp>
+        <p:nvSpPr>
+          <p:cNvPr id="82" name="Google Shape;82;p16">
+            <a:extLst>
+              <a:ext uri="{FF2B5EF4-FFF2-40B4-BE49-F238E27FC236}">
+                <a16:creationId xmlns:a16="http://schemas.microsoft.com/office/drawing/2014/main" id="{D6B236AD-7344-733D-C8D4-7FFF4844EC55}"/>
+              </a:ext>
+            </a:extLst>
+          </p:cNvPr>
+          <p:cNvSpPr>
+            <a:spLocks noGrp="1"/>
+          </p:cNvSpPr>
+          <p:nvPr/>
+        </p:nvSpPr>
+        <p:spPr>
+          <a:xfrm>
+            <a:off x="8829675" y="4838700"/>
+            <a:ext cx="257175" cy="281910"/>
+          </a:xfrm>
+          <a:prstGeom prst="rect">
+            <a:avLst/>
+          </a:prstGeom>
+          <a:noFill/>
+          <a:ln>
+            <a:noFill/>
+          </a:ln>
+        </p:spPr>
+        <p:txBody>
+          <a:bodyPr spcFirstLastPara="1" wrap="square" lIns="0" tIns="0" rIns="0" bIns="0" anchor="t">
+            <a:noAutofit/>
+          </a:bodyPr>
+          <a:lstStyle/>
+          <a:p>
+            <a:pPr marL="0" marR="0" lvl="0" indent="0" algn="l">
+              <a:lnSpc>
+                <a:spcPct val="100000"/>
+              </a:lnSpc>
+              <a:spcBef>
+                <a:spcPts val="0"/>
+              </a:spcBef>
+              <a:spcAft>
+                <a:spcPts val="0"/>
+              </a:spcAft>
+              <a:buClr>
+                <a:srgbClr val="000000"/>
+              </a:buClr>
+              <a:buSzPts val="1400"/>
+              <a:buFont typeface="Arial"/>
+              <a:buNone/>
+              <a:defRPr sz="1125">
+                <a:solidFill>
+                  <a:srgbClr val="000000"/>
+                </a:solidFill>
+                <a:latin typeface="Arial"/>
+                <a:ea typeface="Arial"/>
+                <a:cs typeface="Arial"/>
+              </a:defRPr>
+            </a:pPr>
+            <a:r>
+              <a:rPr sz="1125" b="0" i="0" u="none" cap="none">
+                <a:solidFill>
+                  <a:srgbClr val="000000"/>
+                </a:solidFill>
+                <a:latin typeface="Arial"/>
+                <a:ea typeface="Arial"/>
+                <a:cs typeface="Arial"/>
+              </a:rPr>
+              <a:t>10</a:t>
             </a:r>
             <a:endParaRPr sz="1100" b="0" i="0" u="none" cap="none">
               <a:solidFill>
@@ -7740,7 +14287,7 @@
 </p:sld>
 </file>
 
-<file path=ppt/slides/slide15.xml><?xml version="1.0" encoding="utf-8"?>
+<file path=ppt/slides/slide22.xml><?xml version="1.0" encoding="utf-8"?>
 <p:sld xmlns:a="http://schemas.openxmlformats.org/drawingml/2006/main" xmlns:p="http://schemas.openxmlformats.org/presentationml/2006/main" xmlns:r="http://schemas.openxmlformats.org/officeDocument/2006/relationships">
   <p:cSld>
     <p:spTree>
@@ -7819,7 +14366,7 @@
                 <a:ea typeface="Arial"/>
                 <a:cs typeface="Arial"/>
               </a:rPr>
-              <a:t>Paper track &amp; next week</a:t>
+              <a:t>Working together</a:t>
             </a:r>
             <a:endParaRPr/>
           </a:p>
@@ -8136,7 +14683,7 @@
                 <a:ea typeface="Arial"/>
                 <a:cs typeface="Arial"/>
               </a:rPr>
-              <a:t>4</a:t>
+              <a:t>11</a:t>
             </a:r>
             <a:endParaRPr sz="1100" b="0" i="0" u="none" cap="none">
               <a:solidFill>
@@ -8278,7 +14825,7 @@
                 <a:ea typeface="Arial"/>
                 <a:cs typeface="Arial"/>
               </a:rPr>
-              <a:t>Paper: literature review starts this week</a:t>
+              <a:t>Logistics</a:t>
             </a:r>
           </a:p>
         </p:txBody>
@@ -8342,7 +14889,7 @@
                 <a:ea typeface="Arial"/>
                 <a:cs typeface="Arial"/>
               </a:rPr>
-              <a:t>Target venues (Spring 2027, if ready in time): Engineering Open House, Apr 9–10; Undergraduate Research Symposium, Apr 28–29</a:t>
+              <a:t>Weekly sync — post progress in this repo's README and Meeting Slides</a:t>
             </a:r>
           </a:p>
           <a:p>
@@ -8372,7 +14919,7 @@
                 <a:ea typeface="Arial"/>
                 <a:cs typeface="Arial"/>
               </a:rPr>
-              <a:t>Next week (Sep 27–Oct 3): stand up rendering env, extend particle viz to engineering geometry/field data</a:t>
+              <a:t>Flag blockers early so the plan can flex</a:t>
             </a:r>
           </a:p>
         </p:txBody>
@@ -8385,7 +14932,1452 @@
 </p:sld>
 </file>
 
-<file path=ppt/slides/slide2.xml><?xml version="1.0" encoding="utf-8"?>
+<file path=ppt/slides/slide23.xml><?xml version="1.0" encoding="utf-8"?>
+<p:sld xmlns:a="http://schemas.openxmlformats.org/drawingml/2006/main" xmlns:p="http://schemas.openxmlformats.org/presentationml/2006/main" xmlns:r="http://schemas.openxmlformats.org/officeDocument/2006/relationships">
+  <p:cSld>
+    <p:spTree>
+      <p:nvGrpSpPr>
+        <p:cNvPr id="1" name=""/>
+        <p:cNvGrpSpPr/>
+        <p:nvPr/>
+      </p:nvGrpSpPr>
+      <p:grpSpPr/>
+      <p:sp>
+        <p:nvSpPr>
+          <p:cNvPr id="74" name="Google Shape;74;p16">
+            <a:extLst>
+              <a:ext uri="{FF2B5EF4-FFF2-40B4-BE49-F238E27FC236}">
+                <a16:creationId xmlns:a16="http://schemas.microsoft.com/office/drawing/2014/main" id="{F29C6079-CF50-3950-F7B3-37C5016CD1D4}"/>
+              </a:ext>
+            </a:extLst>
+          </p:cNvPr>
+          <p:cNvSpPr>
+            <a:spLocks noGrp="1"/>
+          </p:cNvSpPr>
+          <p:nvPr>
+            <p:ph type="title"/>
+          </p:nvPr>
+        </p:nvSpPr>
+        <p:spPr>
+          <a:xfrm>
+            <a:off x="695325" y="828675"/>
+            <a:ext cx="7953375" cy="619125"/>
+          </a:xfrm>
+          <a:prstGeom prst="rect">
+            <a:avLst/>
+          </a:prstGeom>
+          <a:noFill/>
+          <a:ln>
+            <a:noFill/>
+          </a:ln>
+        </p:spPr>
+        <p:txBody>
+          <a:bodyPr spcFirstLastPara="1" wrap="square" lIns="0" tIns="0" rIns="0" bIns="0" anchor="t">
+            <a:noAutofit/>
+          </a:bodyPr>
+          <a:lstStyle/>
+          <a:p>
+            <a:pPr marL="0" lvl="0" indent="0" algn="l">
+              <a:lnSpc>
+                <a:spcPct val="90000"/>
+              </a:lnSpc>
+              <a:spcBef>
+                <a:spcPts val="0"/>
+              </a:spcBef>
+              <a:spcAft>
+                <a:spcPts val="0"/>
+              </a:spcAft>
+              <a:buClr>
+                <a:schemeClr val="dk1"/>
+              </a:buClr>
+              <a:buSzPts val="3000"/>
+              <a:buFont typeface="Arial"/>
+              <a:buNone/>
+              <a:defRPr sz="3000" b="1">
+                <a:solidFill>
+                  <a:srgbClr val="000000"/>
+                </a:solidFill>
+                <a:latin typeface="Arial"/>
+                <a:ea typeface="Arial"/>
+                <a:cs typeface="Arial"/>
+              </a:defRPr>
+            </a:pPr>
+            <a:r>
+              <a:rPr sz="3000" b="1">
+                <a:solidFill>
+                  <a:srgbClr val="000000"/>
+                </a:solidFill>
+                <a:latin typeface="Arial"/>
+                <a:ea typeface="Arial"/>
+                <a:cs typeface="Arial"/>
+              </a:rPr>
+              <a:t>Looking ahead</a:t>
+            </a:r>
+            <a:endParaRPr/>
+          </a:p>
+        </p:txBody>
+      </p:sp>
+      <p:sp>
+        <p:nvSpPr>
+          <p:cNvPr id="76" name="Google Shape;76;p16">
+            <a:extLst>
+              <a:ext uri="{FF2B5EF4-FFF2-40B4-BE49-F238E27FC236}">
+                <a16:creationId xmlns:a16="http://schemas.microsoft.com/office/drawing/2014/main" id="{C50CF39B-81F0-A7BF-E4FB-18A3BA818FA8}"/>
+              </a:ext>
+            </a:extLst>
+          </p:cNvPr>
+          <p:cNvSpPr>
+            <a:spLocks noGrp="1"/>
+          </p:cNvSpPr>
+          <p:nvPr/>
+        </p:nvSpPr>
+        <p:spPr>
+          <a:xfrm>
+            <a:off x="0" y="-4697"/>
+            <a:ext cx="9144000" cy="580200"/>
+          </a:xfrm>
+          <a:prstGeom prst="rect">
+            <a:avLst/>
+          </a:prstGeom>
+          <a:solidFill>
+            <a:srgbClr val="11284C"/>
+          </a:solidFill>
+          <a:ln>
+            <a:noFill/>
+          </a:ln>
+        </p:spPr>
+        <p:txBody>
+          <a:bodyPr spcFirstLastPara="1" wrap="square" lIns="68575" tIns="34275" rIns="68575" bIns="34275" anchor="ctr">
+            <a:noAutofit/>
+          </a:bodyPr>
+          <a:lstStyle/>
+          <a:p>
+            <a:pPr marL="0" marR="0" lvl="0" indent="0" algn="ctr">
+              <a:lnSpc>
+                <a:spcPct val="100000"/>
+              </a:lnSpc>
+              <a:spcBef>
+                <a:spcPts val="0"/>
+              </a:spcBef>
+              <a:spcAft>
+                <a:spcPts val="0"/>
+              </a:spcAft>
+              <a:buClr>
+                <a:srgbClr val="000000"/>
+              </a:buClr>
+              <a:buSzPts val="1400"/>
+              <a:buFont typeface="Arial"/>
+              <a:buNone/>
+            </a:pPr>
+            <a:endParaRPr sz="1400" b="0" i="0" u="none" cap="none">
+              <a:solidFill>
+                <a:schemeClr val="lt1"/>
+              </a:solidFill>
+              <a:latin typeface="Arial"/>
+              <a:ea typeface="Arial"/>
+              <a:cs typeface="Arial"/>
+            </a:endParaRPr>
+          </a:p>
+        </p:txBody>
+      </p:sp>
+      <p:sp>
+        <p:nvSpPr>
+          <p:cNvPr id="77" name="Google Shape;77;p16">
+            <a:extLst>
+              <a:ext uri="{FF2B5EF4-FFF2-40B4-BE49-F238E27FC236}">
+                <a16:creationId xmlns:a16="http://schemas.microsoft.com/office/drawing/2014/main" id="{E003ECB4-68A0-AF72-FDFD-EB7C2DD32890}"/>
+              </a:ext>
+            </a:extLst>
+          </p:cNvPr>
+          <p:cNvSpPr>
+            <a:spLocks noGrp="1"/>
+          </p:cNvSpPr>
+          <p:nvPr/>
+        </p:nvSpPr>
+        <p:spPr>
+          <a:xfrm>
+            <a:off x="6349014" y="50217"/>
+            <a:ext cx="2739000" cy="500100"/>
+          </a:xfrm>
+          <a:prstGeom prst="rect">
+            <a:avLst/>
+          </a:prstGeom>
+          <a:noFill/>
+          <a:ln>
+            <a:noFill/>
+          </a:ln>
+        </p:spPr>
+        <p:txBody>
+          <a:bodyPr spcFirstLastPara="1" wrap="square" lIns="68575" tIns="34275" rIns="68575" bIns="34275" anchor="t">
+            <a:spAutoFit/>
+          </a:bodyPr>
+          <a:lstStyle/>
+          <a:p>
+            <a:pPr marL="0" marR="0" lvl="0" indent="0" algn="l">
+              <a:lnSpc>
+                <a:spcPct val="100000"/>
+              </a:lnSpc>
+              <a:spcBef>
+                <a:spcPts val="0"/>
+              </a:spcBef>
+              <a:spcAft>
+                <a:spcPts val="0"/>
+              </a:spcAft>
+              <a:buClr>
+                <a:srgbClr val="000000"/>
+              </a:buClr>
+              <a:buSzPts val="1400"/>
+              <a:buFont typeface="Arial"/>
+              <a:buNone/>
+            </a:pPr>
+            <a:r>
+              <a:rPr sz="1400" b="0" i="0" u="none" cap="none">
+                <a:solidFill>
+                  <a:schemeClr val="lt1"/>
+                </a:solidFill>
+                <a:latin typeface="Arial"/>
+                <a:ea typeface="Arial"/>
+                <a:cs typeface="Arial"/>
+              </a:rPr>
+              <a:t>Electric Propulsion Initiative - ION-I</a:t>
+            </a:r>
+            <a:endParaRPr sz="1100" b="0" i="0" u="none" cap="none">
+              <a:solidFill>
+                <a:srgbClr val="000000"/>
+              </a:solidFill>
+              <a:latin typeface="Arial"/>
+              <a:ea typeface="Arial"/>
+              <a:cs typeface="Arial"/>
+            </a:endParaRPr>
+          </a:p>
+        </p:txBody>
+      </p:sp>
+      <p:pic>
+        <p:nvPicPr>
+          <p:cNvPr id="94" name="Google Shape;78;p16"/>
+          <p:cNvPicPr>
+            <a:picLocks noChangeAspect="1"/>
+          </p:cNvPicPr>
+          <p:nvPr/>
+        </p:nvPicPr>
+        <p:blipFill rotWithShape="1">
+          <a:blip r:embed="rId2">
+            <a:alphaModFix/>
+          </a:blip>
+          <a:srcRect/>
+          <a:stretch/>
+        </p:blipFill>
+        <p:spPr>
+          <a:xfrm>
+            <a:off x="151161" y="50231"/>
+            <a:ext cx="326328" cy="470421"/>
+          </a:xfrm>
+          <a:prstGeom prst="rect">
+            <a:avLst/>
+          </a:prstGeom>
+          <a:ln>
+            <a:noFill/>
+          </a:ln>
+        </p:spPr>
+      </p:pic>
+      <p:pic>
+        <p:nvPicPr>
+          <p:cNvPr id="95" name="Google Shape;79;p16"/>
+          <p:cNvPicPr>
+            <a:picLocks noChangeAspect="1"/>
+          </p:cNvPicPr>
+          <p:nvPr/>
+        </p:nvPicPr>
+        <p:blipFill rotWithShape="1">
+          <a:blip r:embed="rId5">
+            <a:alphaModFix/>
+          </a:blip>
+          <a:srcRect/>
+          <a:stretch/>
+        </p:blipFill>
+        <p:spPr>
+          <a:xfrm>
+            <a:off x="628650" y="-103200"/>
+            <a:ext cx="533165" cy="754089"/>
+          </a:xfrm>
+          <a:prstGeom prst="rect">
+            <a:avLst/>
+          </a:prstGeom>
+          <a:ln>
+            <a:noFill/>
+          </a:ln>
+        </p:spPr>
+      </p:pic>
+      <p:cxnSp>
+        <p:nvCxnSpPr>
+          <p:cNvPr id="96" name="Google Shape;80;p16"/>
+          <p:cNvCxnSpPr/>
+          <p:nvPr/>
+        </p:nvCxnSpPr>
+        <p:spPr>
+          <a:xfrm>
+            <a:off x="589359" y="50231"/>
+            <a:ext cx="0" cy="454500"/>
+          </a:xfrm>
+          <a:prstGeom prst="straightConnector1">
+            <a:avLst/>
+          </a:prstGeom>
+          <a:ln w="19050" cap="flat">
+            <a:solidFill>
+              <a:schemeClr val="lt1"/>
+            </a:solidFill>
+            <a:prstDash val="solid"/>
+            <a:miter/>
+            <a:headEnd type="none" w="sm" len="sm"/>
+            <a:tailEnd type="none" w="sm" len="sm"/>
+          </a:ln>
+        </p:spPr>
+      </p:cxnSp>
+      <p:pic>
+        <p:nvPicPr>
+          <p:cNvPr id="97" name="Google Shape;81;p16"/>
+          <p:cNvPicPr>
+            <a:picLocks noChangeAspect="1"/>
+          </p:cNvPicPr>
+          <p:nvPr/>
+        </p:nvPicPr>
+        <p:blipFill rotWithShape="1">
+          <a:blip r:embed="rId4">
+            <a:alphaModFix/>
+          </a:blip>
+          <a:srcRect/>
+          <a:stretch/>
+        </p:blipFill>
+        <p:spPr>
+          <a:xfrm>
+            <a:off x="7732825" y="3955187"/>
+            <a:ext cx="1239726" cy="1753416"/>
+          </a:xfrm>
+          <a:prstGeom prst="rect">
+            <a:avLst/>
+          </a:prstGeom>
+          <a:ln>
+            <a:noFill/>
+          </a:ln>
+        </p:spPr>
+      </p:pic>
+      <p:sp>
+        <p:nvSpPr>
+          <p:cNvPr id="82" name="Google Shape;82;p16">
+            <a:extLst>
+              <a:ext uri="{FF2B5EF4-FFF2-40B4-BE49-F238E27FC236}">
+                <a16:creationId xmlns:a16="http://schemas.microsoft.com/office/drawing/2014/main" id="{D6B236AD-7344-733D-C8D4-7FFF4844EC55}"/>
+              </a:ext>
+            </a:extLst>
+          </p:cNvPr>
+          <p:cNvSpPr>
+            <a:spLocks noGrp="1"/>
+          </p:cNvSpPr>
+          <p:nvPr/>
+        </p:nvSpPr>
+        <p:spPr>
+          <a:xfrm>
+            <a:off x="8829675" y="4838700"/>
+            <a:ext cx="257175" cy="495270"/>
+          </a:xfrm>
+          <a:prstGeom prst="rect">
+            <a:avLst/>
+          </a:prstGeom>
+          <a:noFill/>
+          <a:ln>
+            <a:noFill/>
+          </a:ln>
+        </p:spPr>
+        <p:txBody>
+          <a:bodyPr spcFirstLastPara="1" wrap="square" lIns="0" tIns="0" rIns="0" bIns="0" anchor="t">
+            <a:noAutofit/>
+          </a:bodyPr>
+          <a:lstStyle/>
+          <a:p>
+            <a:pPr marL="0" marR="0" lvl="0" indent="0" algn="l">
+              <a:lnSpc>
+                <a:spcPct val="100000"/>
+              </a:lnSpc>
+              <a:spcBef>
+                <a:spcPts val="0"/>
+              </a:spcBef>
+              <a:spcAft>
+                <a:spcPts val="0"/>
+              </a:spcAft>
+              <a:buClr>
+                <a:srgbClr val="000000"/>
+              </a:buClr>
+              <a:buSzPts val="1400"/>
+              <a:buFont typeface="Arial"/>
+              <a:buNone/>
+              <a:defRPr sz="1125">
+                <a:solidFill>
+                  <a:srgbClr val="000000"/>
+                </a:solidFill>
+                <a:latin typeface="Arial"/>
+                <a:ea typeface="Arial"/>
+                <a:cs typeface="Arial"/>
+              </a:defRPr>
+            </a:pPr>
+            <a:r>
+              <a:rPr sz="1125" b="0" i="0" u="none" cap="none">
+                <a:solidFill>
+                  <a:srgbClr val="000000"/>
+                </a:solidFill>
+                <a:latin typeface="Arial"/>
+                <a:ea typeface="Arial"/>
+                <a:cs typeface="Arial"/>
+              </a:rPr>
+              <a:t>12</a:t>
+            </a:r>
+            <a:endParaRPr sz="1100" b="0" i="0" u="none" cap="none">
+              <a:solidFill>
+                <a:srgbClr val="000000"/>
+              </a:solidFill>
+              <a:latin typeface="Arial"/>
+              <a:ea typeface="Arial"/>
+              <a:cs typeface="Arial"/>
+            </a:endParaRPr>
+          </a:p>
+        </p:txBody>
+      </p:sp>
+      <p:sp>
+        <p:nvSpPr>
+          <p:cNvPr id="2" name="TextBox 1">
+            <a:extLst>
+              <a:ext uri="{FF2B5EF4-FFF2-40B4-BE49-F238E27FC236}">
+                <a16:creationId xmlns:a16="http://schemas.microsoft.com/office/drawing/2014/main" id="{C03B32CF-B251-58B0-7BAB-AFB6BCFA3973}"/>
+              </a:ext>
+            </a:extLst>
+          </p:cNvPr>
+          <p:cNvSpPr>
+            <a:spLocks noGrp="1"/>
+          </p:cNvSpPr>
+          <p:nvPr/>
+        </p:nvSpPr>
+        <p:spPr>
+          <a:xfrm>
+            <a:off x="209550" y="4810125"/>
+            <a:ext cx="2381250" cy="365760"/>
+          </a:xfrm>
+          <a:prstGeom prst="rect">
+            <a:avLst/>
+          </a:prstGeom>
+          <a:noFill/>
+        </p:spPr>
+        <p:txBody>
+          <a:bodyPr wrap="square" lIns="0" tIns="0" rIns="0" bIns="0">
+            <a:noAutofit/>
+          </a:bodyPr>
+          <a:lstStyle/>
+          <a:p>
+            <a:pPr marL="6350" marR="0" lvl="0" algn="l">
+              <a:lnSpc>
+                <a:spcPct val="90000"/>
+              </a:lnSpc>
+              <a:spcBef>
+                <a:spcPts val="800"/>
+              </a:spcBef>
+              <a:spcAft>
+                <a:spcPts val="0"/>
+              </a:spcAft>
+              <a:buClr>
+                <a:schemeClr val="dk1"/>
+              </a:buClr>
+              <a:buSzPts val="2100"/>
+              <a:buNone/>
+              <a:defRPr sz="1350">
+                <a:solidFill>
+                  <a:srgbClr val="000000"/>
+                </a:solidFill>
+                <a:latin typeface="Arial"/>
+                <a:ea typeface="Arial"/>
+                <a:cs typeface="Arial"/>
+              </a:defRPr>
+            </a:pPr>
+            <a:r>
+              <a:rPr sz="1350">
+                <a:solidFill>
+                  <a:srgbClr val="000000"/>
+                </a:solidFill>
+                <a:latin typeface="Arial"/>
+                <a:ea typeface="Arial"/>
+                <a:cs typeface="Arial"/>
+              </a:rPr>
+              <a:t>Fall 2026</a:t>
+            </a:r>
+            <a:endParaRPr sz="1400">
+              <a:solidFill>
+                <a:schemeClr val="dk1"/>
+              </a:solidFill>
+            </a:endParaRPr>
+          </a:p>
+        </p:txBody>
+      </p:sp>
+      <p:sp>
+        <p:nvSpPr>
+          <p:cNvPr id="86" name="Column 1 heading">
+            <a:extLst>
+              <a:ext uri="{FF2B5EF4-FFF2-40B4-BE49-F238E27FC236}">
+                <a16:creationId xmlns:a16="http://schemas.microsoft.com/office/drawing/2014/main" id="{2DE9F095-B1B7-4694-A4EB-65BCA882CC18}"/>
+              </a:ext>
+            </a:extLst>
+          </p:cNvPr>
+          <p:cNvSpPr>
+            <a:spLocks noGrp="1"/>
+          </p:cNvSpPr>
+          <p:nvPr/>
+        </p:nvSpPr>
+        <p:spPr>
+          <a:xfrm>
+            <a:off x="714375" y="1619250"/>
+            <a:ext cx="3686175" cy="361950"/>
+          </a:xfrm>
+          <a:prstGeom prst="rect">
+            <a:avLst/>
+          </a:prstGeom>
+          <a:noFill/>
+          <a:ln w="0">
+            <a:noFill/>
+          </a:ln>
+        </p:spPr>
+        <p:txBody>
+          <a:bodyPr wrap="square" lIns="0" tIns="0" rIns="0" bIns="0" anchor="t">
+            <a:noAutofit/>
+          </a:bodyPr>
+          <a:lstStyle/>
+          <a:p>
+            <a:pPr>
+              <a:lnSpc>
+                <a:spcPct val="108000"/>
+              </a:lnSpc>
+              <a:buNone/>
+              <a:defRPr sz="1875" b="1">
+                <a:solidFill>
+                  <a:srgbClr val="11284C"/>
+                </a:solidFill>
+                <a:latin typeface="Arial"/>
+                <a:ea typeface="Arial"/>
+                <a:cs typeface="Arial"/>
+              </a:defRPr>
+            </a:pPr>
+            <a:r>
+              <a:rPr sz="1875" b="1">
+                <a:solidFill>
+                  <a:srgbClr val="11284C"/>
+                </a:solidFill>
+                <a:latin typeface="Arial"/>
+                <a:ea typeface="Arial"/>
+                <a:cs typeface="Arial"/>
+              </a:rPr>
+              <a:t>Week 3 (Oct 4–10)</a:t>
+            </a:r>
+          </a:p>
+        </p:txBody>
+      </p:sp>
+      <p:sp>
+        <p:nvSpPr>
+          <p:cNvPr id="87" name="Column 1 body">
+            <a:extLst>
+              <a:ext uri="{FF2B5EF4-FFF2-40B4-BE49-F238E27FC236}">
+                <a16:creationId xmlns:a16="http://schemas.microsoft.com/office/drawing/2014/main" id="{BB69C427-3E75-49FD-B0A1-7642A355F868}"/>
+              </a:ext>
+            </a:extLst>
+          </p:cNvPr>
+          <p:cNvSpPr>
+            <a:spLocks noGrp="1"/>
+          </p:cNvSpPr>
+          <p:nvPr/>
+        </p:nvSpPr>
+        <p:spPr>
+          <a:xfrm>
+            <a:off x="714375" y="2066925"/>
+            <a:ext cx="3686175" cy="2428875"/>
+          </a:xfrm>
+          <a:prstGeom prst="rect">
+            <a:avLst/>
+          </a:prstGeom>
+          <a:noFill/>
+          <a:ln w="0">
+            <a:noFill/>
+          </a:ln>
+        </p:spPr>
+        <p:txBody>
+          <a:bodyPr wrap="square" lIns="0" tIns="0" rIns="0" bIns="0" anchor="t">
+            <a:noAutofit/>
+          </a:bodyPr>
+          <a:lstStyle/>
+          <a:p>
+            <a:pPr marL="203200" indent="-127000">
+              <a:lnSpc>
+                <a:spcPct val="108000"/>
+              </a:lnSpc>
+              <a:spcAft>
+                <a:spcPts val="1200"/>
+              </a:spcAft>
+              <a:buChar char="•"/>
+              <a:defRPr sz="1650" b="0">
+                <a:solidFill>
+                  <a:srgbClr val="404040"/>
+                </a:solidFill>
+                <a:latin typeface="Arial"/>
+                <a:ea typeface="Arial"/>
+                <a:cs typeface="Arial"/>
+              </a:defRPr>
+            </a:pPr>
+            <a:r>
+              <a:rPr sz="1650" b="0">
+                <a:solidFill>
+                  <a:srgbClr val="404040"/>
+                </a:solidFill>
+                <a:latin typeface="Arial"/>
+                <a:ea typeface="Arial"/>
+                <a:cs typeface="Arial"/>
+              </a:rPr>
+              <a:t>Homepage skeleton deployed</a:t>
+            </a:r>
+          </a:p>
+          <a:p>
+            <a:pPr marL="203200" indent="-127000">
+              <a:lnSpc>
+                <a:spcPct val="108000"/>
+              </a:lnSpc>
+              <a:spcAft>
+                <a:spcPts val="1200"/>
+              </a:spcAft>
+              <a:buChar char="•"/>
+              <a:defRPr sz="1650" b="0">
+                <a:solidFill>
+                  <a:srgbClr val="404040"/>
+                </a:solidFill>
+                <a:latin typeface="Arial"/>
+                <a:ea typeface="Arial"/>
+                <a:cs typeface="Arial"/>
+              </a:defRPr>
+            </a:pPr>
+            <a:r>
+              <a:rPr sz="1650" b="0">
+                <a:solidFill>
+                  <a:srgbClr val="404040"/>
+                </a:solidFill>
+                <a:latin typeface="Arial"/>
+                <a:ea typeface="Arial"/>
+                <a:cs typeface="Arial"/>
+              </a:rPr>
+              <a:t>Paper: draft outline</a:t>
+            </a:r>
+          </a:p>
+        </p:txBody>
+      </p:sp>
+      <p:sp>
+        <p:nvSpPr>
+          <p:cNvPr id="88" name="Column 2 heading">
+            <a:extLst>
+              <a:ext uri="{FF2B5EF4-FFF2-40B4-BE49-F238E27FC236}">
+                <a16:creationId xmlns:a16="http://schemas.microsoft.com/office/drawing/2014/main" id="{CC567F5E-3CF7-498C-B1F7-936F2B5ECBC9}"/>
+              </a:ext>
+            </a:extLst>
+          </p:cNvPr>
+          <p:cNvSpPr>
+            <a:spLocks noGrp="1"/>
+          </p:cNvSpPr>
+          <p:nvPr/>
+        </p:nvSpPr>
+        <p:spPr>
+          <a:xfrm>
+            <a:off x="4762500" y="1619250"/>
+            <a:ext cx="3686175" cy="361950"/>
+          </a:xfrm>
+          <a:prstGeom prst="rect">
+            <a:avLst/>
+          </a:prstGeom>
+          <a:noFill/>
+          <a:ln w="0">
+            <a:noFill/>
+          </a:ln>
+        </p:spPr>
+        <p:txBody>
+          <a:bodyPr wrap="square" lIns="0" tIns="0" rIns="0" bIns="0" anchor="t">
+            <a:noAutofit/>
+          </a:bodyPr>
+          <a:lstStyle/>
+          <a:p>
+            <a:pPr>
+              <a:lnSpc>
+                <a:spcPct val="108000"/>
+              </a:lnSpc>
+              <a:buNone/>
+              <a:defRPr sz="1875" b="1">
+                <a:solidFill>
+                  <a:srgbClr val="11284C"/>
+                </a:solidFill>
+                <a:latin typeface="Arial"/>
+                <a:ea typeface="Arial"/>
+                <a:cs typeface="Arial"/>
+              </a:defRPr>
+            </a:pPr>
+            <a:r>
+              <a:rPr sz="1875" b="1">
+                <a:solidFill>
+                  <a:srgbClr val="11284C"/>
+                </a:solidFill>
+                <a:latin typeface="Arial"/>
+                <a:ea typeface="Arial"/>
+                <a:cs typeface="Arial"/>
+              </a:rPr>
+              <a:t>Week 4 (Oct 11–17)</a:t>
+            </a:r>
+          </a:p>
+        </p:txBody>
+      </p:sp>
+      <p:sp>
+        <p:nvSpPr>
+          <p:cNvPr id="89" name="Column 2 body">
+            <a:extLst>
+              <a:ext uri="{FF2B5EF4-FFF2-40B4-BE49-F238E27FC236}">
+                <a16:creationId xmlns:a16="http://schemas.microsoft.com/office/drawing/2014/main" id="{097F249D-5356-46EB-8DC4-2E57F868A9BB}"/>
+              </a:ext>
+            </a:extLst>
+          </p:cNvPr>
+          <p:cNvSpPr>
+            <a:spLocks noGrp="1"/>
+          </p:cNvSpPr>
+          <p:nvPr/>
+        </p:nvSpPr>
+        <p:spPr>
+          <a:xfrm>
+            <a:off x="4762500" y="2066925"/>
+            <a:ext cx="3686175" cy="2428875"/>
+          </a:xfrm>
+          <a:prstGeom prst="rect">
+            <a:avLst/>
+          </a:prstGeom>
+          <a:noFill/>
+          <a:ln w="0">
+            <a:noFill/>
+          </a:ln>
+        </p:spPr>
+        <p:txBody>
+          <a:bodyPr wrap="square" lIns="0" tIns="0" rIns="0" bIns="0" anchor="t">
+            <a:noAutofit/>
+          </a:bodyPr>
+          <a:lstStyle/>
+          <a:p>
+            <a:pPr marL="203200" indent="-127000">
+              <a:lnSpc>
+                <a:spcPct val="108000"/>
+              </a:lnSpc>
+              <a:spcAft>
+                <a:spcPts val="1200"/>
+              </a:spcAft>
+              <a:buChar char="•"/>
+              <a:defRPr sz="1650" b="0">
+                <a:solidFill>
+                  <a:srgbClr val="404040"/>
+                </a:solidFill>
+                <a:latin typeface="Arial"/>
+                <a:ea typeface="Arial"/>
+                <a:cs typeface="Arial"/>
+              </a:defRPr>
+            </a:pPr>
+            <a:r>
+              <a:rPr sz="1650" b="0">
+                <a:solidFill>
+                  <a:srgbClr val="404040"/>
+                </a:solidFill>
+                <a:latin typeface="Arial"/>
+                <a:ea typeface="Arial"/>
+                <a:cs typeface="Arial"/>
+              </a:rPr>
+              <a:t>Subteam + technical-record page templates</a:t>
+            </a:r>
+          </a:p>
+          <a:p>
+            <a:pPr marL="203200" indent="-127000">
+              <a:lnSpc>
+                <a:spcPct val="108000"/>
+              </a:lnSpc>
+              <a:spcAft>
+                <a:spcPts val="1200"/>
+              </a:spcAft>
+              <a:buChar char="•"/>
+              <a:defRPr sz="1650" b="0">
+                <a:solidFill>
+                  <a:srgbClr val="404040"/>
+                </a:solidFill>
+                <a:latin typeface="Arial"/>
+                <a:ea typeface="Arial"/>
+                <a:cs typeface="Arial"/>
+              </a:defRPr>
+            </a:pPr>
+            <a:r>
+              <a:rPr sz="1650" b="0">
+                <a:solidFill>
+                  <a:srgbClr val="404040"/>
+                </a:solidFill>
+                <a:latin typeface="Arial"/>
+                <a:ea typeface="Arial"/>
+                <a:cs typeface="Arial"/>
+              </a:rPr>
+              <a:t>Continue paper drafting</a:t>
+            </a:r>
+          </a:p>
+        </p:txBody>
+      </p:sp>
+    </p:spTree>
+  </p:cSld>
+  <p:clrMapOvr>
+    <a:masterClrMapping/>
+  </p:clrMapOvr>
+</p:sld>
+</file>
+
+<file path=ppt/slides/slide24.xml><?xml version="1.0" encoding="utf-8"?>
+<p:sld xmlns:a="http://schemas.openxmlformats.org/drawingml/2006/main" xmlns:p="http://schemas.openxmlformats.org/presentationml/2006/main" xmlns:r="http://schemas.openxmlformats.org/officeDocument/2006/relationships">
+  <p:cSld>
+    <p:spTree>
+      <p:nvGrpSpPr>
+        <p:cNvPr id="1" name=""/>
+        <p:cNvGrpSpPr/>
+        <p:nvPr/>
+      </p:nvGrpSpPr>
+      <p:grpSpPr/>
+      <p:sp>
+        <p:nvSpPr>
+          <p:cNvPr id="74" name="Google Shape;74;p16">
+            <a:extLst>
+              <a:ext uri="{FF2B5EF4-FFF2-40B4-BE49-F238E27FC236}">
+                <a16:creationId xmlns:a16="http://schemas.microsoft.com/office/drawing/2014/main" id="{F29C6079-CF50-3950-F7B3-37C5016CD1D4}"/>
+              </a:ext>
+            </a:extLst>
+          </p:cNvPr>
+          <p:cNvSpPr>
+            <a:spLocks noGrp="1"/>
+          </p:cNvSpPr>
+          <p:nvPr>
+            <p:ph type="title"/>
+          </p:nvPr>
+        </p:nvSpPr>
+        <p:spPr>
+          <a:xfrm>
+            <a:off x="695325" y="828675"/>
+            <a:ext cx="7953375" cy="619125"/>
+          </a:xfrm>
+          <a:prstGeom prst="rect">
+            <a:avLst/>
+          </a:prstGeom>
+          <a:noFill/>
+          <a:ln>
+            <a:noFill/>
+          </a:ln>
+        </p:spPr>
+        <p:txBody>
+          <a:bodyPr spcFirstLastPara="1" wrap="square" lIns="0" tIns="0" rIns="0" bIns="0" anchor="t">
+            <a:noAutofit/>
+          </a:bodyPr>
+          <a:lstStyle/>
+          <a:p>
+            <a:pPr marL="0" lvl="0" indent="0" algn="l">
+              <a:lnSpc>
+                <a:spcPct val="90000"/>
+              </a:lnSpc>
+              <a:spcBef>
+                <a:spcPts val="0"/>
+              </a:spcBef>
+              <a:spcAft>
+                <a:spcPts val="0"/>
+              </a:spcAft>
+              <a:buClr>
+                <a:schemeClr val="dk1"/>
+              </a:buClr>
+              <a:buSzPts val="3000"/>
+              <a:buFont typeface="Arial"/>
+              <a:buNone/>
+              <a:defRPr sz="3000" b="1">
+                <a:solidFill>
+                  <a:srgbClr val="000000"/>
+                </a:solidFill>
+                <a:latin typeface="Arial"/>
+                <a:ea typeface="Arial"/>
+                <a:cs typeface="Arial"/>
+              </a:defRPr>
+            </a:pPr>
+            <a:r>
+              <a:rPr sz="3000" b="1">
+                <a:solidFill>
+                  <a:srgbClr val="000000"/>
+                </a:solidFill>
+                <a:latin typeface="Arial"/>
+                <a:ea typeface="Arial"/>
+                <a:cs typeface="Arial"/>
+              </a:rPr>
+              <a:t>Discussion</a:t>
+            </a:r>
+            <a:endParaRPr/>
+          </a:p>
+        </p:txBody>
+      </p:sp>
+      <p:sp>
+        <p:nvSpPr>
+          <p:cNvPr id="76" name="Google Shape;76;p16">
+            <a:extLst>
+              <a:ext uri="{FF2B5EF4-FFF2-40B4-BE49-F238E27FC236}">
+                <a16:creationId xmlns:a16="http://schemas.microsoft.com/office/drawing/2014/main" id="{C50CF39B-81F0-A7BF-E4FB-18A3BA818FA8}"/>
+              </a:ext>
+            </a:extLst>
+          </p:cNvPr>
+          <p:cNvSpPr>
+            <a:spLocks noGrp="1"/>
+          </p:cNvSpPr>
+          <p:nvPr/>
+        </p:nvSpPr>
+        <p:spPr>
+          <a:xfrm>
+            <a:off x="0" y="-4697"/>
+            <a:ext cx="9144000" cy="580200"/>
+          </a:xfrm>
+          <a:prstGeom prst="rect">
+            <a:avLst/>
+          </a:prstGeom>
+          <a:solidFill>
+            <a:srgbClr val="11284C"/>
+          </a:solidFill>
+          <a:ln>
+            <a:noFill/>
+          </a:ln>
+        </p:spPr>
+        <p:txBody>
+          <a:bodyPr spcFirstLastPara="1" wrap="square" lIns="68575" tIns="34275" rIns="68575" bIns="34275" anchor="ctr">
+            <a:noAutofit/>
+          </a:bodyPr>
+          <a:lstStyle/>
+          <a:p>
+            <a:pPr marL="0" marR="0" lvl="0" indent="0" algn="ctr">
+              <a:lnSpc>
+                <a:spcPct val="100000"/>
+              </a:lnSpc>
+              <a:spcBef>
+                <a:spcPts val="0"/>
+              </a:spcBef>
+              <a:spcAft>
+                <a:spcPts val="0"/>
+              </a:spcAft>
+              <a:buClr>
+                <a:srgbClr val="000000"/>
+              </a:buClr>
+              <a:buSzPts val="1400"/>
+              <a:buFont typeface="Arial"/>
+              <a:buNone/>
+            </a:pPr>
+            <a:endParaRPr sz="1400" b="0" i="0" u="none" cap="none">
+              <a:solidFill>
+                <a:schemeClr val="lt1"/>
+              </a:solidFill>
+              <a:latin typeface="Arial"/>
+              <a:ea typeface="Arial"/>
+              <a:cs typeface="Arial"/>
+            </a:endParaRPr>
+          </a:p>
+        </p:txBody>
+      </p:sp>
+      <p:sp>
+        <p:nvSpPr>
+          <p:cNvPr id="77" name="Google Shape;77;p16">
+            <a:extLst>
+              <a:ext uri="{FF2B5EF4-FFF2-40B4-BE49-F238E27FC236}">
+                <a16:creationId xmlns:a16="http://schemas.microsoft.com/office/drawing/2014/main" id="{E003ECB4-68A0-AF72-FDFD-EB7C2DD32890}"/>
+              </a:ext>
+            </a:extLst>
+          </p:cNvPr>
+          <p:cNvSpPr>
+            <a:spLocks noGrp="1"/>
+          </p:cNvSpPr>
+          <p:nvPr/>
+        </p:nvSpPr>
+        <p:spPr>
+          <a:xfrm>
+            <a:off x="6349014" y="50217"/>
+            <a:ext cx="2739000" cy="500100"/>
+          </a:xfrm>
+          <a:prstGeom prst="rect">
+            <a:avLst/>
+          </a:prstGeom>
+          <a:noFill/>
+          <a:ln>
+            <a:noFill/>
+          </a:ln>
+        </p:spPr>
+        <p:txBody>
+          <a:bodyPr spcFirstLastPara="1" wrap="square" lIns="68575" tIns="34275" rIns="68575" bIns="34275" anchor="t">
+            <a:spAutoFit/>
+          </a:bodyPr>
+          <a:lstStyle/>
+          <a:p>
+            <a:pPr marL="0" marR="0" lvl="0" indent="0" algn="l">
+              <a:lnSpc>
+                <a:spcPct val="100000"/>
+              </a:lnSpc>
+              <a:spcBef>
+                <a:spcPts val="0"/>
+              </a:spcBef>
+              <a:spcAft>
+                <a:spcPts val="0"/>
+              </a:spcAft>
+              <a:buClr>
+                <a:srgbClr val="000000"/>
+              </a:buClr>
+              <a:buSzPts val="1400"/>
+              <a:buFont typeface="Arial"/>
+              <a:buNone/>
+            </a:pPr>
+            <a:r>
+              <a:rPr sz="1400" b="0" i="0" u="none" cap="none">
+                <a:solidFill>
+                  <a:schemeClr val="lt1"/>
+                </a:solidFill>
+                <a:latin typeface="Arial"/>
+                <a:ea typeface="Arial"/>
+                <a:cs typeface="Arial"/>
+              </a:rPr>
+              <a:t>Electric Propulsion Initiative - ION-I</a:t>
+            </a:r>
+            <a:endParaRPr sz="1100" b="0" i="0" u="none" cap="none">
+              <a:solidFill>
+                <a:srgbClr val="000000"/>
+              </a:solidFill>
+              <a:latin typeface="Arial"/>
+              <a:ea typeface="Arial"/>
+              <a:cs typeface="Arial"/>
+            </a:endParaRPr>
+          </a:p>
+        </p:txBody>
+      </p:sp>
+      <p:pic>
+        <p:nvPicPr>
+          <p:cNvPr id="92" name="Google Shape;78;p16"/>
+          <p:cNvPicPr>
+            <a:picLocks noChangeAspect="1"/>
+          </p:cNvPicPr>
+          <p:nvPr/>
+        </p:nvPicPr>
+        <p:blipFill rotWithShape="1">
+          <a:blip r:embed="rId2">
+            <a:alphaModFix/>
+          </a:blip>
+          <a:srcRect/>
+          <a:stretch/>
+        </p:blipFill>
+        <p:spPr>
+          <a:xfrm>
+            <a:off x="151161" y="50231"/>
+            <a:ext cx="326328" cy="470421"/>
+          </a:xfrm>
+          <a:prstGeom prst="rect">
+            <a:avLst/>
+          </a:prstGeom>
+          <a:ln>
+            <a:noFill/>
+          </a:ln>
+        </p:spPr>
+      </p:pic>
+      <p:pic>
+        <p:nvPicPr>
+          <p:cNvPr id="93" name="Google Shape;79;p16"/>
+          <p:cNvPicPr>
+            <a:picLocks noChangeAspect="1"/>
+          </p:cNvPicPr>
+          <p:nvPr/>
+        </p:nvPicPr>
+        <p:blipFill rotWithShape="1">
+          <a:blip r:embed="rId5">
+            <a:alphaModFix/>
+          </a:blip>
+          <a:srcRect/>
+          <a:stretch/>
+        </p:blipFill>
+        <p:spPr>
+          <a:xfrm>
+            <a:off x="628650" y="-103200"/>
+            <a:ext cx="533165" cy="754089"/>
+          </a:xfrm>
+          <a:prstGeom prst="rect">
+            <a:avLst/>
+          </a:prstGeom>
+          <a:ln>
+            <a:noFill/>
+          </a:ln>
+        </p:spPr>
+      </p:pic>
+      <p:cxnSp>
+        <p:nvCxnSpPr>
+          <p:cNvPr id="94" name="Google Shape;80;p16"/>
+          <p:cNvCxnSpPr/>
+          <p:nvPr/>
+        </p:nvCxnSpPr>
+        <p:spPr>
+          <a:xfrm>
+            <a:off x="589359" y="50231"/>
+            <a:ext cx="0" cy="454500"/>
+          </a:xfrm>
+          <a:prstGeom prst="straightConnector1">
+            <a:avLst/>
+          </a:prstGeom>
+          <a:ln w="19050" cap="flat">
+            <a:solidFill>
+              <a:schemeClr val="lt1"/>
+            </a:solidFill>
+            <a:prstDash val="solid"/>
+            <a:miter/>
+            <a:headEnd type="none" w="sm" len="sm"/>
+            <a:tailEnd type="none" w="sm" len="sm"/>
+          </a:ln>
+        </p:spPr>
+      </p:cxnSp>
+      <p:pic>
+        <p:nvPicPr>
+          <p:cNvPr id="95" name="Google Shape;81;p16"/>
+          <p:cNvPicPr>
+            <a:picLocks noChangeAspect="1"/>
+          </p:cNvPicPr>
+          <p:nvPr/>
+        </p:nvPicPr>
+        <p:blipFill rotWithShape="1">
+          <a:blip r:embed="rId4">
+            <a:alphaModFix/>
+          </a:blip>
+          <a:srcRect/>
+          <a:stretch/>
+        </p:blipFill>
+        <p:spPr>
+          <a:xfrm>
+            <a:off x="7732825" y="3955187"/>
+            <a:ext cx="1239726" cy="1753416"/>
+          </a:xfrm>
+          <a:prstGeom prst="rect">
+            <a:avLst/>
+          </a:prstGeom>
+          <a:ln>
+            <a:noFill/>
+          </a:ln>
+        </p:spPr>
+      </p:pic>
+      <p:sp>
+        <p:nvSpPr>
+          <p:cNvPr id="82" name="Google Shape;82;p16">
+            <a:extLst>
+              <a:ext uri="{FF2B5EF4-FFF2-40B4-BE49-F238E27FC236}">
+                <a16:creationId xmlns:a16="http://schemas.microsoft.com/office/drawing/2014/main" id="{D6B236AD-7344-733D-C8D4-7FFF4844EC55}"/>
+              </a:ext>
+            </a:extLst>
+          </p:cNvPr>
+          <p:cNvSpPr>
+            <a:spLocks noGrp="1"/>
+          </p:cNvSpPr>
+          <p:nvPr/>
+        </p:nvSpPr>
+        <p:spPr>
+          <a:xfrm>
+            <a:off x="8829675" y="4838700"/>
+            <a:ext cx="257175" cy="281910"/>
+          </a:xfrm>
+          <a:prstGeom prst="rect">
+            <a:avLst/>
+          </a:prstGeom>
+          <a:noFill/>
+          <a:ln>
+            <a:noFill/>
+          </a:ln>
+        </p:spPr>
+        <p:txBody>
+          <a:bodyPr spcFirstLastPara="1" wrap="square" lIns="0" tIns="0" rIns="0" bIns="0" anchor="t">
+            <a:noAutofit/>
+          </a:bodyPr>
+          <a:lstStyle/>
+          <a:p>
+            <a:pPr marL="0" marR="0" lvl="0" indent="0" algn="l">
+              <a:lnSpc>
+                <a:spcPct val="100000"/>
+              </a:lnSpc>
+              <a:spcBef>
+                <a:spcPts val="0"/>
+              </a:spcBef>
+              <a:spcAft>
+                <a:spcPts val="0"/>
+              </a:spcAft>
+              <a:buClr>
+                <a:srgbClr val="000000"/>
+              </a:buClr>
+              <a:buSzPts val="1400"/>
+              <a:buFont typeface="Arial"/>
+              <a:buNone/>
+              <a:defRPr sz="1125">
+                <a:solidFill>
+                  <a:srgbClr val="000000"/>
+                </a:solidFill>
+                <a:latin typeface="Arial"/>
+                <a:ea typeface="Arial"/>
+                <a:cs typeface="Arial"/>
+              </a:defRPr>
+            </a:pPr>
+            <a:r>
+              <a:rPr sz="1125" b="0" i="0" u="none" cap="none">
+                <a:solidFill>
+                  <a:srgbClr val="000000"/>
+                </a:solidFill>
+                <a:latin typeface="Arial"/>
+                <a:ea typeface="Arial"/>
+                <a:cs typeface="Arial"/>
+              </a:rPr>
+              <a:t>13</a:t>
+            </a:r>
+            <a:endParaRPr sz="1100" b="0" i="0" u="none" cap="none">
+              <a:solidFill>
+                <a:srgbClr val="000000"/>
+              </a:solidFill>
+              <a:latin typeface="Arial"/>
+              <a:ea typeface="Arial"/>
+              <a:cs typeface="Arial"/>
+            </a:endParaRPr>
+          </a:p>
+        </p:txBody>
+      </p:sp>
+      <p:sp>
+        <p:nvSpPr>
+          <p:cNvPr id="2" name="TextBox 1">
+            <a:extLst>
+              <a:ext uri="{FF2B5EF4-FFF2-40B4-BE49-F238E27FC236}">
+                <a16:creationId xmlns:a16="http://schemas.microsoft.com/office/drawing/2014/main" id="{C03B32CF-B251-58B0-7BAB-AFB6BCFA3973}"/>
+              </a:ext>
+            </a:extLst>
+          </p:cNvPr>
+          <p:cNvSpPr>
+            <a:spLocks noGrp="1"/>
+          </p:cNvSpPr>
+          <p:nvPr/>
+        </p:nvSpPr>
+        <p:spPr>
+          <a:xfrm>
+            <a:off x="209550" y="4810125"/>
+            <a:ext cx="2381250" cy="365760"/>
+          </a:xfrm>
+          <a:prstGeom prst="rect">
+            <a:avLst/>
+          </a:prstGeom>
+          <a:noFill/>
+        </p:spPr>
+        <p:txBody>
+          <a:bodyPr wrap="square" lIns="0" tIns="0" rIns="0" bIns="0">
+            <a:noAutofit/>
+          </a:bodyPr>
+          <a:lstStyle/>
+          <a:p>
+            <a:pPr marL="6350" marR="0" lvl="0" algn="l">
+              <a:lnSpc>
+                <a:spcPct val="90000"/>
+              </a:lnSpc>
+              <a:spcBef>
+                <a:spcPts val="800"/>
+              </a:spcBef>
+              <a:spcAft>
+                <a:spcPts val="0"/>
+              </a:spcAft>
+              <a:buClr>
+                <a:schemeClr val="dk1"/>
+              </a:buClr>
+              <a:buSzPts val="2100"/>
+              <a:buNone/>
+              <a:defRPr sz="1350">
+                <a:solidFill>
+                  <a:srgbClr val="000000"/>
+                </a:solidFill>
+                <a:latin typeface="Arial"/>
+                <a:ea typeface="Arial"/>
+                <a:cs typeface="Arial"/>
+              </a:defRPr>
+            </a:pPr>
+            <a:r>
+              <a:rPr sz="1350">
+                <a:solidFill>
+                  <a:srgbClr val="000000"/>
+                </a:solidFill>
+                <a:latin typeface="Arial"/>
+                <a:ea typeface="Arial"/>
+                <a:cs typeface="Arial"/>
+              </a:rPr>
+              <a:t>Fall 2026</a:t>
+            </a:r>
+            <a:endParaRPr sz="1400">
+              <a:solidFill>
+                <a:schemeClr val="dk1"/>
+              </a:solidFill>
+            </a:endParaRPr>
+          </a:p>
+        </p:txBody>
+      </p:sp>
+      <p:sp>
+        <p:nvSpPr>
+          <p:cNvPr id="86" name="Slide introduction">
+            <a:extLst>
+              <a:ext uri="{FF2B5EF4-FFF2-40B4-BE49-F238E27FC236}">
+                <a16:creationId xmlns:a16="http://schemas.microsoft.com/office/drawing/2014/main" id="{B8F1483B-FB4D-492E-94FB-23C7526FDDD6}"/>
+              </a:ext>
+            </a:extLst>
+          </p:cNvPr>
+          <p:cNvSpPr>
+            <a:spLocks noGrp="1"/>
+          </p:cNvSpPr>
+          <p:nvPr/>
+        </p:nvSpPr>
+        <p:spPr>
+          <a:xfrm>
+            <a:off x="714375" y="1438275"/>
+            <a:ext cx="7734300" cy="485775"/>
+          </a:xfrm>
+          <a:prstGeom prst="rect">
+            <a:avLst/>
+          </a:prstGeom>
+          <a:noFill/>
+          <a:ln w="0">
+            <a:noFill/>
+          </a:ln>
+        </p:spPr>
+        <p:txBody>
+          <a:bodyPr wrap="square" lIns="0" tIns="0" rIns="0" bIns="0" anchor="t">
+            <a:noAutofit/>
+          </a:bodyPr>
+          <a:lstStyle/>
+          <a:p>
+            <a:pPr>
+              <a:lnSpc>
+                <a:spcPct val="108000"/>
+              </a:lnSpc>
+              <a:buNone/>
+              <a:defRPr sz="1650" b="0">
+                <a:solidFill>
+                  <a:srgbClr val="404040"/>
+                </a:solidFill>
+                <a:latin typeface="Arial"/>
+                <a:ea typeface="Arial"/>
+                <a:cs typeface="Arial"/>
+              </a:defRPr>
+            </a:pPr>
+            <a:r>
+              <a:rPr sz="1650" b="0">
+                <a:solidFill>
+                  <a:srgbClr val="404040"/>
+                </a:solidFill>
+                <a:latin typeface="Arial"/>
+                <a:ea typeface="Arial"/>
+                <a:cs typeface="Arial"/>
+              </a:rPr>
+              <a:t>Open floor</a:t>
+            </a:r>
+          </a:p>
+        </p:txBody>
+      </p:sp>
+      <p:sp>
+        <p:nvSpPr>
+          <p:cNvPr id="87" name="Main bullets">
+            <a:extLst>
+              <a:ext uri="{FF2B5EF4-FFF2-40B4-BE49-F238E27FC236}">
+                <a16:creationId xmlns:a16="http://schemas.microsoft.com/office/drawing/2014/main" id="{211AE939-D7DF-44D9-A71C-20127A8F71E3}"/>
+              </a:ext>
+            </a:extLst>
+          </p:cNvPr>
+          <p:cNvSpPr>
+            <a:spLocks noGrp="1"/>
+          </p:cNvSpPr>
+          <p:nvPr/>
+        </p:nvSpPr>
+        <p:spPr>
+          <a:xfrm>
+            <a:off x="714375" y="1971675"/>
+            <a:ext cx="7734300" cy="2905125"/>
+          </a:xfrm>
+          <a:prstGeom prst="rect">
+            <a:avLst/>
+          </a:prstGeom>
+          <a:noFill/>
+          <a:ln w="0">
+            <a:noFill/>
+          </a:ln>
+        </p:spPr>
+        <p:txBody>
+          <a:bodyPr wrap="square" lIns="0" tIns="0" rIns="0" bIns="0" anchor="t">
+            <a:noAutofit/>
+          </a:bodyPr>
+          <a:lstStyle/>
+          <a:p>
+            <a:pPr marL="203200" indent="-127000">
+              <a:lnSpc>
+                <a:spcPct val="108000"/>
+              </a:lnSpc>
+              <a:spcAft>
+                <a:spcPts val="1200"/>
+              </a:spcAft>
+              <a:buChar char="•"/>
+              <a:defRPr sz="1800" b="0">
+                <a:solidFill>
+                  <a:srgbClr val="404040"/>
+                </a:solidFill>
+                <a:latin typeface="Arial"/>
+                <a:ea typeface="Arial"/>
+                <a:cs typeface="Arial"/>
+              </a:defRPr>
+            </a:pPr>
+            <a:r>
+              <a:rPr sz="1800" b="0">
+                <a:solidFill>
+                  <a:srgbClr val="404040"/>
+                </a:solidFill>
+                <a:latin typeface="Arial"/>
+                <a:ea typeface="Arial"/>
+                <a:cs typeface="Arial"/>
+              </a:rPr>
+              <a:t>Questions on this week's tasks or the paper topic?</a:t>
+            </a:r>
+          </a:p>
+          <a:p>
+            <a:pPr marL="203200" indent="-127000">
+              <a:lnSpc>
+                <a:spcPct val="108000"/>
+              </a:lnSpc>
+              <a:spcAft>
+                <a:spcPts val="1200"/>
+              </a:spcAft>
+              <a:buChar char="•"/>
+              <a:defRPr sz="1800" b="0">
+                <a:solidFill>
+                  <a:srgbClr val="404040"/>
+                </a:solidFill>
+                <a:latin typeface="Arial"/>
+                <a:ea typeface="Arial"/>
+                <a:cs typeface="Arial"/>
+              </a:defRPr>
+            </a:pPr>
+            <a:r>
+              <a:rPr sz="1800" b="0">
+                <a:solidFill>
+                  <a:srgbClr val="404040"/>
+                </a:solidFill>
+                <a:latin typeface="Arial"/>
+                <a:ea typeface="Arial"/>
+                <a:cs typeface="Arial"/>
+              </a:rPr>
+              <a:t>Volunteers for the rough team split?</a:t>
+            </a:r>
+          </a:p>
+        </p:txBody>
+      </p:sp>
+    </p:spTree>
+  </p:cSld>
+  <p:clrMapOvr>
+    <a:masterClrMapping/>
+  </p:clrMapOvr>
+</p:sld>
+</file>
+
+<file path=ppt/slides/slide3.xml><?xml version="1.0" encoding="utf-8"?>
 <p:sld xmlns:a="http://schemas.openxmlformats.org/drawingml/2006/main" xmlns:r="http://schemas.openxmlformats.org/officeDocument/2006/relationships" xmlns:p="http://schemas.openxmlformats.org/presentationml/2006/main">
   <p:cSld>
     <p:spTree>
@@ -8471,7 +16463,7 @@
                 <a:ea typeface="Arial"/>
                 <a:cs typeface="Arial"/>
               </a:rPr>
-              <a:t>Research scope</a:t>
+              <a:t>Plasma-source physics</a:t>
             </a:r>
             <a:endParaRPr/>
           </a:p>
@@ -8614,7 +16606,7 @@
       </p:sp>
       <p:pic>
         <p:nvPicPr>
-          <p:cNvPr id="90" name="Google Shape;78;p16"/>
+          <p:cNvPr id="92" name="Google Shape;78;p16"/>
           <p:cNvPicPr>
             <a:picLocks noChangeAspect="1"/>
           </p:cNvPicPr>
@@ -8642,7 +16634,7 @@
       </p:pic>
       <p:pic>
         <p:nvPicPr>
-          <p:cNvPr id="91" name="Google Shape;79;p16"/>
+          <p:cNvPr id="93" name="Google Shape;79;p16"/>
           <p:cNvPicPr>
             <a:picLocks noChangeAspect="1"/>
           </p:cNvPicPr>
@@ -8670,7 +16662,7 @@
       </p:pic>
       <p:cxnSp>
         <p:nvCxnSpPr>
-          <p:cNvPr id="92" name="Google Shape;80;p16"/>
+          <p:cNvPr id="94" name="Google Shape;80;p16"/>
           <p:cNvCxnSpPr/>
           <p:nvPr/>
         </p:nvCxnSpPr>
@@ -8695,7 +16687,7 @@
       </p:cxnSp>
       <p:pic>
         <p:nvPicPr>
-          <p:cNvPr id="93" name="Google Shape;81;p16"/>
+          <p:cNvPr id="95" name="Google Shape;81;p16"/>
           <p:cNvPicPr>
             <a:picLocks noChangeAspect="1"/>
           </p:cNvPicPr>
@@ -8788,7 +16780,7 @@
                 <a:ea typeface="Arial"/>
                 <a:cs typeface="Arial"/>
               </a:rPr>
-              <a:t>2</a:t>
+              <a:t>3</a:t>
             </a:r>
             <a:endParaRPr sz="1100" b="0" i="0" u="none" cap="none">
               <a:solidFill>
@@ -8876,10 +16868,10 @@
       </p:sp>
       <p:sp>
         <p:nvSpPr>
-          <p:cNvPr id="86" name="Main bullets">
+          <p:cNvPr id="86" name="Image commentary">
             <a:extLst>
               <a:ext uri="{FF2B5EF4-FFF2-40B4-BE49-F238E27FC236}">
-                <a16:creationId xmlns:a16="http://schemas.microsoft.com/office/drawing/2014/main" id="{959ADAE8-AE81-4B6A-957C-54ACA1F407A0}"/>
+                <a16:creationId xmlns:a16="http://schemas.microsoft.com/office/drawing/2014/main" id="{344320F0-F0A9-4293-B214-A90B977DB207}"/>
               </a:ext>
             </a:extLst>
           </p:cNvPr>
@@ -8891,7 +16883,7 @@
         <p:spPr>
           <a:xfrm>
             <a:off x="714375" y="1619250"/>
-            <a:ext cx="7734300" cy="2905125"/>
+            <a:ext cx="3162300" cy="2619375"/>
           </a:xfrm>
           <a:prstGeom prst="rect">
             <a:avLst/>
@@ -8915,7 +16907,7 @@
                 <a:spcPts val="1200"/>
               </a:spcAft>
               <a:buChar char="•"/>
-              <a:defRPr sz="1800" b="0">
+              <a:defRPr sz="1500" b="0">
                 <a:solidFill>
                   <a:srgbClr val="404040"/>
                 </a:solidFill>
@@ -8925,7 +16917,7 @@
               </a:defRPr>
             </a:pPr>
             <a:r>
-              <a:rPr sz="1800" b="0">
+              <a:rPr sz="1500" b="0">
                 <a:solidFill>
                   <a:srgbClr val="404040"/>
                 </a:solidFill>
@@ -8933,7 +16925,7 @@
                 <a:ea typeface="Arial"/>
                 <a:cs typeface="Arial"/>
               </a:rPr>
-              <a:t>Scientific visualization within Plasma Source</a:t>
+              <a:t>Reference device: Gott &amp; Xu’s microplasma cathode</a:t>
             </a:r>
           </a:p>
           <a:p>
@@ -8945,7 +16937,7 @@
                 <a:spcPts val="1200"/>
               </a:spcAft>
               <a:buChar char="•"/>
-              <a:defRPr sz="1800" b="0">
+              <a:defRPr sz="1500" b="0">
                 <a:solidFill>
                   <a:srgbClr val="404040"/>
                 </a:solidFill>
@@ -8955,7 +16947,7 @@
               </a:defRPr>
             </a:pPr>
             <a:r>
-              <a:rPr sz="1800" b="0">
+              <a:rPr sz="1500" b="0">
                 <a:solidFill>
                   <a:srgbClr val="404040"/>
                 </a:solidFill>
@@ -8963,7 +16955,7 @@
                 <a:ea typeface="Arial"/>
                 <a:cs typeface="Arial"/>
               </a:rPr>
-              <a:t>Extend particle visualization to engineering geometry and field data</a:t>
+              <a:t>Electron-emission models for the tungsten electrode</a:t>
             </a:r>
           </a:p>
           <a:p>
@@ -8975,7 +16967,7 @@
                 <a:spcPts val="1200"/>
               </a:spcAft>
               <a:buChar char="•"/>
-              <a:defRPr sz="1800" b="0">
+              <a:defRPr sz="1500" b="0">
                 <a:solidFill>
                   <a:srgbClr val="404040"/>
                 </a:solidFill>
@@ -8985,7 +16977,7 @@
               </a:defRPr>
             </a:pPr>
             <a:r>
-              <a:rPr sz="1800" b="0">
+              <a:rPr sz="1500" b="0">
                 <a:solidFill>
                   <a:srgbClr val="404040"/>
                 </a:solidFill>
@@ -8993,7 +16985,7 @@
                 <a:ea typeface="Arial"/>
                 <a:cs typeface="Arial"/>
               </a:rPr>
-              <a:t>Develop scientific figures for papers and technical reviews</a:t>
+              <a:t>Electron-impact excitation and ionization of argon</a:t>
             </a:r>
           </a:p>
           <a:p>
@@ -9005,7 +16997,7 @@
                 <a:spcPts val="1200"/>
               </a:spcAft>
               <a:buChar char="•"/>
-              <a:defRPr sz="1800" b="0">
+              <a:defRPr sz="1500" b="0">
                 <a:solidFill>
                   <a:srgbClr val="404040"/>
                 </a:solidFill>
@@ -9015,7 +17007,7 @@
               </a:defRPr>
             </a:pPr>
             <a:r>
-              <a:rPr sz="1800" b="0">
+              <a:rPr sz="1500" b="0">
                 <a:solidFill>
                   <a:srgbClr val="404040"/>
                 </a:solidFill>
@@ -9023,11 +17015,645 @@
                 <a:ea typeface="Arial"/>
                 <a:cs typeface="Arial"/>
               </a:rPr>
-              <a:t>This semester: Club homepage for research results and visualizations</a:t>
+              <a:t>Metastable argon and stepwise ionization pathways</a:t>
             </a:r>
           </a:p>
         </p:txBody>
       </p:sp>
+      <p:pic>
+        <p:nvPicPr>
+          <p:cNvPr id="99" name="Picture 98"/>
+          <p:cNvPicPr>
+            <a:picLocks noChangeAspect="1"/>
+          </p:cNvPicPr>
+          <p:nvPr/>
+        </p:nvPicPr>
+        <p:blipFill>
+          <a:blip r:embed="rId6"/>
+          <a:stretch/>
+        </p:blipFill>
+        <p:spPr>
+          <a:xfrm>
+            <a:off x="4191000" y="1897742"/>
+            <a:ext cx="4267200" cy="2157641"/>
+          </a:xfrm>
+          <a:prstGeom prst="rect">
+            <a:avLst/>
+          </a:prstGeom>
+        </p:spPr>
+      </p:pic>
+    </p:spTree>
+    <p:extLst>
+      <p:ext uri="{BB962C8B-B14F-4D97-AF65-F5344CB8AC3E}">
+        <p14:creationId xmlns:p14="http://schemas.microsoft.com/office/powerpoint/2010/main" val="4031246533"/>
+      </p:ext>
+    </p:extLst>
+  </p:cSld>
+  <p:clrMapOvr>
+    <a:masterClrMapping/>
+  </p:clrMapOvr>
+</p:sld>
+</file>
+
+<file path=ppt/slides/slide5.xml><?xml version="1.0" encoding="utf-8"?>
+<p:sld xmlns:a="http://schemas.openxmlformats.org/drawingml/2006/main" xmlns:r="http://schemas.openxmlformats.org/officeDocument/2006/relationships" xmlns:p="http://schemas.openxmlformats.org/presentationml/2006/main">
+  <p:cSld>
+    <p:spTree>
+      <p:nvGrpSpPr>
+        <p:cNvPr id="1" name=""/>
+        <p:cNvGrpSpPr/>
+        <p:nvPr/>
+      </p:nvGrpSpPr>
+      <p:grpSpPr>
+        <a:xfrm>
+          <a:off x="0" y="0"/>
+          <a:ext cx="0" cy="0"/>
+          <a:chOff x="0" y="0"/>
+          <a:chExt cx="0" cy="0"/>
+        </a:xfrm>
+      </p:grpSpPr>
+      <p:sp>
+        <p:nvSpPr>
+          <p:cNvPr id="74" name="Google Shape;74;p16">
+            <a:extLst>
+              <a:ext uri="{FF2B5EF4-FFF2-40B4-BE49-F238E27FC236}">
+                <a16:creationId xmlns:a16="http://schemas.microsoft.com/office/drawing/2014/main" id="{F29C6079-CF50-3950-F7B3-37C5016CD1D4}"/>
+              </a:ext>
+            </a:extLst>
+          </p:cNvPr>
+          <p:cNvSpPr>
+            <a:spLocks noGrp="1"/>
+          </p:cNvSpPr>
+          <p:nvPr>
+            <p:ph type="title"/>
+          </p:nvPr>
+        </p:nvSpPr>
+        <p:spPr>
+          <a:xfrm>
+            <a:off x="695325" y="828675"/>
+            <a:ext cx="7953375" cy="619125"/>
+          </a:xfrm>
+          <a:prstGeom prst="rect">
+            <a:avLst/>
+          </a:prstGeom>
+          <a:noFill/>
+          <a:ln>
+            <a:noFill/>
+          </a:ln>
+        </p:spPr>
+        <p:txBody>
+          <a:bodyPr spcFirstLastPara="1" wrap="square" lIns="0" tIns="0" rIns="0" bIns="0" anchor="t">
+            <a:noAutofit/>
+          </a:bodyPr>
+          <a:lstStyle/>
+          <a:p>
+            <a:pPr marL="0" lvl="0" indent="0" algn="l">
+              <a:lnSpc>
+                <a:spcPct val="90000"/>
+              </a:lnSpc>
+              <a:spcBef>
+                <a:spcPts val="0"/>
+              </a:spcBef>
+              <a:spcAft>
+                <a:spcPts val="0"/>
+              </a:spcAft>
+              <a:buClr>
+                <a:schemeClr val="dk1"/>
+              </a:buClr>
+              <a:buSzPts val="3000"/>
+              <a:buFont typeface="Arial"/>
+              <a:buNone/>
+              <a:defRPr sz="3000" b="1">
+                <a:solidFill>
+                  <a:srgbClr val="000000"/>
+                </a:solidFill>
+                <a:latin typeface="Arial"/>
+                <a:ea typeface="Arial"/>
+                <a:cs typeface="Arial"/>
+              </a:defRPr>
+            </a:pPr>
+            <a:r>
+              <a:rPr sz="3000" b="1">
+                <a:solidFill>
+                  <a:srgbClr val="000000"/>
+                </a:solidFill>
+                <a:latin typeface="Arial"/>
+                <a:ea typeface="Arial"/>
+                <a:cs typeface="Arial"/>
+              </a:rPr>
+              <a:t>Particle-state visualization</a:t>
+            </a:r>
+            <a:endParaRPr/>
+          </a:p>
+        </p:txBody>
+      </p:sp>
+      <p:sp>
+        <p:nvSpPr>
+          <p:cNvPr id="76" name="Google Shape;76;p16">
+            <a:extLst>
+              <a:ext uri="{FF2B5EF4-FFF2-40B4-BE49-F238E27FC236}">
+                <a16:creationId xmlns:a16="http://schemas.microsoft.com/office/drawing/2014/main" id="{C50CF39B-81F0-A7BF-E4FB-18A3BA818FA8}"/>
+              </a:ext>
+            </a:extLst>
+          </p:cNvPr>
+          <p:cNvSpPr>
+            <a:spLocks noGrp="1"/>
+          </p:cNvSpPr>
+          <p:nvPr/>
+        </p:nvSpPr>
+        <p:spPr>
+          <a:xfrm>
+            <a:off x="0" y="-4697"/>
+            <a:ext cx="9144000" cy="580200"/>
+          </a:xfrm>
+          <a:prstGeom prst="rect">
+            <a:avLst/>
+          </a:prstGeom>
+          <a:solidFill>
+            <a:srgbClr val="11284C"/>
+          </a:solidFill>
+          <a:ln>
+            <a:noFill/>
+          </a:ln>
+        </p:spPr>
+        <p:txBody>
+          <a:bodyPr spcFirstLastPara="1" wrap="square" lIns="68575" tIns="34275" rIns="68575" bIns="34275" anchor="ctr">
+            <a:noAutofit/>
+          </a:bodyPr>
+          <a:lstStyle/>
+          <a:p>
+            <a:pPr marL="0" marR="0" lvl="0" indent="0" algn="ctr">
+              <a:lnSpc>
+                <a:spcPct val="100000"/>
+              </a:lnSpc>
+              <a:spcBef>
+                <a:spcPts val="0"/>
+              </a:spcBef>
+              <a:spcAft>
+                <a:spcPts val="0"/>
+              </a:spcAft>
+              <a:buClr>
+                <a:srgbClr val="000000"/>
+              </a:buClr>
+              <a:buSzPts val="1400"/>
+              <a:buFont typeface="Arial"/>
+              <a:buNone/>
+            </a:pPr>
+            <a:endParaRPr sz="1400" b="0" i="0" u="none" cap="none">
+              <a:solidFill>
+                <a:schemeClr val="lt1"/>
+              </a:solidFill>
+              <a:latin typeface="Arial"/>
+              <a:ea typeface="Arial"/>
+              <a:cs typeface="Arial"/>
+            </a:endParaRPr>
+          </a:p>
+        </p:txBody>
+      </p:sp>
+      <p:sp>
+        <p:nvSpPr>
+          <p:cNvPr id="77" name="Google Shape;77;p16">
+            <a:extLst>
+              <a:ext uri="{FF2B5EF4-FFF2-40B4-BE49-F238E27FC236}">
+                <a16:creationId xmlns:a16="http://schemas.microsoft.com/office/drawing/2014/main" id="{E003ECB4-68A0-AF72-FDFD-EB7C2DD32890}"/>
+              </a:ext>
+            </a:extLst>
+          </p:cNvPr>
+          <p:cNvSpPr>
+            <a:spLocks noGrp="1"/>
+          </p:cNvSpPr>
+          <p:nvPr/>
+        </p:nvSpPr>
+        <p:spPr>
+          <a:xfrm>
+            <a:off x="6349014" y="50217"/>
+            <a:ext cx="2739000" cy="500100"/>
+          </a:xfrm>
+          <a:prstGeom prst="rect">
+            <a:avLst/>
+          </a:prstGeom>
+          <a:noFill/>
+          <a:ln>
+            <a:noFill/>
+          </a:ln>
+        </p:spPr>
+        <p:txBody>
+          <a:bodyPr spcFirstLastPara="1" wrap="square" lIns="68575" tIns="34275" rIns="68575" bIns="34275" anchor="t">
+            <a:spAutoFit/>
+          </a:bodyPr>
+          <a:lstStyle/>
+          <a:p>
+            <a:pPr marL="0" marR="0" lvl="0" indent="0" algn="l">
+              <a:lnSpc>
+                <a:spcPct val="100000"/>
+              </a:lnSpc>
+              <a:spcBef>
+                <a:spcPts val="0"/>
+              </a:spcBef>
+              <a:spcAft>
+                <a:spcPts val="0"/>
+              </a:spcAft>
+              <a:buClr>
+                <a:srgbClr val="000000"/>
+              </a:buClr>
+              <a:buSzPts val="1400"/>
+              <a:buFont typeface="Arial"/>
+              <a:buNone/>
+            </a:pPr>
+            <a:r>
+              <a:rPr sz="1400" b="0" i="0" u="none" cap="none">
+                <a:solidFill>
+                  <a:schemeClr val="lt1"/>
+                </a:solidFill>
+                <a:latin typeface="Arial"/>
+                <a:ea typeface="Arial"/>
+                <a:cs typeface="Arial"/>
+              </a:rPr>
+              <a:t>Electric Propulsion Initiative - ION-I</a:t>
+            </a:r>
+            <a:endParaRPr sz="1100" b="0" i="0" u="none" cap="none">
+              <a:solidFill>
+                <a:srgbClr val="000000"/>
+              </a:solidFill>
+              <a:latin typeface="Arial"/>
+              <a:ea typeface="Arial"/>
+              <a:cs typeface="Arial"/>
+            </a:endParaRPr>
+          </a:p>
+        </p:txBody>
+      </p:sp>
+      <p:pic>
+        <p:nvPicPr>
+          <p:cNvPr id="92" name="Google Shape;78;p16"/>
+          <p:cNvPicPr>
+            <a:picLocks noChangeAspect="1"/>
+          </p:cNvPicPr>
+          <p:nvPr/>
+        </p:nvPicPr>
+        <p:blipFill rotWithShape="1">
+          <a:blip r:embed="rId3">
+            <a:alphaModFix/>
+          </a:blip>
+          <a:srcRect/>
+          <a:stretch/>
+        </p:blipFill>
+        <p:spPr>
+          <a:xfrm>
+            <a:off x="151161" y="50231"/>
+            <a:ext cx="326328" cy="470421"/>
+          </a:xfrm>
+          <a:prstGeom prst="rect">
+            <a:avLst/>
+          </a:prstGeom>
+          <a:ln>
+            <a:noFill/>
+          </a:ln>
+        </p:spPr>
+      </p:pic>
+      <p:pic>
+        <p:nvPicPr>
+          <p:cNvPr id="93" name="Google Shape;79;p16"/>
+          <p:cNvPicPr>
+            <a:picLocks noChangeAspect="1"/>
+          </p:cNvPicPr>
+          <p:nvPr/>
+        </p:nvPicPr>
+        <p:blipFill rotWithShape="1">
+          <a:blip r:embed="rId4">
+            <a:alphaModFix/>
+          </a:blip>
+          <a:srcRect/>
+          <a:stretch/>
+        </p:blipFill>
+        <p:spPr>
+          <a:xfrm>
+            <a:off x="628650" y="-103200"/>
+            <a:ext cx="533165" cy="754089"/>
+          </a:xfrm>
+          <a:prstGeom prst="rect">
+            <a:avLst/>
+          </a:prstGeom>
+          <a:ln>
+            <a:noFill/>
+          </a:ln>
+        </p:spPr>
+      </p:pic>
+      <p:cxnSp>
+        <p:nvCxnSpPr>
+          <p:cNvPr id="94" name="Google Shape;80;p16"/>
+          <p:cNvCxnSpPr/>
+          <p:nvPr/>
+        </p:nvCxnSpPr>
+        <p:spPr>
+          <a:xfrm>
+            <a:off x="589359" y="50231"/>
+            <a:ext cx="0" cy="454500"/>
+          </a:xfrm>
+          <a:prstGeom prst="straightConnector1">
+            <a:avLst/>
+          </a:prstGeom>
+          <a:ln w="19050" cap="flat">
+            <a:solidFill>
+              <a:schemeClr val="lt1"/>
+            </a:solidFill>
+            <a:prstDash val="solid"/>
+            <a:miter/>
+            <a:headEnd type="none" w="sm" len="sm"/>
+            <a:tailEnd type="none" w="sm" len="sm"/>
+          </a:ln>
+        </p:spPr>
+      </p:cxnSp>
+      <p:pic>
+        <p:nvPicPr>
+          <p:cNvPr id="95" name="Google Shape;81;p16"/>
+          <p:cNvPicPr>
+            <a:picLocks noChangeAspect="1"/>
+          </p:cNvPicPr>
+          <p:nvPr/>
+        </p:nvPicPr>
+        <p:blipFill rotWithShape="1">
+          <a:blip r:embed="rId5">
+            <a:alphaModFix/>
+          </a:blip>
+          <a:srcRect/>
+          <a:stretch/>
+        </p:blipFill>
+        <p:spPr>
+          <a:xfrm>
+            <a:off x="7732825" y="3955187"/>
+            <a:ext cx="1239726" cy="1753416"/>
+          </a:xfrm>
+          <a:prstGeom prst="rect">
+            <a:avLst/>
+          </a:prstGeom>
+          <a:ln>
+            <a:noFill/>
+          </a:ln>
+        </p:spPr>
+      </p:pic>
+      <p:sp>
+        <p:nvSpPr>
+          <p:cNvPr id="82" name="Google Shape;82;p16">
+            <a:extLst>
+              <a:ext uri="{FF2B5EF4-FFF2-40B4-BE49-F238E27FC236}">
+                <a16:creationId xmlns:a16="http://schemas.microsoft.com/office/drawing/2014/main" id="{D6B236AD-7344-733D-C8D4-7FFF4844EC55}"/>
+              </a:ext>
+            </a:extLst>
+          </p:cNvPr>
+          <p:cNvSpPr>
+            <a:spLocks noGrp="1"/>
+          </p:cNvSpPr>
+          <p:nvPr/>
+        </p:nvSpPr>
+        <p:spPr>
+          <a:xfrm>
+            <a:off x="8829675" y="4838700"/>
+            <a:ext cx="257175" cy="281910"/>
+          </a:xfrm>
+          <a:prstGeom prst="rect">
+            <a:avLst/>
+          </a:prstGeom>
+          <a:noFill/>
+          <a:ln>
+            <a:noFill/>
+          </a:ln>
+        </p:spPr>
+        <p:txBody>
+          <a:bodyPr spcFirstLastPara="1" wrap="square" lIns="0" tIns="0" rIns="0" bIns="0" anchor="t">
+            <a:noAutofit/>
+          </a:bodyPr>
+          <a:lstStyle/>
+          <a:p>
+            <a:pPr marL="0" marR="0" lvl="0" indent="0" algn="l">
+              <a:lnSpc>
+                <a:spcPct val="100000"/>
+              </a:lnSpc>
+              <a:spcBef>
+                <a:spcPts val="0"/>
+              </a:spcBef>
+              <a:spcAft>
+                <a:spcPts val="0"/>
+              </a:spcAft>
+              <a:buClr>
+                <a:srgbClr val="000000"/>
+              </a:buClr>
+              <a:buSzPts val="1400"/>
+              <a:buFont typeface="Arial"/>
+              <a:buNone/>
+              <a:defRPr sz="1125">
+                <a:solidFill>
+                  <a:srgbClr val="000000"/>
+                </a:solidFill>
+                <a:latin typeface="Arial"/>
+                <a:ea typeface="Arial"/>
+                <a:cs typeface="Arial"/>
+              </a:defRPr>
+            </a:pPr>
+            <a:r>
+              <a:rPr sz="1125" b="0" i="0" u="none" cap="none">
+                <a:solidFill>
+                  <a:srgbClr val="000000"/>
+                </a:solidFill>
+                <a:latin typeface="Arial"/>
+                <a:ea typeface="Arial"/>
+                <a:cs typeface="Arial"/>
+              </a:rPr>
+              <a:t>5</a:t>
+            </a:r>
+            <a:endParaRPr sz="1100" b="0" i="0" u="none" cap="none">
+              <a:solidFill>
+                <a:srgbClr val="000000"/>
+              </a:solidFill>
+              <a:latin typeface="Arial"/>
+              <a:ea typeface="Arial"/>
+              <a:cs typeface="Arial"/>
+            </a:endParaRPr>
+          </a:p>
+        </p:txBody>
+      </p:sp>
+      <p:sp>
+        <p:nvSpPr>
+          <p:cNvPr id="2" name="TextBox 1">
+            <a:extLst>
+              <a:ext uri="{FF2B5EF4-FFF2-40B4-BE49-F238E27FC236}">
+                <a16:creationId xmlns:a16="http://schemas.microsoft.com/office/drawing/2014/main" id="{C03B32CF-B251-58B0-7BAB-AFB6BCFA3973}"/>
+              </a:ext>
+            </a:extLst>
+          </p:cNvPr>
+          <p:cNvSpPr>
+            <a:spLocks noGrp="1"/>
+          </p:cNvSpPr>
+          <p:nvPr/>
+        </p:nvSpPr>
+        <p:spPr>
+          <a:xfrm>
+            <a:off x="209550" y="4810125"/>
+            <a:ext cx="2381250" cy="365760"/>
+          </a:xfrm>
+          <a:prstGeom prst="rect">
+            <a:avLst/>
+          </a:prstGeom>
+          <a:noFill/>
+        </p:spPr>
+        <p:txBody>
+          <a:bodyPr wrap="square" lIns="0" tIns="0" rIns="0" bIns="0">
+            <a:noAutofit/>
+          </a:bodyPr>
+          <a:lstStyle/>
+          <a:p>
+            <a:pPr marL="6350" marR="0" lvl="0" algn="l">
+              <a:lnSpc>
+                <a:spcPct val="90000"/>
+              </a:lnSpc>
+              <a:spcBef>
+                <a:spcPts val="800"/>
+              </a:spcBef>
+              <a:spcAft>
+                <a:spcPts val="0"/>
+              </a:spcAft>
+              <a:buClr>
+                <a:schemeClr val="dk1"/>
+              </a:buClr>
+              <a:buSzPts val="2100"/>
+              <a:buNone/>
+              <a:defRPr sz="1350">
+                <a:solidFill>
+                  <a:srgbClr val="000000"/>
+                </a:solidFill>
+                <a:latin typeface="Arial"/>
+                <a:ea typeface="Arial"/>
+                <a:cs typeface="Arial"/>
+              </a:defRPr>
+            </a:pPr>
+            <a:r>
+              <a:rPr sz="1350">
+                <a:solidFill>
+                  <a:srgbClr val="000000"/>
+                </a:solidFill>
+                <a:latin typeface="Arial"/>
+                <a:ea typeface="Arial"/>
+                <a:cs typeface="Arial"/>
+              </a:rPr>
+              <a:t>Fall 2026</a:t>
+            </a:r>
+            <a:endParaRPr sz="1400">
+              <a:solidFill>
+                <a:schemeClr val="dk1"/>
+              </a:solidFill>
+            </a:endParaRPr>
+          </a:p>
+        </p:txBody>
+      </p:sp>
+      <p:sp>
+        <p:nvSpPr>
+          <p:cNvPr id="86" name="Slide introduction">
+            <a:extLst>
+              <a:ext uri="{FF2B5EF4-FFF2-40B4-BE49-F238E27FC236}">
+                <a16:creationId xmlns:a16="http://schemas.microsoft.com/office/drawing/2014/main" id="{8526F57D-8710-4494-82DA-EB0E0B2C5E2D}"/>
+              </a:ext>
+            </a:extLst>
+          </p:cNvPr>
+          <p:cNvSpPr>
+            <a:spLocks noGrp="1"/>
+          </p:cNvSpPr>
+          <p:nvPr/>
+        </p:nvSpPr>
+        <p:spPr>
+          <a:xfrm>
+            <a:off x="714375" y="1438275"/>
+            <a:ext cx="7734300" cy="485775"/>
+          </a:xfrm>
+          <a:prstGeom prst="rect">
+            <a:avLst/>
+          </a:prstGeom>
+          <a:noFill/>
+          <a:ln w="0">
+            <a:noFill/>
+          </a:ln>
+        </p:spPr>
+        <p:txBody>
+          <a:bodyPr wrap="square" lIns="0" tIns="0" rIns="0" bIns="0" anchor="t">
+            <a:noAutofit/>
+          </a:bodyPr>
+          <a:lstStyle/>
+          <a:p>
+            <a:pPr>
+              <a:lnSpc>
+                <a:spcPct val="108000"/>
+              </a:lnSpc>
+              <a:buNone/>
+              <a:defRPr sz="1650" b="0">
+                <a:solidFill>
+                  <a:srgbClr val="404040"/>
+                </a:solidFill>
+                <a:latin typeface="Arial"/>
+                <a:ea typeface="Arial"/>
+                <a:cs typeface="Arial"/>
+              </a:defRPr>
+            </a:pPr>
+            <a:r>
+              <a:rPr sz="1650" b="0">
+                <a:solidFill>
+                  <a:srgbClr val="404040"/>
+                </a:solidFill>
+                <a:latin typeface="Arial"/>
+                <a:ea typeface="Arial"/>
+                <a:cs typeface="Arial"/>
+              </a:rPr>
+              <a:t>505 tracked particle IDs across 150 frames</a:t>
+            </a:r>
+          </a:p>
+          <a:p>
+            <a:pPr>
+              <a:lnSpc>
+                <a:spcPct val="108000"/>
+              </a:lnSpc>
+              <a:buNone/>
+              <a:defRPr sz="1650" b="0">
+                <a:solidFill>
+                  <a:srgbClr val="404040"/>
+                </a:solidFill>
+                <a:latin typeface="Arial"/>
+                <a:ea typeface="Arial"/>
+                <a:cs typeface="Arial"/>
+              </a:defRPr>
+            </a:pPr>
+            <a:r>
+              <a:rPr sz="1650" b="0">
+                <a:solidFill>
+                  <a:srgbClr val="404040"/>
+                </a:solidFill>
+                <a:latin typeface="Arial"/>
+                <a:ea typeface="Arial"/>
+                <a:cs typeface="Arial"/>
+              </a:rPr>
+              <a:t>Neutral Ar, metastable Ar, ions and electrons</a:t>
+            </a:r>
+          </a:p>
+        </p:txBody>
+      </p:sp>
+      <p:pic>
+        <p:nvPicPr>
+          <p:cNvPr id="99" name="Picture 98"/>
+          <p:cNvPicPr>
+            <a:picLocks noChangeAspect="1"/>
+          </p:cNvPicPr>
+          <p:nvPr/>
+        </p:nvPicPr>
+        <p:blipFill>
+          <a:blip r:embed="rId6"/>
+          <a:stretch/>
+        </p:blipFill>
+        <p:spPr>
+          <a:xfrm>
+            <a:off x="2280114" y="2019300"/>
+            <a:ext cx="4602822" cy="2400300"/>
+          </a:xfrm>
+          <a:prstGeom prst="rect">
+            <a:avLst/>
+          </a:prstGeom>
+        </p:spPr>
+      </p:pic>
     </p:spTree>
     <p:extLst>
       <p:ext uri="{BB962C8B-B14F-4D97-AF65-F5344CB8AC3E}">
